--- a/Presentation1.pptx
+++ b/Presentation1.pptx
@@ -7,6 +7,7 @@
   <p:sldIdLst>
     <p:sldId id="256" r:id="rId2"/>
     <p:sldId id="257" r:id="rId3"/>
+    <p:sldId id="258" r:id="rId4"/>
   </p:sldIdLst>
   <p:sldSz cx="12192000" cy="6858000"/>
   <p:notesSz cx="6858000" cy="9144000"/>
@@ -3372,7 +3373,7 @@
         </p:nvSpPr>
         <p:spPr>
           <a:xfrm>
-            <a:off x="3283907" y="3105834"/>
+            <a:off x="2721272" y="3105834"/>
             <a:ext cx="3374728" cy="1477328"/>
           </a:xfrm>
           <a:prstGeom prst="rect">
@@ -3406,7 +3407,7 @@
           <a:p>
             <a:r>
               <a:rPr lang="en-US" dirty="0"/>
-              <a:t>Russell Neal</a:t>
+              <a:t>SFC Russell Neal</a:t>
             </a:r>
           </a:p>
           <a:p>
@@ -3428,7 +3429,7 @@
         </p:nvSpPr>
         <p:spPr>
           <a:xfrm>
-            <a:off x="5533365" y="3105834"/>
+            <a:off x="6096000" y="3091944"/>
             <a:ext cx="3374728" cy="1477328"/>
           </a:xfrm>
           <a:prstGeom prst="rect">
@@ -3541,10 +3542,146 @@
           </a:p>
         </p:txBody>
       </p:sp>
+      <p:sp>
+        <p:nvSpPr>
+          <p:cNvPr id="5" name="TextBox 4">
+            <a:extLst>
+              <a:ext uri="{FF2B5EF4-FFF2-40B4-BE49-F238E27FC236}">
+                <a16:creationId xmlns:a16="http://schemas.microsoft.com/office/drawing/2014/main" id="{F0205CC6-C75D-6A2E-D301-8109E772C054}"/>
+              </a:ext>
+            </a:extLst>
+          </p:cNvPr>
+          <p:cNvSpPr txBox="1"/>
+          <p:nvPr/>
+        </p:nvSpPr>
+        <p:spPr>
+          <a:xfrm>
+            <a:off x="2639860" y="2567836"/>
+            <a:ext cx="6912279" cy="2031325"/>
+          </a:xfrm>
+          <a:prstGeom prst="rect">
+            <a:avLst/>
+          </a:prstGeom>
+          <a:noFill/>
+        </p:spPr>
+        <p:txBody>
+          <a:bodyPr wrap="square" rtlCol="0">
+            <a:spAutoFit/>
+          </a:bodyPr>
+          <a:lstStyle/>
+          <a:p>
+            <a:r>
+              <a:rPr lang="en-US" dirty="0"/>
+              <a:t>In-processing members into the unit relies on fragmented record-keeping across spreadsheets, paper documents, and different systems to track Airmen's progress and compliance. This lack of a centralized, authoritative source of information delays the identification of overdue actions and limits visibility into individual and unit readiness, increasing the risk of non-compliance and reduced operational effectiveness.</a:t>
+            </a:r>
+          </a:p>
+        </p:txBody>
+      </p:sp>
     </p:spTree>
     <p:extLst>
       <p:ext uri="{BB962C8B-B14F-4D97-AF65-F5344CB8AC3E}">
         <p14:creationId xmlns:p14="http://schemas.microsoft.com/office/powerpoint/2010/main" val="3243389943"/>
+      </p:ext>
+    </p:extLst>
+  </p:cSld>
+  <p:clrMapOvr>
+    <a:masterClrMapping/>
+  </p:clrMapOvr>
+</p:sld>
+</file>
+
+<file path=ppt/slides/slide3.xml><?xml version="1.0" encoding="utf-8"?>
+<p:sld xmlns:a="http://schemas.openxmlformats.org/drawingml/2006/main" xmlns:r="http://schemas.openxmlformats.org/officeDocument/2006/relationships" xmlns:p="http://schemas.openxmlformats.org/presentationml/2006/main">
+  <p:cSld>
+    <p:spTree>
+      <p:nvGrpSpPr>
+        <p:cNvPr id="1" name=""/>
+        <p:cNvGrpSpPr/>
+        <p:nvPr/>
+      </p:nvGrpSpPr>
+      <p:grpSpPr>
+        <a:xfrm>
+          <a:off x="0" y="0"/>
+          <a:ext cx="0" cy="0"/>
+          <a:chOff x="0" y="0"/>
+          <a:chExt cx="0" cy="0"/>
+        </a:xfrm>
+      </p:grpSpPr>
+      <p:sp>
+        <p:nvSpPr>
+          <p:cNvPr id="4" name="TextBox 3">
+            <a:extLst>
+              <a:ext uri="{FF2B5EF4-FFF2-40B4-BE49-F238E27FC236}">
+                <a16:creationId xmlns:a16="http://schemas.microsoft.com/office/drawing/2014/main" id="{DCCE2240-BF5A-162E-1CA8-FE6C19FA55AB}"/>
+              </a:ext>
+            </a:extLst>
+          </p:cNvPr>
+          <p:cNvSpPr txBox="1"/>
+          <p:nvPr/>
+        </p:nvSpPr>
+        <p:spPr>
+          <a:xfrm>
+            <a:off x="3283907" y="1775902"/>
+            <a:ext cx="5624186" cy="400110"/>
+          </a:xfrm>
+          <a:prstGeom prst="rect">
+            <a:avLst/>
+          </a:prstGeom>
+          <a:noFill/>
+        </p:spPr>
+        <p:txBody>
+          <a:bodyPr wrap="square" rtlCol="0">
+            <a:spAutoFit/>
+          </a:bodyPr>
+          <a:lstStyle/>
+          <a:p>
+            <a:pPr algn="ctr"/>
+            <a:r>
+              <a:rPr lang="en-US" sz="2000" b="1" dirty="0"/>
+              <a:t>Solution Statement</a:t>
+            </a:r>
+          </a:p>
+        </p:txBody>
+      </p:sp>
+      <p:sp>
+        <p:nvSpPr>
+          <p:cNvPr id="5" name="TextBox 4">
+            <a:extLst>
+              <a:ext uri="{FF2B5EF4-FFF2-40B4-BE49-F238E27FC236}">
+                <a16:creationId xmlns:a16="http://schemas.microsoft.com/office/drawing/2014/main" id="{F176186C-3418-AC0A-CC67-9AA25003975D}"/>
+              </a:ext>
+            </a:extLst>
+          </p:cNvPr>
+          <p:cNvSpPr txBox="1"/>
+          <p:nvPr/>
+        </p:nvSpPr>
+        <p:spPr>
+          <a:xfrm>
+            <a:off x="2639860" y="2567836"/>
+            <a:ext cx="6912279" cy="2031325"/>
+          </a:xfrm>
+          <a:prstGeom prst="rect">
+            <a:avLst/>
+          </a:prstGeom>
+          <a:noFill/>
+        </p:spPr>
+        <p:txBody>
+          <a:bodyPr wrap="square" rtlCol="0">
+            <a:spAutoFit/>
+          </a:bodyPr>
+          <a:lstStyle/>
+          <a:p>
+            <a:r>
+              <a:rPr lang="en-US" dirty="0"/>
+              <a:t>Our Capstone application consolidates in-processing tracking into a single centralized platform that automatically flags overdue requirements and provides real-time visibility into individual and unit-level compliance status. By replacing manual, fragmented tracking methods with an authoritative digital system, the application reduces administrative burden, accelerates identification of gaps, and strengthens overall force readiness.</a:t>
+            </a:r>
+          </a:p>
+        </p:txBody>
+      </p:sp>
+    </p:spTree>
+    <p:extLst>
+      <p:ext uri="{BB962C8B-B14F-4D97-AF65-F5344CB8AC3E}">
+        <p14:creationId xmlns:p14="http://schemas.microsoft.com/office/powerpoint/2010/main" val="495641691"/>
       </p:ext>
     </p:extLst>
   </p:cSld>

--- a/Presentation1.pptx
+++ b/Presentation1.pptx
@@ -3473,6 +3473,56 @@
           <a:p>
             <a:pPr algn="r"/>
             <a:endParaRPr lang="en-US" dirty="0"/>
+          </a:p>
+        </p:txBody>
+      </p:sp>
+      <p:sp>
+        <p:nvSpPr>
+          <p:cNvPr id="7" name="TextBox 6">
+            <a:extLst>
+              <a:ext uri="{FF2B5EF4-FFF2-40B4-BE49-F238E27FC236}">
+                <a16:creationId xmlns:a16="http://schemas.microsoft.com/office/drawing/2014/main" id="{0C1F0B94-0F8D-743A-CBA4-7B869563A0BD}"/>
+              </a:ext>
+            </a:extLst>
+          </p:cNvPr>
+          <p:cNvSpPr txBox="1"/>
+          <p:nvPr/>
+        </p:nvSpPr>
+        <p:spPr>
+          <a:xfrm>
+            <a:off x="3283907" y="5636006"/>
+            <a:ext cx="5624186" cy="1015663"/>
+          </a:xfrm>
+          <a:prstGeom prst="rect">
+            <a:avLst/>
+          </a:prstGeom>
+          <a:noFill/>
+        </p:spPr>
+        <p:txBody>
+          <a:bodyPr wrap="square" rtlCol="0">
+            <a:spAutoFit/>
+          </a:bodyPr>
+          <a:lstStyle/>
+          <a:p>
+            <a:pPr algn="ctr"/>
+            <a:r>
+              <a:rPr lang="en-US" sz="2000" b="1" dirty="0"/>
+              <a:t>#</a:t>
+            </a:r>
+            <a:r>
+              <a:rPr lang="en-US" sz="2000" b="1" dirty="0" err="1"/>
+              <a:t>todo</a:t>
+            </a:r>
+            <a:br>
+              <a:rPr lang="en-US" sz="2000" b="1" dirty="0"/>
+            </a:br>
+            <a:br>
+              <a:rPr lang="en-US" sz="2000" b="1" dirty="0"/>
+            </a:br>
+            <a:r>
+              <a:rPr lang="en-US" sz="2000" b="1" dirty="0"/>
+              <a:t>add ranks and styling</a:t>
+            </a:r>
           </a:p>
         </p:txBody>
       </p:sp>

--- a/Presentation1.pptx
+++ b/Presentation1.pptx
@@ -3389,19 +3389,19 @@
           <a:p>
             <a:r>
               <a:rPr lang="en-US" dirty="0"/>
-              <a:t>Aldebaran Fox</a:t>
+              <a:t>A1C Aldebaran Fox</a:t>
             </a:r>
           </a:p>
           <a:p>
             <a:r>
               <a:rPr lang="en-US" dirty="0"/>
-              <a:t>Alex Deabenderfer</a:t>
+              <a:t>SrA Alex Deabenderfer</a:t>
             </a:r>
           </a:p>
           <a:p>
             <a:r>
               <a:rPr lang="en-US" dirty="0"/>
-              <a:t>John Lee</a:t>
+              <a:t>A1C John Lee</a:t>
             </a:r>
           </a:p>
           <a:p>

--- a/Presentation1.pptx
+++ b/Presentation1.pptx
@@ -2,7 +2,7 @@
 <file path=ppt/presentation.xml><?xml version="1.0" encoding="utf-8"?>
 <p:presentation xmlns:a="http://schemas.openxmlformats.org/drawingml/2006/main" xmlns:r="http://schemas.openxmlformats.org/officeDocument/2006/relationships" xmlns:p="http://schemas.openxmlformats.org/presentationml/2006/main" saveSubsetFonts="1" autoCompressPictures="0">
   <p:sldMasterIdLst>
-    <p:sldMasterId id="2147483648" r:id="rId1"/>
+    <p:sldMasterId id="2147483660" r:id="rId1"/>
   </p:sldMasterIdLst>
   <p:sldIdLst>
     <p:sldId id="256" r:id="rId2"/>
@@ -128,13 +128,7 @@
       </p:grpSpPr>
       <p:sp>
         <p:nvSpPr>
-          <p:cNvPr id="2" name="Title 1">
-            <a:extLst>
-              <a:ext uri="{FF2B5EF4-FFF2-40B4-BE49-F238E27FC236}">
-                <a16:creationId xmlns:a16="http://schemas.microsoft.com/office/drawing/2014/main" id="{28D902E1-D630-7E24-0FC9-C3C8AECF4F69}"/>
-              </a:ext>
-            </a:extLst>
-          </p:cNvPr>
+          <p:cNvPr id="2" name="Title 1"/>
           <p:cNvSpPr>
             <a:spLocks noGrp="1"/>
           </p:cNvSpPr>
@@ -147,6 +141,9 @@
             <a:off x="1524000" y="1122363"/>
             <a:ext cx="9144000" cy="2387600"/>
           </a:xfrm>
+          <a:prstGeom prst="rect">
+            <a:avLst/>
+          </a:prstGeom>
         </p:spPr>
         <p:txBody>
           <a:bodyPr anchor="b"/>
@@ -165,13 +162,7 @@
       </p:sp>
       <p:sp>
         <p:nvSpPr>
-          <p:cNvPr id="3" name="Subtitle 2">
-            <a:extLst>
-              <a:ext uri="{FF2B5EF4-FFF2-40B4-BE49-F238E27FC236}">
-                <a16:creationId xmlns:a16="http://schemas.microsoft.com/office/drawing/2014/main" id="{A5379847-5612-6C65-9465-34E85205E4BA}"/>
-              </a:ext>
-            </a:extLst>
-          </p:cNvPr>
+          <p:cNvPr id="3" name="Subtitle 2"/>
           <p:cNvSpPr>
             <a:spLocks noGrp="1"/>
           </p:cNvSpPr>
@@ -184,6 +175,9 @@
             <a:off x="1524000" y="3602038"/>
             <a:ext cx="9144000" cy="1655762"/>
           </a:xfrm>
+          <a:prstGeom prst="rect">
+            <a:avLst/>
+          </a:prstGeom>
         </p:spPr>
         <p:txBody>
           <a:bodyPr/>
@@ -235,13 +229,7 @@
       </p:sp>
       <p:sp>
         <p:nvSpPr>
-          <p:cNvPr id="4" name="Date Placeholder 3">
-            <a:extLst>
-              <a:ext uri="{FF2B5EF4-FFF2-40B4-BE49-F238E27FC236}">
-                <a16:creationId xmlns:a16="http://schemas.microsoft.com/office/drawing/2014/main" id="{BB88DC05-0F13-CA7D-7720-A366AFE21110}"/>
-              </a:ext>
-            </a:extLst>
-          </p:cNvPr>
+          <p:cNvPr id="4" name="Date Placeholder 3"/>
           <p:cNvSpPr>
             <a:spLocks noGrp="1"/>
           </p:cNvSpPr>
@@ -249,68 +237,40 @@
             <p:ph type="dt" sz="half" idx="10"/>
           </p:nvPr>
         </p:nvSpPr>
-        <p:spPr/>
+        <p:spPr>
+          <a:xfrm>
+            <a:off x="574313" y="6515932"/>
+            <a:ext cx="2743200" cy="365125"/>
+          </a:xfrm>
+          <a:prstGeom prst="rect">
+            <a:avLst/>
+          </a:prstGeom>
+        </p:spPr>
         <p:txBody>
           <a:bodyPr/>
-          <a:lstStyle/>
-          <a:p>
-            <a:fld id="{1D926A6E-1A60-2B4A-8860-6ABCC5DA00C8}" type="datetimeFigureOut">
-              <a:rPr lang="en-US" smtClean="0"/>
-              <a:t>7/21/26</a:t>
-            </a:fld>
-            <a:endParaRPr lang="en-US"/>
-          </a:p>
-        </p:txBody>
-      </p:sp>
-      <p:sp>
-        <p:nvSpPr>
-          <p:cNvPr id="5" name="Footer Placeholder 4">
-            <a:extLst>
-              <a:ext uri="{FF2B5EF4-FFF2-40B4-BE49-F238E27FC236}">
-                <a16:creationId xmlns:a16="http://schemas.microsoft.com/office/drawing/2014/main" id="{D4BEA405-D4C7-34F6-B9E6-94C303217AE0}"/>
-              </a:ext>
-            </a:extLst>
-          </p:cNvPr>
-          <p:cNvSpPr>
-            <a:spLocks noGrp="1"/>
-          </p:cNvSpPr>
-          <p:nvPr>
-            <p:ph type="ftr" sz="quarter" idx="11"/>
-          </p:nvPr>
-        </p:nvSpPr>
-        <p:spPr/>
-        <p:txBody>
-          <a:bodyPr/>
-          <a:lstStyle/>
-          <a:p>
-            <a:endParaRPr lang="en-US"/>
-          </a:p>
-        </p:txBody>
-      </p:sp>
-      <p:sp>
-        <p:nvSpPr>
-          <p:cNvPr id="6" name="Slide Number Placeholder 5">
-            <a:extLst>
-              <a:ext uri="{FF2B5EF4-FFF2-40B4-BE49-F238E27FC236}">
-                <a16:creationId xmlns:a16="http://schemas.microsoft.com/office/drawing/2014/main" id="{209A152F-DAD5-D993-609F-5A0B60DF5528}"/>
-              </a:ext>
-            </a:extLst>
-          </p:cNvPr>
-          <p:cNvSpPr>
-            <a:spLocks noGrp="1"/>
-          </p:cNvSpPr>
-          <p:nvPr>
-            <p:ph type="sldNum" sz="quarter" idx="12"/>
-          </p:nvPr>
-        </p:nvSpPr>
-        <p:spPr/>
-        <p:txBody>
-          <a:bodyPr/>
-          <a:lstStyle/>
-          <a:p>
-            <a:fld id="{3CAD1949-089B-5040-A81F-BF6C5D83A7A1}" type="slidenum">
-              <a:rPr lang="en-US" smtClean="0"/>
-              <a:t>‹#›</a:t>
+          <a:lstStyle>
+            <a:lvl1pPr eaLnBrk="1" fontAlgn="auto" hangingPunct="1">
+              <a:spcBef>
+                <a:spcPts val="0"/>
+              </a:spcBef>
+              <a:spcAft>
+                <a:spcPts val="0"/>
+              </a:spcAft>
+              <a:defRPr>
+                <a:latin typeface="+mn-lt"/>
+              </a:defRPr>
+            </a:lvl1pPr>
+          </a:lstStyle>
+          <a:p>
+            <a:pPr>
+              <a:defRPr/>
+            </a:pPr>
+            <a:fld id="{B420D855-A92F-4663-AE82-AABD62D7EE0B}" type="datetimeFigureOut">
+              <a:rPr lang="en-US"/>
+              <a:pPr>
+                <a:defRPr/>
+              </a:pPr>
+              <a:t>7/22/26</a:t>
             </a:fld>
             <a:endParaRPr lang="en-US"/>
           </a:p>
@@ -319,7 +279,7 @@
     </p:spTree>
     <p:extLst>
       <p:ext uri="{BB962C8B-B14F-4D97-AF65-F5344CB8AC3E}">
-        <p14:creationId xmlns:p14="http://schemas.microsoft.com/office/powerpoint/2010/main" val="4159448709"/>
+        <p14:creationId xmlns:p14="http://schemas.microsoft.com/office/powerpoint/2010/main" val="580843226"/>
       </p:ext>
     </p:extLst>
   </p:cSld>
@@ -348,13 +308,7 @@
       </p:grpSpPr>
       <p:sp>
         <p:nvSpPr>
-          <p:cNvPr id="2" name="Title 1">
-            <a:extLst>
-              <a:ext uri="{FF2B5EF4-FFF2-40B4-BE49-F238E27FC236}">
-                <a16:creationId xmlns:a16="http://schemas.microsoft.com/office/drawing/2014/main" id="{A26E418B-8406-7546-34E3-ECA0CDB8A46B}"/>
-              </a:ext>
-            </a:extLst>
-          </p:cNvPr>
+          <p:cNvPr id="2" name="Title 1"/>
           <p:cNvSpPr>
             <a:spLocks noGrp="1"/>
           </p:cNvSpPr>
@@ -362,7 +316,15 @@
             <p:ph type="title"/>
           </p:nvPr>
         </p:nvSpPr>
-        <p:spPr/>
+        <p:spPr>
+          <a:xfrm>
+            <a:off x="838200" y="365126"/>
+            <a:ext cx="10515600" cy="1325563"/>
+          </a:xfrm>
+          <a:prstGeom prst="rect">
+            <a:avLst/>
+          </a:prstGeom>
+        </p:spPr>
         <p:txBody>
           <a:bodyPr/>
           <a:lstStyle/>
@@ -376,13 +338,7 @@
       </p:sp>
       <p:sp>
         <p:nvSpPr>
-          <p:cNvPr id="3" name="Vertical Text Placeholder 2">
-            <a:extLst>
-              <a:ext uri="{FF2B5EF4-FFF2-40B4-BE49-F238E27FC236}">
-                <a16:creationId xmlns:a16="http://schemas.microsoft.com/office/drawing/2014/main" id="{0839C8CB-19A1-2282-FC1F-F07AE5C04F86}"/>
-              </a:ext>
-            </a:extLst>
-          </p:cNvPr>
+          <p:cNvPr id="3" name="Vertical Text Placeholder 2"/>
           <p:cNvSpPr>
             <a:spLocks noGrp="1"/>
           </p:cNvSpPr>
@@ -390,7 +346,15 @@
             <p:ph type="body" orient="vert" idx="1"/>
           </p:nvPr>
         </p:nvSpPr>
-        <p:spPr/>
+        <p:spPr>
+          <a:xfrm>
+            <a:off x="838200" y="1825625"/>
+            <a:ext cx="10515600" cy="4351338"/>
+          </a:xfrm>
+          <a:prstGeom prst="rect">
+            <a:avLst/>
+          </a:prstGeom>
+        </p:spPr>
         <p:txBody>
           <a:bodyPr vert="eaVert"/>
           <a:lstStyle/>
@@ -398,7 +362,7 @@
             <a:pPr lvl="0"/>
             <a:r>
               <a:rPr lang="en-US"/>
-              <a:t>Click to edit Master text styles</a:t>
+              <a:t>Edit Master text styles</a:t>
             </a:r>
           </a:p>
           <a:p>
@@ -433,13 +397,7 @@
       </p:sp>
       <p:sp>
         <p:nvSpPr>
-          <p:cNvPr id="4" name="Date Placeholder 3">
-            <a:extLst>
-              <a:ext uri="{FF2B5EF4-FFF2-40B4-BE49-F238E27FC236}">
-                <a16:creationId xmlns:a16="http://schemas.microsoft.com/office/drawing/2014/main" id="{5A73C603-EFFF-98A3-AF90-E6282D808B41}"/>
-              </a:ext>
-            </a:extLst>
-          </p:cNvPr>
+          <p:cNvPr id="4" name="Date Placeholder 3"/>
           <p:cNvSpPr>
             <a:spLocks noGrp="1"/>
           </p:cNvSpPr>
@@ -447,14 +405,40 @@
             <p:ph type="dt" sz="half" idx="10"/>
           </p:nvPr>
         </p:nvSpPr>
-        <p:spPr/>
+        <p:spPr>
+          <a:xfrm>
+            <a:off x="838200" y="6356351"/>
+            <a:ext cx="2743200" cy="365125"/>
+          </a:xfrm>
+          <a:prstGeom prst="rect">
+            <a:avLst/>
+          </a:prstGeom>
+        </p:spPr>
         <p:txBody>
           <a:bodyPr/>
-          <a:lstStyle/>
-          <a:p>
-            <a:fld id="{1D926A6E-1A60-2B4A-8860-6ABCC5DA00C8}" type="datetimeFigureOut">
-              <a:rPr lang="en-US" smtClean="0"/>
-              <a:t>7/21/26</a:t>
+          <a:lstStyle>
+            <a:lvl1pPr eaLnBrk="1" fontAlgn="auto" hangingPunct="1">
+              <a:spcBef>
+                <a:spcPts val="0"/>
+              </a:spcBef>
+              <a:spcAft>
+                <a:spcPts val="0"/>
+              </a:spcAft>
+              <a:defRPr>
+                <a:latin typeface="+mn-lt"/>
+              </a:defRPr>
+            </a:lvl1pPr>
+          </a:lstStyle>
+          <a:p>
+            <a:pPr>
+              <a:defRPr/>
+            </a:pPr>
+            <a:fld id="{EBB0B5FD-49DB-473C-854B-F8F23DC4B4E3}" type="datetimeFigureOut">
+              <a:rPr lang="en-US"/>
+              <a:pPr>
+                <a:defRPr/>
+              </a:pPr>
+              <a:t>7/22/26</a:t>
             </a:fld>
             <a:endParaRPr lang="en-US"/>
           </a:p>
@@ -462,13 +446,7 @@
       </p:sp>
       <p:sp>
         <p:nvSpPr>
-          <p:cNvPr id="5" name="Footer Placeholder 4">
-            <a:extLst>
-              <a:ext uri="{FF2B5EF4-FFF2-40B4-BE49-F238E27FC236}">
-                <a16:creationId xmlns:a16="http://schemas.microsoft.com/office/drawing/2014/main" id="{4CF91B51-3875-5151-47B5-BD17AB083BC4}"/>
-              </a:ext>
-            </a:extLst>
-          </p:cNvPr>
+          <p:cNvPr id="5" name="Footer Placeholder 4"/>
           <p:cNvSpPr>
             <a:spLocks noGrp="1"/>
           </p:cNvSpPr>
@@ -476,24 +454,41 @@
             <p:ph type="ftr" sz="quarter" idx="11"/>
           </p:nvPr>
         </p:nvSpPr>
-        <p:spPr/>
+        <p:spPr>
+          <a:xfrm>
+            <a:off x="4038600" y="6356351"/>
+            <a:ext cx="4114800" cy="365125"/>
+          </a:xfrm>
+          <a:prstGeom prst="rect">
+            <a:avLst/>
+          </a:prstGeom>
+        </p:spPr>
         <p:txBody>
           <a:bodyPr/>
-          <a:lstStyle/>
-          <a:p>
+          <a:lstStyle>
+            <a:lvl1pPr eaLnBrk="1" fontAlgn="auto" hangingPunct="1">
+              <a:spcBef>
+                <a:spcPts val="0"/>
+              </a:spcBef>
+              <a:spcAft>
+                <a:spcPts val="0"/>
+              </a:spcAft>
+              <a:defRPr>
+                <a:latin typeface="+mn-lt"/>
+              </a:defRPr>
+            </a:lvl1pPr>
+          </a:lstStyle>
+          <a:p>
+            <a:pPr>
+              <a:defRPr/>
+            </a:pPr>
             <a:endParaRPr lang="en-US"/>
           </a:p>
         </p:txBody>
       </p:sp>
       <p:sp>
         <p:nvSpPr>
-          <p:cNvPr id="6" name="Slide Number Placeholder 5">
-            <a:extLst>
-              <a:ext uri="{FF2B5EF4-FFF2-40B4-BE49-F238E27FC236}">
-                <a16:creationId xmlns:a16="http://schemas.microsoft.com/office/drawing/2014/main" id="{C0F5D71D-5B27-6B55-9EF1-D680C9EBC603}"/>
-              </a:ext>
-            </a:extLst>
-          </p:cNvPr>
+          <p:cNvPr id="6" name="Slide Number Placeholder 5"/>
           <p:cNvSpPr>
             <a:spLocks noGrp="1"/>
           </p:cNvSpPr>
@@ -501,13 +496,39 @@
             <p:ph type="sldNum" sz="quarter" idx="12"/>
           </p:nvPr>
         </p:nvSpPr>
-        <p:spPr/>
+        <p:spPr>
+          <a:xfrm>
+            <a:off x="8610600" y="6356351"/>
+            <a:ext cx="2743200" cy="365125"/>
+          </a:xfrm>
+          <a:prstGeom prst="rect">
+            <a:avLst/>
+          </a:prstGeom>
+        </p:spPr>
         <p:txBody>
           <a:bodyPr/>
-          <a:lstStyle/>
-          <a:p>
-            <a:fld id="{3CAD1949-089B-5040-A81F-BF6C5D83A7A1}" type="slidenum">
-              <a:rPr lang="en-US" smtClean="0"/>
+          <a:lstStyle>
+            <a:lvl1pPr eaLnBrk="1" fontAlgn="auto" hangingPunct="1">
+              <a:spcBef>
+                <a:spcPts val="0"/>
+              </a:spcBef>
+              <a:spcAft>
+                <a:spcPts val="0"/>
+              </a:spcAft>
+              <a:defRPr>
+                <a:latin typeface="+mn-lt"/>
+              </a:defRPr>
+            </a:lvl1pPr>
+          </a:lstStyle>
+          <a:p>
+            <a:pPr>
+              <a:defRPr/>
+            </a:pPr>
+            <a:fld id="{5F11E6B8-501D-4E52-947F-A1A5A5A7BB0E}" type="slidenum">
+              <a:rPr lang="en-US"/>
+              <a:pPr>
+                <a:defRPr/>
+              </a:pPr>
               <a:t>‹#›</a:t>
             </a:fld>
             <a:endParaRPr lang="en-US"/>
@@ -517,7 +538,7 @@
     </p:spTree>
     <p:extLst>
       <p:ext uri="{BB962C8B-B14F-4D97-AF65-F5344CB8AC3E}">
-        <p14:creationId xmlns:p14="http://schemas.microsoft.com/office/powerpoint/2010/main" val="3234374416"/>
+        <p14:creationId xmlns:p14="http://schemas.microsoft.com/office/powerpoint/2010/main" val="2083873928"/>
       </p:ext>
     </p:extLst>
   </p:cSld>
@@ -546,13 +567,7 @@
       </p:grpSpPr>
       <p:sp>
         <p:nvSpPr>
-          <p:cNvPr id="2" name="Vertical Title 1">
-            <a:extLst>
-              <a:ext uri="{FF2B5EF4-FFF2-40B4-BE49-F238E27FC236}">
-                <a16:creationId xmlns:a16="http://schemas.microsoft.com/office/drawing/2014/main" id="{5E6A7ABA-369E-EA91-6D45-1D6D4597135D}"/>
-              </a:ext>
-            </a:extLst>
-          </p:cNvPr>
+          <p:cNvPr id="2" name="Vertical Title 1"/>
           <p:cNvSpPr>
             <a:spLocks noGrp="1"/>
           </p:cNvSpPr>
@@ -562,9 +577,12 @@
         </p:nvSpPr>
         <p:spPr>
           <a:xfrm>
-            <a:off x="8724900" y="365125"/>
+            <a:off x="8724901" y="365125"/>
             <a:ext cx="2628900" cy="5811838"/>
           </a:xfrm>
+          <a:prstGeom prst="rect">
+            <a:avLst/>
+          </a:prstGeom>
         </p:spPr>
         <p:txBody>
           <a:bodyPr vert="eaVert"/>
@@ -579,13 +597,7 @@
       </p:sp>
       <p:sp>
         <p:nvSpPr>
-          <p:cNvPr id="3" name="Vertical Text Placeholder 2">
-            <a:extLst>
-              <a:ext uri="{FF2B5EF4-FFF2-40B4-BE49-F238E27FC236}">
-                <a16:creationId xmlns:a16="http://schemas.microsoft.com/office/drawing/2014/main" id="{4003B80C-9352-AE1E-6ACC-BC88F809E109}"/>
-              </a:ext>
-            </a:extLst>
-          </p:cNvPr>
+          <p:cNvPr id="3" name="Vertical Text Placeholder 2"/>
           <p:cNvSpPr>
             <a:spLocks noGrp="1"/>
           </p:cNvSpPr>
@@ -595,9 +607,12 @@
         </p:nvSpPr>
         <p:spPr>
           <a:xfrm>
-            <a:off x="838200" y="365125"/>
-            <a:ext cx="7734300" cy="5811838"/>
-          </a:xfrm>
+            <a:off x="838201" y="365125"/>
+            <a:ext cx="7683500" cy="5811838"/>
+          </a:xfrm>
+          <a:prstGeom prst="rect">
+            <a:avLst/>
+          </a:prstGeom>
         </p:spPr>
         <p:txBody>
           <a:bodyPr vert="eaVert"/>
@@ -606,7 +621,7 @@
             <a:pPr lvl="0"/>
             <a:r>
               <a:rPr lang="en-US"/>
-              <a:t>Click to edit Master text styles</a:t>
+              <a:t>Edit Master text styles</a:t>
             </a:r>
           </a:p>
           <a:p>
@@ -641,13 +656,7 @@
       </p:sp>
       <p:sp>
         <p:nvSpPr>
-          <p:cNvPr id="4" name="Date Placeholder 3">
-            <a:extLst>
-              <a:ext uri="{FF2B5EF4-FFF2-40B4-BE49-F238E27FC236}">
-                <a16:creationId xmlns:a16="http://schemas.microsoft.com/office/drawing/2014/main" id="{8F8E6284-CAFC-C3F6-076E-74B9982260D8}"/>
-              </a:ext>
-            </a:extLst>
-          </p:cNvPr>
+          <p:cNvPr id="4" name="Date Placeholder 3"/>
           <p:cNvSpPr>
             <a:spLocks noGrp="1"/>
           </p:cNvSpPr>
@@ -655,14 +664,40 @@
             <p:ph type="dt" sz="half" idx="10"/>
           </p:nvPr>
         </p:nvSpPr>
-        <p:spPr/>
+        <p:spPr>
+          <a:xfrm>
+            <a:off x="838200" y="6356351"/>
+            <a:ext cx="2743200" cy="365125"/>
+          </a:xfrm>
+          <a:prstGeom prst="rect">
+            <a:avLst/>
+          </a:prstGeom>
+        </p:spPr>
         <p:txBody>
           <a:bodyPr/>
-          <a:lstStyle/>
-          <a:p>
-            <a:fld id="{1D926A6E-1A60-2B4A-8860-6ABCC5DA00C8}" type="datetimeFigureOut">
-              <a:rPr lang="en-US" smtClean="0"/>
-              <a:t>7/21/26</a:t>
+          <a:lstStyle>
+            <a:lvl1pPr eaLnBrk="1" fontAlgn="auto" hangingPunct="1">
+              <a:spcBef>
+                <a:spcPts val="0"/>
+              </a:spcBef>
+              <a:spcAft>
+                <a:spcPts val="0"/>
+              </a:spcAft>
+              <a:defRPr>
+                <a:latin typeface="+mn-lt"/>
+              </a:defRPr>
+            </a:lvl1pPr>
+          </a:lstStyle>
+          <a:p>
+            <a:pPr>
+              <a:defRPr/>
+            </a:pPr>
+            <a:fld id="{8FCCF704-E657-4B26-BB5F-375626E2EAF5}" type="datetimeFigureOut">
+              <a:rPr lang="en-US"/>
+              <a:pPr>
+                <a:defRPr/>
+              </a:pPr>
+              <a:t>7/22/26</a:t>
             </a:fld>
             <a:endParaRPr lang="en-US"/>
           </a:p>
@@ -670,13 +705,7 @@
       </p:sp>
       <p:sp>
         <p:nvSpPr>
-          <p:cNvPr id="5" name="Footer Placeholder 4">
-            <a:extLst>
-              <a:ext uri="{FF2B5EF4-FFF2-40B4-BE49-F238E27FC236}">
-                <a16:creationId xmlns:a16="http://schemas.microsoft.com/office/drawing/2014/main" id="{6750A852-09A5-FCC3-A5EC-610E01BF4393}"/>
-              </a:ext>
-            </a:extLst>
-          </p:cNvPr>
+          <p:cNvPr id="5" name="Footer Placeholder 4"/>
           <p:cNvSpPr>
             <a:spLocks noGrp="1"/>
           </p:cNvSpPr>
@@ -684,24 +713,41 @@
             <p:ph type="ftr" sz="quarter" idx="11"/>
           </p:nvPr>
         </p:nvSpPr>
-        <p:spPr/>
+        <p:spPr>
+          <a:xfrm>
+            <a:off x="4038600" y="6356351"/>
+            <a:ext cx="4114800" cy="365125"/>
+          </a:xfrm>
+          <a:prstGeom prst="rect">
+            <a:avLst/>
+          </a:prstGeom>
+        </p:spPr>
         <p:txBody>
           <a:bodyPr/>
-          <a:lstStyle/>
-          <a:p>
+          <a:lstStyle>
+            <a:lvl1pPr eaLnBrk="1" fontAlgn="auto" hangingPunct="1">
+              <a:spcBef>
+                <a:spcPts val="0"/>
+              </a:spcBef>
+              <a:spcAft>
+                <a:spcPts val="0"/>
+              </a:spcAft>
+              <a:defRPr>
+                <a:latin typeface="+mn-lt"/>
+              </a:defRPr>
+            </a:lvl1pPr>
+          </a:lstStyle>
+          <a:p>
+            <a:pPr>
+              <a:defRPr/>
+            </a:pPr>
             <a:endParaRPr lang="en-US"/>
           </a:p>
         </p:txBody>
       </p:sp>
       <p:sp>
         <p:nvSpPr>
-          <p:cNvPr id="6" name="Slide Number Placeholder 5">
-            <a:extLst>
-              <a:ext uri="{FF2B5EF4-FFF2-40B4-BE49-F238E27FC236}">
-                <a16:creationId xmlns:a16="http://schemas.microsoft.com/office/drawing/2014/main" id="{F3544C57-9DDD-E3DE-DC79-04F5EC5A9F13}"/>
-              </a:ext>
-            </a:extLst>
-          </p:cNvPr>
+          <p:cNvPr id="6" name="Slide Number Placeholder 5"/>
           <p:cNvSpPr>
             <a:spLocks noGrp="1"/>
           </p:cNvSpPr>
@@ -709,13 +755,39 @@
             <p:ph type="sldNum" sz="quarter" idx="12"/>
           </p:nvPr>
         </p:nvSpPr>
-        <p:spPr/>
+        <p:spPr>
+          <a:xfrm>
+            <a:off x="8610600" y="6356351"/>
+            <a:ext cx="2743200" cy="365125"/>
+          </a:xfrm>
+          <a:prstGeom prst="rect">
+            <a:avLst/>
+          </a:prstGeom>
+        </p:spPr>
         <p:txBody>
           <a:bodyPr/>
-          <a:lstStyle/>
-          <a:p>
-            <a:fld id="{3CAD1949-089B-5040-A81F-BF6C5D83A7A1}" type="slidenum">
-              <a:rPr lang="en-US" smtClean="0"/>
+          <a:lstStyle>
+            <a:lvl1pPr eaLnBrk="1" fontAlgn="auto" hangingPunct="1">
+              <a:spcBef>
+                <a:spcPts val="0"/>
+              </a:spcBef>
+              <a:spcAft>
+                <a:spcPts val="0"/>
+              </a:spcAft>
+              <a:defRPr>
+                <a:latin typeface="+mn-lt"/>
+              </a:defRPr>
+            </a:lvl1pPr>
+          </a:lstStyle>
+          <a:p>
+            <a:pPr>
+              <a:defRPr/>
+            </a:pPr>
+            <a:fld id="{19E8DDFF-5AD0-4076-88ED-B7D2BFC1532B}" type="slidenum">
+              <a:rPr lang="en-US"/>
+              <a:pPr>
+                <a:defRPr/>
+              </a:pPr>
               <a:t>‹#›</a:t>
             </a:fld>
             <a:endParaRPr lang="en-US"/>
@@ -725,7 +797,995 @@
     </p:spTree>
     <p:extLst>
       <p:ext uri="{BB962C8B-B14F-4D97-AF65-F5344CB8AC3E}">
-        <p14:creationId xmlns:p14="http://schemas.microsoft.com/office/powerpoint/2010/main" val="575611314"/>
+        <p14:creationId xmlns:p14="http://schemas.microsoft.com/office/powerpoint/2010/main" val="2425514773"/>
+      </p:ext>
+    </p:extLst>
+  </p:cSld>
+  <p:clrMapOvr>
+    <a:masterClrMapping/>
+  </p:clrMapOvr>
+</p:sldLayout>
+</file>
+
+<file path=ppt/slideLayouts/slideLayout12.xml><?xml version="1.0" encoding="utf-8"?>
+<p:sldLayout xmlns:a="http://schemas.openxmlformats.org/drawingml/2006/main" xmlns:r="http://schemas.openxmlformats.org/officeDocument/2006/relationships" xmlns:p="http://schemas.openxmlformats.org/presentationml/2006/main" showMasterSp="0" preserve="1" userDrawn="1">
+  <p:cSld name="1_Title Slide">
+    <p:spTree>
+      <p:nvGrpSpPr>
+        <p:cNvPr id="1" name=""/>
+        <p:cNvGrpSpPr/>
+        <p:nvPr/>
+      </p:nvGrpSpPr>
+      <p:grpSpPr>
+        <a:xfrm>
+          <a:off x="0" y="0"/>
+          <a:ext cx="0" cy="0"/>
+          <a:chOff x="0" y="0"/>
+          <a:chExt cx="0" cy="0"/>
+        </a:xfrm>
+      </p:grpSpPr>
+      <p:sp>
+        <p:nvSpPr>
+          <p:cNvPr id="2" name="Rectangle 14"/>
+          <p:cNvSpPr>
+            <a:spLocks noChangeArrowheads="1"/>
+          </p:cNvSpPr>
+          <p:nvPr userDrawn="1"/>
+        </p:nvSpPr>
+        <p:spPr bwMode="auto">
+          <a:xfrm>
+            <a:off x="6351" y="-7938"/>
+            <a:ext cx="12181416" cy="308419"/>
+          </a:xfrm>
+          <a:prstGeom prst="rect">
+            <a:avLst/>
+          </a:prstGeom>
+          <a:solidFill>
+            <a:srgbClr val="000000"/>
+          </a:solidFill>
+          <a:ln w="9525" algn="ctr">
+            <a:solidFill>
+              <a:srgbClr val="000000"/>
+            </a:solidFill>
+            <a:round/>
+            <a:headEnd/>
+            <a:tailEnd/>
+          </a:ln>
+        </p:spPr>
+        <p:txBody>
+          <a:bodyPr lIns="92075" tIns="46038" rIns="92075" bIns="46038">
+            <a:spAutoFit/>
+          </a:bodyPr>
+          <a:lstStyle>
+            <a:lvl1pPr>
+              <a:defRPr>
+                <a:solidFill>
+                  <a:schemeClr val="tx1"/>
+                </a:solidFill>
+                <a:latin typeface="Calibri" panose="020F0502020204030204" pitchFamily="34" charset="0"/>
+              </a:defRPr>
+            </a:lvl1pPr>
+            <a:lvl2pPr marL="742950" indent="-285750">
+              <a:defRPr>
+                <a:solidFill>
+                  <a:schemeClr val="tx1"/>
+                </a:solidFill>
+                <a:latin typeface="Calibri" panose="020F0502020204030204" pitchFamily="34" charset="0"/>
+              </a:defRPr>
+            </a:lvl2pPr>
+            <a:lvl3pPr marL="1143000" indent="-228600">
+              <a:defRPr>
+                <a:solidFill>
+                  <a:schemeClr val="tx1"/>
+                </a:solidFill>
+                <a:latin typeface="Calibri" panose="020F0502020204030204" pitchFamily="34" charset="0"/>
+              </a:defRPr>
+            </a:lvl3pPr>
+            <a:lvl4pPr marL="1600200" indent="-228600">
+              <a:defRPr>
+                <a:solidFill>
+                  <a:schemeClr val="tx1"/>
+                </a:solidFill>
+                <a:latin typeface="Calibri" panose="020F0502020204030204" pitchFamily="34" charset="0"/>
+              </a:defRPr>
+            </a:lvl4pPr>
+            <a:lvl5pPr marL="2057400" indent="-228600">
+              <a:defRPr>
+                <a:solidFill>
+                  <a:schemeClr val="tx1"/>
+                </a:solidFill>
+                <a:latin typeface="Calibri" panose="020F0502020204030204" pitchFamily="34" charset="0"/>
+              </a:defRPr>
+            </a:lvl5pPr>
+            <a:lvl6pPr marL="2514600" indent="-228600" defTabSz="457200" fontAlgn="base">
+              <a:spcBef>
+                <a:spcPct val="0"/>
+              </a:spcBef>
+              <a:spcAft>
+                <a:spcPct val="0"/>
+              </a:spcAft>
+              <a:defRPr>
+                <a:solidFill>
+                  <a:schemeClr val="tx1"/>
+                </a:solidFill>
+                <a:latin typeface="Calibri" panose="020F0502020204030204" pitchFamily="34" charset="0"/>
+              </a:defRPr>
+            </a:lvl6pPr>
+            <a:lvl7pPr marL="2971800" indent="-228600" defTabSz="457200" fontAlgn="base">
+              <a:spcBef>
+                <a:spcPct val="0"/>
+              </a:spcBef>
+              <a:spcAft>
+                <a:spcPct val="0"/>
+              </a:spcAft>
+              <a:defRPr>
+                <a:solidFill>
+                  <a:schemeClr val="tx1"/>
+                </a:solidFill>
+                <a:latin typeface="Calibri" panose="020F0502020204030204" pitchFamily="34" charset="0"/>
+              </a:defRPr>
+            </a:lvl7pPr>
+            <a:lvl8pPr marL="3429000" indent="-228600" defTabSz="457200" fontAlgn="base">
+              <a:spcBef>
+                <a:spcPct val="0"/>
+              </a:spcBef>
+              <a:spcAft>
+                <a:spcPct val="0"/>
+              </a:spcAft>
+              <a:defRPr>
+                <a:solidFill>
+                  <a:schemeClr val="tx1"/>
+                </a:solidFill>
+                <a:latin typeface="Calibri" panose="020F0502020204030204" pitchFamily="34" charset="0"/>
+              </a:defRPr>
+            </a:lvl8pPr>
+            <a:lvl9pPr marL="3886200" indent="-228600" defTabSz="457200" fontAlgn="base">
+              <a:spcBef>
+                <a:spcPct val="0"/>
+              </a:spcBef>
+              <a:spcAft>
+                <a:spcPct val="0"/>
+              </a:spcAft>
+              <a:defRPr>
+                <a:solidFill>
+                  <a:schemeClr val="tx1"/>
+                </a:solidFill>
+                <a:latin typeface="Calibri" panose="020F0502020204030204" pitchFamily="34" charset="0"/>
+              </a:defRPr>
+            </a:lvl9pPr>
+          </a:lstStyle>
+          <a:p>
+            <a:pPr algn="ctr">
+              <a:defRPr/>
+            </a:pPr>
+            <a:endParaRPr lang="en-US" altLang="en-US" sz="1400" b="1">
+              <a:solidFill>
+                <a:srgbClr val="000000"/>
+              </a:solidFill>
+              <a:latin typeface="Arial" panose="020B0604020202020204" pitchFamily="34" charset="0"/>
+            </a:endParaRPr>
+          </a:p>
+        </p:txBody>
+      </p:sp>
+      <p:sp>
+        <p:nvSpPr>
+          <p:cNvPr id="3" name="Rectangle 2"/>
+          <p:cNvSpPr/>
+          <p:nvPr userDrawn="1"/>
+        </p:nvSpPr>
+        <p:spPr>
+          <a:xfrm>
+            <a:off x="5457" y="841845"/>
+            <a:ext cx="12180193" cy="199460"/>
+          </a:xfrm>
+          <a:prstGeom prst="rect">
+            <a:avLst/>
+          </a:prstGeom>
+          <a:solidFill>
+            <a:srgbClr val="008000"/>
+          </a:solidFill>
+          <a:ln w="12700">
+            <a:solidFill>
+              <a:schemeClr val="tx1"/>
+            </a:solidFill>
+          </a:ln>
+          <a:scene3d>
+            <a:camera prst="orthographicFront"/>
+            <a:lightRig rig="threePt" dir="t"/>
+          </a:scene3d>
+          <a:sp3d>
+            <a:bevelT w="165100" prst="coolSlant"/>
+          </a:sp3d>
+        </p:spPr>
+        <p:style>
+          <a:lnRef idx="2">
+            <a:schemeClr val="accent1">
+              <a:shade val="50000"/>
+            </a:schemeClr>
+          </a:lnRef>
+          <a:fillRef idx="1">
+            <a:schemeClr val="accent1"/>
+          </a:fillRef>
+          <a:effectRef idx="0">
+            <a:schemeClr val="accent1"/>
+          </a:effectRef>
+          <a:fontRef idx="minor">
+            <a:schemeClr val="lt1"/>
+          </a:fontRef>
+        </p:style>
+        <p:txBody>
+          <a:bodyPr anchor="ctr"/>
+          <a:lstStyle/>
+          <a:p>
+            <a:pPr algn="ctr" eaLnBrk="1" fontAlgn="auto" hangingPunct="1">
+              <a:spcBef>
+                <a:spcPts val="0"/>
+              </a:spcBef>
+              <a:spcAft>
+                <a:spcPts val="0"/>
+              </a:spcAft>
+              <a:defRPr/>
+            </a:pPr>
+            <a:endParaRPr lang="en-US" sz="1800">
+              <a:solidFill>
+                <a:prstClr val="white"/>
+              </a:solidFill>
+            </a:endParaRPr>
+          </a:p>
+        </p:txBody>
+      </p:sp>
+      <p:sp>
+        <p:nvSpPr>
+          <p:cNvPr id="4" name="Rectangle 16"/>
+          <p:cNvSpPr>
+            <a:spLocks noChangeArrowheads="1"/>
+          </p:cNvSpPr>
+          <p:nvPr userDrawn="1"/>
+        </p:nvSpPr>
+        <p:spPr bwMode="auto">
+          <a:xfrm>
+            <a:off x="5169304" y="813207"/>
+            <a:ext cx="1853392" cy="276999"/>
+          </a:xfrm>
+          <a:prstGeom prst="rect">
+            <a:avLst/>
+          </a:prstGeom>
+          <a:noFill/>
+          <a:ln>
+            <a:noFill/>
+          </a:ln>
+          <a:extLst>
+            <a:ext uri="{909E8E84-426E-40DD-AFC4-6F175D3DCCD1}">
+              <a14:hiddenFill xmlns:a14="http://schemas.microsoft.com/office/drawing/2010/main">
+                <a:solidFill>
+                  <a:srgbClr val="FFFFFF"/>
+                </a:solidFill>
+              </a14:hiddenFill>
+            </a:ext>
+            <a:ext uri="{91240B29-F687-4F45-9708-019B960494DF}">
+              <a14:hiddenLine xmlns:a14="http://schemas.microsoft.com/office/drawing/2010/main" w="9525">
+                <a:solidFill>
+                  <a:srgbClr val="000000"/>
+                </a:solidFill>
+                <a:miter lim="800000"/>
+                <a:headEnd/>
+                <a:tailEnd/>
+              </a14:hiddenLine>
+            </a:ext>
+          </a:extLst>
+        </p:spPr>
+        <p:txBody>
+          <a:bodyPr wrap="none" anchor="ctr">
+            <a:spAutoFit/>
+          </a:bodyPr>
+          <a:lstStyle>
+            <a:lvl1pPr>
+              <a:defRPr>
+                <a:solidFill>
+                  <a:schemeClr val="tx1"/>
+                </a:solidFill>
+                <a:latin typeface="Calibri" panose="020F0502020204030204" pitchFamily="34" charset="0"/>
+              </a:defRPr>
+            </a:lvl1pPr>
+            <a:lvl2pPr marL="742950" indent="-285750">
+              <a:defRPr>
+                <a:solidFill>
+                  <a:schemeClr val="tx1"/>
+                </a:solidFill>
+                <a:latin typeface="Calibri" panose="020F0502020204030204" pitchFamily="34" charset="0"/>
+              </a:defRPr>
+            </a:lvl2pPr>
+            <a:lvl3pPr marL="1143000" indent="-228600">
+              <a:defRPr>
+                <a:solidFill>
+                  <a:schemeClr val="tx1"/>
+                </a:solidFill>
+                <a:latin typeface="Calibri" panose="020F0502020204030204" pitchFamily="34" charset="0"/>
+              </a:defRPr>
+            </a:lvl3pPr>
+            <a:lvl4pPr marL="1600200" indent="-228600">
+              <a:defRPr>
+                <a:solidFill>
+                  <a:schemeClr val="tx1"/>
+                </a:solidFill>
+                <a:latin typeface="Calibri" panose="020F0502020204030204" pitchFamily="34" charset="0"/>
+              </a:defRPr>
+            </a:lvl4pPr>
+            <a:lvl5pPr marL="2057400" indent="-228600">
+              <a:defRPr>
+                <a:solidFill>
+                  <a:schemeClr val="tx1"/>
+                </a:solidFill>
+                <a:latin typeface="Calibri" panose="020F0502020204030204" pitchFamily="34" charset="0"/>
+              </a:defRPr>
+            </a:lvl5pPr>
+            <a:lvl6pPr marL="2514600" indent="-228600" defTabSz="457200" fontAlgn="base">
+              <a:spcBef>
+                <a:spcPct val="0"/>
+              </a:spcBef>
+              <a:spcAft>
+                <a:spcPct val="0"/>
+              </a:spcAft>
+              <a:defRPr>
+                <a:solidFill>
+                  <a:schemeClr val="tx1"/>
+                </a:solidFill>
+                <a:latin typeface="Calibri" panose="020F0502020204030204" pitchFamily="34" charset="0"/>
+              </a:defRPr>
+            </a:lvl6pPr>
+            <a:lvl7pPr marL="2971800" indent="-228600" defTabSz="457200" fontAlgn="base">
+              <a:spcBef>
+                <a:spcPct val="0"/>
+              </a:spcBef>
+              <a:spcAft>
+                <a:spcPct val="0"/>
+              </a:spcAft>
+              <a:defRPr>
+                <a:solidFill>
+                  <a:schemeClr val="tx1"/>
+                </a:solidFill>
+                <a:latin typeface="Calibri" panose="020F0502020204030204" pitchFamily="34" charset="0"/>
+              </a:defRPr>
+            </a:lvl7pPr>
+            <a:lvl8pPr marL="3429000" indent="-228600" defTabSz="457200" fontAlgn="base">
+              <a:spcBef>
+                <a:spcPct val="0"/>
+              </a:spcBef>
+              <a:spcAft>
+                <a:spcPct val="0"/>
+              </a:spcAft>
+              <a:defRPr>
+                <a:solidFill>
+                  <a:schemeClr val="tx1"/>
+                </a:solidFill>
+                <a:latin typeface="Calibri" panose="020F0502020204030204" pitchFamily="34" charset="0"/>
+              </a:defRPr>
+            </a:lvl8pPr>
+            <a:lvl9pPr marL="3886200" indent="-228600" defTabSz="457200" fontAlgn="base">
+              <a:spcBef>
+                <a:spcPct val="0"/>
+              </a:spcBef>
+              <a:spcAft>
+                <a:spcPct val="0"/>
+              </a:spcAft>
+              <a:defRPr>
+                <a:solidFill>
+                  <a:schemeClr val="tx1"/>
+                </a:solidFill>
+                <a:latin typeface="Calibri" panose="020F0502020204030204" pitchFamily="34" charset="0"/>
+              </a:defRPr>
+            </a:lvl9pPr>
+          </a:lstStyle>
+          <a:p>
+            <a:pPr algn="ctr" eaLnBrk="1" hangingPunct="1">
+              <a:defRPr/>
+            </a:pPr>
+            <a:r>
+              <a:rPr lang="en-US" altLang="en-US" sz="1200" b="1">
+                <a:solidFill>
+                  <a:srgbClr val="F2F2F2"/>
+                </a:solidFill>
+                <a:latin typeface="Arial" panose="020B0604020202020204" pitchFamily="34" charset="0"/>
+                <a:cs typeface="Arial" panose="020B0604020202020204" pitchFamily="34" charset="0"/>
+              </a:rPr>
+              <a:t>UNCLASSIFIED//FOUO</a:t>
+            </a:r>
+          </a:p>
+        </p:txBody>
+      </p:sp>
+      <p:sp>
+        <p:nvSpPr>
+          <p:cNvPr id="5" name="Rectangle 4"/>
+          <p:cNvSpPr/>
+          <p:nvPr userDrawn="1"/>
+        </p:nvSpPr>
+        <p:spPr>
+          <a:xfrm>
+            <a:off x="1" y="6428866"/>
+            <a:ext cx="12192000" cy="429134"/>
+          </a:xfrm>
+          <a:prstGeom prst="rect">
+            <a:avLst/>
+          </a:prstGeom>
+          <a:solidFill>
+            <a:srgbClr val="FFFF00"/>
+          </a:solidFill>
+          <a:ln w="12700">
+            <a:solidFill>
+              <a:schemeClr val="tx1"/>
+            </a:solidFill>
+          </a:ln>
+          <a:scene3d>
+            <a:camera prst="orthographicFront"/>
+            <a:lightRig rig="threePt" dir="t"/>
+          </a:scene3d>
+          <a:sp3d>
+            <a:bevelT w="165100" prst="coolSlant"/>
+          </a:sp3d>
+        </p:spPr>
+        <p:style>
+          <a:lnRef idx="2">
+            <a:schemeClr val="accent1">
+              <a:shade val="50000"/>
+            </a:schemeClr>
+          </a:lnRef>
+          <a:fillRef idx="1">
+            <a:schemeClr val="accent1"/>
+          </a:fillRef>
+          <a:effectRef idx="0">
+            <a:schemeClr val="accent1"/>
+          </a:effectRef>
+          <a:fontRef idx="minor">
+            <a:schemeClr val="lt1"/>
+          </a:fontRef>
+        </p:style>
+        <p:txBody>
+          <a:bodyPr anchor="ctr"/>
+          <a:lstStyle/>
+          <a:p>
+            <a:pPr algn="ctr" eaLnBrk="1" fontAlgn="auto" hangingPunct="1">
+              <a:spcBef>
+                <a:spcPts val="0"/>
+              </a:spcBef>
+              <a:spcAft>
+                <a:spcPts val="0"/>
+              </a:spcAft>
+              <a:defRPr/>
+            </a:pPr>
+            <a:endParaRPr lang="en-US" sz="1800">
+              <a:solidFill>
+                <a:prstClr val="white"/>
+              </a:solidFill>
+            </a:endParaRPr>
+          </a:p>
+        </p:txBody>
+      </p:sp>
+      <p:pic>
+        <p:nvPicPr>
+          <p:cNvPr id="6" name="Picture 16" descr="3SFG.png"/>
+          <p:cNvPicPr>
+            <a:picLocks noChangeAspect="1"/>
+          </p:cNvPicPr>
+          <p:nvPr userDrawn="1"/>
+        </p:nvPicPr>
+        <p:blipFill>
+          <a:blip r:embed="rId2">
+            <a:extLst>
+              <a:ext uri="{28A0092B-C50C-407E-A947-70E740481C1C}">
+                <a14:useLocalDpi xmlns:a14="http://schemas.microsoft.com/office/drawing/2010/main" val="0"/>
+              </a:ext>
+            </a:extLst>
+          </a:blip>
+          <a:srcRect/>
+          <a:stretch>
+            <a:fillRect/>
+          </a:stretch>
+        </p:blipFill>
+        <p:spPr bwMode="auto">
+          <a:xfrm>
+            <a:off x="179918" y="36513"/>
+            <a:ext cx="857249" cy="762000"/>
+          </a:xfrm>
+          <a:prstGeom prst="rect">
+            <a:avLst/>
+          </a:prstGeom>
+          <a:noFill/>
+          <a:ln>
+            <a:noFill/>
+          </a:ln>
+          <a:extLst>
+            <a:ext uri="{909E8E84-426E-40DD-AFC4-6F175D3DCCD1}">
+              <a14:hiddenFill xmlns:a14="http://schemas.microsoft.com/office/drawing/2010/main">
+                <a:solidFill>
+                  <a:srgbClr val="FFFFFF"/>
+                </a:solidFill>
+              </a14:hiddenFill>
+            </a:ext>
+            <a:ext uri="{91240B29-F687-4F45-9708-019B960494DF}">
+              <a14:hiddenLine xmlns:a14="http://schemas.microsoft.com/office/drawing/2010/main" w="9525">
+                <a:solidFill>
+                  <a:srgbClr val="000000"/>
+                </a:solidFill>
+                <a:miter lim="800000"/>
+                <a:headEnd/>
+                <a:tailEnd/>
+              </a14:hiddenLine>
+            </a:ext>
+          </a:extLst>
+        </p:spPr>
+      </p:pic>
+      <p:sp>
+        <p:nvSpPr>
+          <p:cNvPr id="7" name="Rectangle 6"/>
+          <p:cNvSpPr/>
+          <p:nvPr userDrawn="1"/>
+        </p:nvSpPr>
+        <p:spPr>
+          <a:xfrm>
+            <a:off x="2653936" y="32072"/>
+            <a:ext cx="6883231" cy="830997"/>
+          </a:xfrm>
+          <a:prstGeom prst="rect">
+            <a:avLst/>
+          </a:prstGeom>
+          <a:noFill/>
+        </p:spPr>
+        <p:txBody>
+          <a:bodyPr wrap="none">
+            <a:spAutoFit/>
+          </a:bodyPr>
+          <a:lstStyle/>
+          <a:p>
+            <a:pPr algn="ctr" eaLnBrk="1" fontAlgn="auto" hangingPunct="1">
+              <a:spcBef>
+                <a:spcPts val="0"/>
+              </a:spcBef>
+              <a:spcAft>
+                <a:spcPts val="0"/>
+              </a:spcAft>
+              <a:defRPr/>
+            </a:pPr>
+            <a:r>
+              <a:rPr lang="en-US" sz="2400" b="1" spc="50" dirty="0">
+                <a:ln w="13500">
+                  <a:solidFill>
+                    <a:srgbClr val="4F81BD">
+                      <a:shade val="2500"/>
+                      <a:alpha val="6500"/>
+                    </a:srgbClr>
+                  </a:solidFill>
+                  <a:prstDash val="solid"/>
+                </a:ln>
+                <a:solidFill>
+                  <a:srgbClr val="4F81BD">
+                    <a:tint val="3000"/>
+                    <a:alpha val="95000"/>
+                  </a:srgbClr>
+                </a:solidFill>
+                <a:effectLst>
+                  <a:outerShdw blurRad="38100" dist="38100" dir="2700000" algn="tl">
+                    <a:srgbClr val="000000">
+                      <a:alpha val="43137"/>
+                    </a:srgbClr>
+                  </a:outerShdw>
+                </a:effectLst>
+                <a:latin typeface="Arial" panose="020B0604020202020204" pitchFamily="34" charset="0"/>
+                <a:cs typeface="Arial" panose="020B0604020202020204" pitchFamily="34" charset="0"/>
+              </a:rPr>
+              <a:t>4/3 Technical Information Support Company</a:t>
+            </a:r>
+          </a:p>
+          <a:p>
+            <a:pPr algn="ctr" eaLnBrk="1" fontAlgn="auto" hangingPunct="1">
+              <a:spcBef>
+                <a:spcPts val="0"/>
+              </a:spcBef>
+              <a:spcAft>
+                <a:spcPts val="0"/>
+              </a:spcAft>
+              <a:defRPr/>
+            </a:pPr>
+            <a:r>
+              <a:rPr lang="en-US" sz="1400" b="1" i="1" spc="50" dirty="0">
+                <a:ln w="13500">
+                  <a:solidFill>
+                    <a:srgbClr val="4F81BD">
+                      <a:shade val="2500"/>
+                      <a:alpha val="6500"/>
+                    </a:srgbClr>
+                  </a:solidFill>
+                  <a:prstDash val="solid"/>
+                </a:ln>
+                <a:solidFill>
+                  <a:srgbClr val="4F81BD">
+                    <a:tint val="3000"/>
+                    <a:alpha val="95000"/>
+                  </a:srgbClr>
+                </a:solidFill>
+                <a:effectLst>
+                  <a:outerShdw blurRad="38100" dist="38100" dir="2700000" algn="tl">
+                    <a:srgbClr val="000000">
+                      <a:alpha val="43137"/>
+                    </a:srgbClr>
+                  </a:outerShdw>
+                </a:effectLst>
+                <a:latin typeface="Arial" panose="020B0604020202020204" pitchFamily="34" charset="0"/>
+                <a:cs typeface="Arial" panose="020B0604020202020204" pitchFamily="34" charset="0"/>
+              </a:rPr>
+              <a:t>Access to innovation</a:t>
+            </a:r>
+            <a:r>
+              <a:rPr lang="en-US" sz="2400" b="1" spc="50" dirty="0">
+                <a:ln w="13500">
+                  <a:solidFill>
+                    <a:srgbClr val="4F81BD">
+                      <a:shade val="2500"/>
+                      <a:alpha val="6500"/>
+                    </a:srgbClr>
+                  </a:solidFill>
+                  <a:prstDash val="solid"/>
+                </a:ln>
+                <a:solidFill>
+                  <a:srgbClr val="4F81BD">
+                    <a:tint val="3000"/>
+                    <a:alpha val="95000"/>
+                  </a:srgbClr>
+                </a:solidFill>
+                <a:effectLst>
+                  <a:outerShdw blurRad="38100" dist="38100" dir="2700000" algn="tl">
+                    <a:srgbClr val="000000">
+                      <a:alpha val="43137"/>
+                    </a:srgbClr>
+                  </a:outerShdw>
+                </a:effectLst>
+                <a:latin typeface="Arial" panose="020B0604020202020204" pitchFamily="34" charset="0"/>
+                <a:cs typeface="Arial" panose="020B0604020202020204" pitchFamily="34" charset="0"/>
+              </a:rPr>
+              <a:t> </a:t>
+            </a:r>
+          </a:p>
+        </p:txBody>
+      </p:sp>
+      <p:sp>
+        <p:nvSpPr>
+          <p:cNvPr id="8" name="Text Placeholder 2"/>
+          <p:cNvSpPr txBox="1">
+            <a:spLocks/>
+          </p:cNvSpPr>
+          <p:nvPr userDrawn="1"/>
+        </p:nvSpPr>
+        <p:spPr>
+          <a:xfrm>
+            <a:off x="6352" y="6429376"/>
+            <a:ext cx="12185649" cy="428625"/>
+          </a:xfrm>
+          <a:prstGeom prst="rect">
+            <a:avLst/>
+          </a:prstGeom>
+        </p:spPr>
+        <p:txBody>
+          <a:bodyPr/>
+          <a:lstStyle>
+            <a:lvl1pPr marL="0" indent="0" algn="l" rtl="0" eaLnBrk="0" fontAlgn="base" hangingPunct="0">
+              <a:spcBef>
+                <a:spcPct val="20000"/>
+              </a:spcBef>
+              <a:spcAft>
+                <a:spcPct val="0"/>
+              </a:spcAft>
+              <a:buNone/>
+              <a:defRPr sz="1200" b="1" i="1">
+                <a:solidFill>
+                  <a:schemeClr val="tx1"/>
+                </a:solidFill>
+                <a:effectLst>
+                  <a:outerShdw blurRad="38100" dist="38100" dir="2700000" algn="tl">
+                    <a:srgbClr val="000000">
+                      <a:alpha val="43137"/>
+                    </a:srgbClr>
+                  </a:outerShdw>
+                </a:effectLst>
+                <a:latin typeface="+mn-lt"/>
+                <a:ea typeface="+mn-ea"/>
+                <a:cs typeface="+mn-cs"/>
+              </a:defRPr>
+            </a:lvl1pPr>
+            <a:lvl2pPr marL="457200" indent="0" algn="l" rtl="0" eaLnBrk="0" fontAlgn="base" hangingPunct="0">
+              <a:spcBef>
+                <a:spcPct val="20000"/>
+              </a:spcBef>
+              <a:spcAft>
+                <a:spcPct val="0"/>
+              </a:spcAft>
+              <a:buNone/>
+              <a:defRPr sz="1800">
+                <a:solidFill>
+                  <a:schemeClr val="tx1">
+                    <a:tint val="75000"/>
+                  </a:schemeClr>
+                </a:solidFill>
+                <a:latin typeface="+mn-lt"/>
+              </a:defRPr>
+            </a:lvl2pPr>
+            <a:lvl3pPr marL="914400" indent="0" algn="l" rtl="0" eaLnBrk="0" fontAlgn="base" hangingPunct="0">
+              <a:spcBef>
+                <a:spcPct val="20000"/>
+              </a:spcBef>
+              <a:spcAft>
+                <a:spcPct val="0"/>
+              </a:spcAft>
+              <a:buNone/>
+              <a:defRPr sz="1600">
+                <a:solidFill>
+                  <a:schemeClr val="tx1">
+                    <a:tint val="75000"/>
+                  </a:schemeClr>
+                </a:solidFill>
+                <a:latin typeface="+mn-lt"/>
+              </a:defRPr>
+            </a:lvl3pPr>
+            <a:lvl4pPr marL="1371600" indent="0" algn="l" rtl="0" eaLnBrk="0" fontAlgn="base" hangingPunct="0">
+              <a:spcBef>
+                <a:spcPct val="20000"/>
+              </a:spcBef>
+              <a:spcAft>
+                <a:spcPct val="0"/>
+              </a:spcAft>
+              <a:buNone/>
+              <a:defRPr sz="1400">
+                <a:solidFill>
+                  <a:schemeClr val="tx1">
+                    <a:tint val="75000"/>
+                  </a:schemeClr>
+                </a:solidFill>
+                <a:latin typeface="+mn-lt"/>
+              </a:defRPr>
+            </a:lvl4pPr>
+            <a:lvl5pPr marL="1828800" indent="0" algn="l" rtl="0" eaLnBrk="0" fontAlgn="base" hangingPunct="0">
+              <a:spcBef>
+                <a:spcPct val="20000"/>
+              </a:spcBef>
+              <a:spcAft>
+                <a:spcPct val="0"/>
+              </a:spcAft>
+              <a:buNone/>
+              <a:defRPr sz="1400">
+                <a:solidFill>
+                  <a:schemeClr val="tx1">
+                    <a:tint val="75000"/>
+                  </a:schemeClr>
+                </a:solidFill>
+                <a:latin typeface="+mn-lt"/>
+              </a:defRPr>
+            </a:lvl5pPr>
+            <a:lvl6pPr marL="2286000" indent="0" algn="l" rtl="0" fontAlgn="base">
+              <a:spcBef>
+                <a:spcPct val="20000"/>
+              </a:spcBef>
+              <a:spcAft>
+                <a:spcPct val="0"/>
+              </a:spcAft>
+              <a:buNone/>
+              <a:defRPr sz="1400">
+                <a:solidFill>
+                  <a:schemeClr val="tx1">
+                    <a:tint val="75000"/>
+                  </a:schemeClr>
+                </a:solidFill>
+                <a:latin typeface="+mn-lt"/>
+              </a:defRPr>
+            </a:lvl6pPr>
+            <a:lvl7pPr marL="2743200" indent="0" algn="l" rtl="0" fontAlgn="base">
+              <a:spcBef>
+                <a:spcPct val="20000"/>
+              </a:spcBef>
+              <a:spcAft>
+                <a:spcPct val="0"/>
+              </a:spcAft>
+              <a:buNone/>
+              <a:defRPr sz="1400">
+                <a:solidFill>
+                  <a:schemeClr val="tx1">
+                    <a:tint val="75000"/>
+                  </a:schemeClr>
+                </a:solidFill>
+                <a:latin typeface="+mn-lt"/>
+              </a:defRPr>
+            </a:lvl7pPr>
+            <a:lvl8pPr marL="3200400" indent="0" algn="l" rtl="0" fontAlgn="base">
+              <a:spcBef>
+                <a:spcPct val="20000"/>
+              </a:spcBef>
+              <a:spcAft>
+                <a:spcPct val="0"/>
+              </a:spcAft>
+              <a:buNone/>
+              <a:defRPr sz="1400">
+                <a:solidFill>
+                  <a:schemeClr val="tx1">
+                    <a:tint val="75000"/>
+                  </a:schemeClr>
+                </a:solidFill>
+                <a:latin typeface="+mn-lt"/>
+              </a:defRPr>
+            </a:lvl8pPr>
+            <a:lvl9pPr marL="3657600" indent="0" algn="l" rtl="0" fontAlgn="base">
+              <a:spcBef>
+                <a:spcPct val="20000"/>
+              </a:spcBef>
+              <a:spcAft>
+                <a:spcPct val="0"/>
+              </a:spcAft>
+              <a:buNone/>
+              <a:defRPr sz="1400">
+                <a:solidFill>
+                  <a:schemeClr val="tx1">
+                    <a:tint val="75000"/>
+                  </a:schemeClr>
+                </a:solidFill>
+                <a:latin typeface="+mn-lt"/>
+              </a:defRPr>
+            </a:lvl9pPr>
+          </a:lstStyle>
+          <a:p>
+            <a:pPr algn="ctr" defTabSz="914400">
+              <a:defRPr/>
+            </a:pPr>
+            <a:r>
+              <a:rPr lang="en-US" sz="1200" kern="0" dirty="0"/>
+              <a:t>“Your Second Fox in a Box”</a:t>
+            </a:r>
+          </a:p>
+        </p:txBody>
+      </p:sp>
+      <p:pic>
+        <p:nvPicPr>
+          <p:cNvPr id="9" name="Picture 11" descr="nps_ppt_slide"/>
+          <p:cNvPicPr>
+            <a:picLocks noChangeAspect="1" noChangeArrowheads="1"/>
+          </p:cNvPicPr>
+          <p:nvPr userDrawn="1"/>
+        </p:nvPicPr>
+        <p:blipFill>
+          <a:blip r:embed="rId3">
+            <a:extLst>
+              <a:ext uri="{28A0092B-C50C-407E-A947-70E740481C1C}">
+                <a14:useLocalDpi xmlns:a14="http://schemas.microsoft.com/office/drawing/2010/main" val="0"/>
+              </a:ext>
+            </a:extLst>
+          </a:blip>
+          <a:srcRect/>
+          <a:stretch>
+            <a:fillRect/>
+          </a:stretch>
+        </p:blipFill>
+        <p:spPr bwMode="auto">
+          <a:xfrm>
+            <a:off x="3767667" y="1285875"/>
+            <a:ext cx="8424333" cy="5127625"/>
+          </a:xfrm>
+          <a:prstGeom prst="rect">
+            <a:avLst/>
+          </a:prstGeom>
+          <a:noFill/>
+          <a:ln>
+            <a:noFill/>
+          </a:ln>
+          <a:extLst>
+            <a:ext uri="{909E8E84-426E-40DD-AFC4-6F175D3DCCD1}">
+              <a14:hiddenFill xmlns:a14="http://schemas.microsoft.com/office/drawing/2010/main">
+                <a:solidFill>
+                  <a:srgbClr val="FFFFFF"/>
+                </a:solidFill>
+              </a14:hiddenFill>
+            </a:ext>
+            <a:ext uri="{91240B29-F687-4F45-9708-019B960494DF}">
+              <a14:hiddenLine xmlns:a14="http://schemas.microsoft.com/office/drawing/2010/main" w="9525">
+                <a:solidFill>
+                  <a:srgbClr val="000000"/>
+                </a:solidFill>
+                <a:miter lim="800000"/>
+                <a:headEnd/>
+                <a:tailEnd/>
+              </a14:hiddenLine>
+            </a:ext>
+          </a:extLst>
+        </p:spPr>
+      </p:pic>
+    </p:spTree>
+    <p:extLst>
+      <p:ext uri="{BB962C8B-B14F-4D97-AF65-F5344CB8AC3E}">
+        <p14:creationId xmlns:p14="http://schemas.microsoft.com/office/powerpoint/2010/main" val="3024830811"/>
+      </p:ext>
+    </p:extLst>
+  </p:cSld>
+  <p:clrMapOvr>
+    <a:masterClrMapping/>
+  </p:clrMapOvr>
+</p:sldLayout>
+</file>
+
+<file path=ppt/slideLayouts/slideLayout13.xml><?xml version="1.0" encoding="utf-8"?>
+<p:sldLayout xmlns:a="http://schemas.openxmlformats.org/drawingml/2006/main" xmlns:r="http://schemas.openxmlformats.org/officeDocument/2006/relationships" xmlns:p="http://schemas.openxmlformats.org/presentationml/2006/main" preserve="1" userDrawn="1">
+  <p:cSld name="Custom Layout">
+    <p:spTree>
+      <p:nvGrpSpPr>
+        <p:cNvPr id="1" name=""/>
+        <p:cNvGrpSpPr/>
+        <p:nvPr/>
+      </p:nvGrpSpPr>
+      <p:grpSpPr>
+        <a:xfrm>
+          <a:off x="0" y="0"/>
+          <a:ext cx="0" cy="0"/>
+          <a:chOff x="0" y="0"/>
+          <a:chExt cx="0" cy="0"/>
+        </a:xfrm>
+      </p:grpSpPr>
+      <p:sp>
+        <p:nvSpPr>
+          <p:cNvPr id="2" name="Title 1"/>
+          <p:cNvSpPr>
+            <a:spLocks noGrp="1"/>
+          </p:cNvSpPr>
+          <p:nvPr>
+            <p:ph type="title"/>
+          </p:nvPr>
+        </p:nvSpPr>
+        <p:spPr>
+          <a:xfrm>
+            <a:off x="838200" y="365126"/>
+            <a:ext cx="10515600" cy="1325563"/>
+          </a:xfrm>
+          <a:prstGeom prst="rect">
+            <a:avLst/>
+          </a:prstGeom>
+        </p:spPr>
+        <p:txBody>
+          <a:bodyPr/>
+          <a:lstStyle/>
+          <a:p>
+            <a:r>
+              <a:rPr lang="en-US"/>
+              <a:t>Click to edit Master title style</a:t>
+            </a:r>
+          </a:p>
+        </p:txBody>
+      </p:sp>
+    </p:spTree>
+    <p:extLst>
+      <p:ext uri="{BB962C8B-B14F-4D97-AF65-F5344CB8AC3E}">
+        <p14:creationId xmlns:p14="http://schemas.microsoft.com/office/powerpoint/2010/main" val="562276502"/>
+      </p:ext>
+    </p:extLst>
+  </p:cSld>
+  <p:clrMapOvr>
+    <a:masterClrMapping/>
+  </p:clrMapOvr>
+</p:sldLayout>
+</file>
+
+<file path=ppt/slideLayouts/slideLayout14.xml><?xml version="1.0" encoding="utf-8"?>
+<p:sldLayout xmlns:a="http://schemas.openxmlformats.org/drawingml/2006/main" xmlns:r="http://schemas.openxmlformats.org/officeDocument/2006/relationships" xmlns:p="http://schemas.openxmlformats.org/presentationml/2006/main" preserve="1" userDrawn="1">
+  <p:cSld name="1_Title and Content">
+    <p:spTree>
+      <p:nvGrpSpPr>
+        <p:cNvPr id="1" name=""/>
+        <p:cNvGrpSpPr/>
+        <p:nvPr/>
+      </p:nvGrpSpPr>
+      <p:grpSpPr>
+        <a:xfrm>
+          <a:off x="0" y="0"/>
+          <a:ext cx="0" cy="0"/>
+          <a:chOff x="0" y="0"/>
+          <a:chExt cx="0" cy="0"/>
+        </a:xfrm>
+      </p:grpSpPr>
+    </p:spTree>
+    <p:extLst>
+      <p:ext uri="{BB962C8B-B14F-4D97-AF65-F5344CB8AC3E}">
+        <p14:creationId xmlns:p14="http://schemas.microsoft.com/office/powerpoint/2010/main" val="1392426747"/>
       </p:ext>
     </p:extLst>
   </p:cSld>
@@ -754,13 +1814,7 @@
       </p:grpSpPr>
       <p:sp>
         <p:nvSpPr>
-          <p:cNvPr id="2" name="Title 1">
-            <a:extLst>
-              <a:ext uri="{FF2B5EF4-FFF2-40B4-BE49-F238E27FC236}">
-                <a16:creationId xmlns:a16="http://schemas.microsoft.com/office/drawing/2014/main" id="{D799FCAC-9509-3A86-BD62-21F959CCFAEE}"/>
-              </a:ext>
-            </a:extLst>
-          </p:cNvPr>
+          <p:cNvPr id="2" name="Title 1"/>
           <p:cNvSpPr>
             <a:spLocks noGrp="1"/>
           </p:cNvSpPr>
@@ -768,7 +1822,15 @@
             <p:ph type="title"/>
           </p:nvPr>
         </p:nvSpPr>
-        <p:spPr/>
+        <p:spPr>
+          <a:xfrm>
+            <a:off x="838200" y="365126"/>
+            <a:ext cx="10515600" cy="1325563"/>
+          </a:xfrm>
+          <a:prstGeom prst="rect">
+            <a:avLst/>
+          </a:prstGeom>
+        </p:spPr>
         <p:txBody>
           <a:bodyPr/>
           <a:lstStyle/>
@@ -782,13 +1844,7 @@
       </p:sp>
       <p:sp>
         <p:nvSpPr>
-          <p:cNvPr id="3" name="Content Placeholder 2">
-            <a:extLst>
-              <a:ext uri="{FF2B5EF4-FFF2-40B4-BE49-F238E27FC236}">
-                <a16:creationId xmlns:a16="http://schemas.microsoft.com/office/drawing/2014/main" id="{850EE6E1-2F3D-AED5-9424-FEB48076E56B}"/>
-              </a:ext>
-            </a:extLst>
-          </p:cNvPr>
+          <p:cNvPr id="3" name="Content Placeholder 2"/>
           <p:cNvSpPr>
             <a:spLocks noGrp="1"/>
           </p:cNvSpPr>
@@ -796,7 +1852,15 @@
             <p:ph idx="1"/>
           </p:nvPr>
         </p:nvSpPr>
-        <p:spPr/>
+        <p:spPr>
+          <a:xfrm>
+            <a:off x="838200" y="1825625"/>
+            <a:ext cx="10515600" cy="4351338"/>
+          </a:xfrm>
+          <a:prstGeom prst="rect">
+            <a:avLst/>
+          </a:prstGeom>
+        </p:spPr>
         <p:txBody>
           <a:bodyPr/>
           <a:lstStyle/>
@@ -804,7 +1868,7 @@
             <a:pPr lvl="0"/>
             <a:r>
               <a:rPr lang="en-US"/>
-              <a:t>Click to edit Master text styles</a:t>
+              <a:t>Edit Master text styles</a:t>
             </a:r>
           </a:p>
           <a:p>
@@ -839,13 +1903,7 @@
       </p:sp>
       <p:sp>
         <p:nvSpPr>
-          <p:cNvPr id="4" name="Date Placeholder 3">
-            <a:extLst>
-              <a:ext uri="{FF2B5EF4-FFF2-40B4-BE49-F238E27FC236}">
-                <a16:creationId xmlns:a16="http://schemas.microsoft.com/office/drawing/2014/main" id="{2513F0AA-C685-58A0-BF27-60DE3641526C}"/>
-              </a:ext>
-            </a:extLst>
-          </p:cNvPr>
+          <p:cNvPr id="4" name="Date Placeholder 3"/>
           <p:cNvSpPr>
             <a:spLocks noGrp="1"/>
           </p:cNvSpPr>
@@ -853,14 +1911,40 @@
             <p:ph type="dt" sz="half" idx="10"/>
           </p:nvPr>
         </p:nvSpPr>
-        <p:spPr/>
+        <p:spPr>
+          <a:xfrm>
+            <a:off x="838200" y="6356351"/>
+            <a:ext cx="2743200" cy="365125"/>
+          </a:xfrm>
+          <a:prstGeom prst="rect">
+            <a:avLst/>
+          </a:prstGeom>
+        </p:spPr>
         <p:txBody>
           <a:bodyPr/>
-          <a:lstStyle/>
-          <a:p>
-            <a:fld id="{1D926A6E-1A60-2B4A-8860-6ABCC5DA00C8}" type="datetimeFigureOut">
-              <a:rPr lang="en-US" smtClean="0"/>
-              <a:t>7/21/26</a:t>
+          <a:lstStyle>
+            <a:lvl1pPr eaLnBrk="1" fontAlgn="auto" hangingPunct="1">
+              <a:spcBef>
+                <a:spcPts val="0"/>
+              </a:spcBef>
+              <a:spcAft>
+                <a:spcPts val="0"/>
+              </a:spcAft>
+              <a:defRPr>
+                <a:latin typeface="+mn-lt"/>
+              </a:defRPr>
+            </a:lvl1pPr>
+          </a:lstStyle>
+          <a:p>
+            <a:pPr>
+              <a:defRPr/>
+            </a:pPr>
+            <a:fld id="{83316D38-8C76-41AE-BBEB-6C75B4AF02C2}" type="datetimeFigureOut">
+              <a:rPr lang="en-US"/>
+              <a:pPr>
+                <a:defRPr/>
+              </a:pPr>
+              <a:t>7/22/26</a:t>
             </a:fld>
             <a:endParaRPr lang="en-US"/>
           </a:p>
@@ -868,13 +1952,7 @@
       </p:sp>
       <p:sp>
         <p:nvSpPr>
-          <p:cNvPr id="5" name="Footer Placeholder 4">
-            <a:extLst>
-              <a:ext uri="{FF2B5EF4-FFF2-40B4-BE49-F238E27FC236}">
-                <a16:creationId xmlns:a16="http://schemas.microsoft.com/office/drawing/2014/main" id="{9254BCBD-7FED-7595-4EBD-04BF210B342A}"/>
-              </a:ext>
-            </a:extLst>
-          </p:cNvPr>
+          <p:cNvPr id="5" name="Footer Placeholder 4"/>
           <p:cNvSpPr>
             <a:spLocks noGrp="1"/>
           </p:cNvSpPr>
@@ -882,24 +1960,41 @@
             <p:ph type="ftr" sz="quarter" idx="11"/>
           </p:nvPr>
         </p:nvSpPr>
-        <p:spPr/>
+        <p:spPr>
+          <a:xfrm>
+            <a:off x="4038600" y="6356351"/>
+            <a:ext cx="4114800" cy="365125"/>
+          </a:xfrm>
+          <a:prstGeom prst="rect">
+            <a:avLst/>
+          </a:prstGeom>
+        </p:spPr>
         <p:txBody>
           <a:bodyPr/>
-          <a:lstStyle/>
-          <a:p>
+          <a:lstStyle>
+            <a:lvl1pPr eaLnBrk="1" fontAlgn="auto" hangingPunct="1">
+              <a:spcBef>
+                <a:spcPts val="0"/>
+              </a:spcBef>
+              <a:spcAft>
+                <a:spcPts val="0"/>
+              </a:spcAft>
+              <a:defRPr>
+                <a:latin typeface="+mn-lt"/>
+              </a:defRPr>
+            </a:lvl1pPr>
+          </a:lstStyle>
+          <a:p>
+            <a:pPr>
+              <a:defRPr/>
+            </a:pPr>
             <a:endParaRPr lang="en-US"/>
           </a:p>
         </p:txBody>
       </p:sp>
       <p:sp>
         <p:nvSpPr>
-          <p:cNvPr id="6" name="Slide Number Placeholder 5">
-            <a:extLst>
-              <a:ext uri="{FF2B5EF4-FFF2-40B4-BE49-F238E27FC236}">
-                <a16:creationId xmlns:a16="http://schemas.microsoft.com/office/drawing/2014/main" id="{72CDADE7-31F4-E9D3-6EA1-7DCA34132A96}"/>
-              </a:ext>
-            </a:extLst>
-          </p:cNvPr>
+          <p:cNvPr id="6" name="Slide Number Placeholder 5"/>
           <p:cNvSpPr>
             <a:spLocks noGrp="1"/>
           </p:cNvSpPr>
@@ -907,13 +2002,39 @@
             <p:ph type="sldNum" sz="quarter" idx="12"/>
           </p:nvPr>
         </p:nvSpPr>
-        <p:spPr/>
+        <p:spPr>
+          <a:xfrm>
+            <a:off x="8610600" y="6356351"/>
+            <a:ext cx="2743200" cy="365125"/>
+          </a:xfrm>
+          <a:prstGeom prst="rect">
+            <a:avLst/>
+          </a:prstGeom>
+        </p:spPr>
         <p:txBody>
           <a:bodyPr/>
-          <a:lstStyle/>
-          <a:p>
-            <a:fld id="{3CAD1949-089B-5040-A81F-BF6C5D83A7A1}" type="slidenum">
-              <a:rPr lang="en-US" smtClean="0"/>
+          <a:lstStyle>
+            <a:lvl1pPr eaLnBrk="1" fontAlgn="auto" hangingPunct="1">
+              <a:spcBef>
+                <a:spcPts val="0"/>
+              </a:spcBef>
+              <a:spcAft>
+                <a:spcPts val="0"/>
+              </a:spcAft>
+              <a:defRPr>
+                <a:latin typeface="+mn-lt"/>
+              </a:defRPr>
+            </a:lvl1pPr>
+          </a:lstStyle>
+          <a:p>
+            <a:pPr>
+              <a:defRPr/>
+            </a:pPr>
+            <a:fld id="{7B6CB29A-1548-4DD5-B140-6B2F1B2C1C70}" type="slidenum">
+              <a:rPr lang="en-US"/>
+              <a:pPr>
+                <a:defRPr/>
+              </a:pPr>
               <a:t>‹#›</a:t>
             </a:fld>
             <a:endParaRPr lang="en-US"/>
@@ -923,7 +2044,7 @@
     </p:spTree>
     <p:extLst>
       <p:ext uri="{BB962C8B-B14F-4D97-AF65-F5344CB8AC3E}">
-        <p14:creationId xmlns:p14="http://schemas.microsoft.com/office/powerpoint/2010/main" val="4241701680"/>
+        <p14:creationId xmlns:p14="http://schemas.microsoft.com/office/powerpoint/2010/main" val="1648928894"/>
       </p:ext>
     </p:extLst>
   </p:cSld>
@@ -952,13 +2073,7 @@
       </p:grpSpPr>
       <p:sp>
         <p:nvSpPr>
-          <p:cNvPr id="2" name="Title 1">
-            <a:extLst>
-              <a:ext uri="{FF2B5EF4-FFF2-40B4-BE49-F238E27FC236}">
-                <a16:creationId xmlns:a16="http://schemas.microsoft.com/office/drawing/2014/main" id="{52D0DE3D-629D-BC5E-6992-90D06FB2F861}"/>
-              </a:ext>
-            </a:extLst>
-          </p:cNvPr>
+          <p:cNvPr id="2" name="Title 1"/>
           <p:cNvSpPr>
             <a:spLocks noGrp="1"/>
           </p:cNvSpPr>
@@ -968,9 +2083,12 @@
         </p:nvSpPr>
         <p:spPr>
           <a:xfrm>
-            <a:off x="831850" y="1709738"/>
+            <a:off x="831851" y="1709738"/>
             <a:ext cx="10515600" cy="2852737"/>
           </a:xfrm>
+          <a:prstGeom prst="rect">
+            <a:avLst/>
+          </a:prstGeom>
         </p:spPr>
         <p:txBody>
           <a:bodyPr anchor="b"/>
@@ -989,13 +2107,7 @@
       </p:sp>
       <p:sp>
         <p:nvSpPr>
-          <p:cNvPr id="3" name="Text Placeholder 2">
-            <a:extLst>
-              <a:ext uri="{FF2B5EF4-FFF2-40B4-BE49-F238E27FC236}">
-                <a16:creationId xmlns:a16="http://schemas.microsoft.com/office/drawing/2014/main" id="{C2529028-9A0F-4342-D325-3B8D0817132B}"/>
-              </a:ext>
-            </a:extLst>
-          </p:cNvPr>
+          <p:cNvPr id="3" name="Text Placeholder 2"/>
           <p:cNvSpPr>
             <a:spLocks noGrp="1"/>
           </p:cNvSpPr>
@@ -1005,9 +2117,12 @@
         </p:nvSpPr>
         <p:spPr>
           <a:xfrm>
-            <a:off x="831850" y="4589463"/>
+            <a:off x="831851" y="4589464"/>
             <a:ext cx="10515600" cy="1500187"/>
           </a:xfrm>
+          <a:prstGeom prst="rect">
+            <a:avLst/>
+          </a:prstGeom>
         </p:spPr>
         <p:txBody>
           <a:bodyPr/>
@@ -1017,7 +2132,7 @@
               <a:defRPr sz="2400">
                 <a:solidFill>
                   <a:schemeClr val="tx1">
-                    <a:tint val="82000"/>
+                    <a:tint val="75000"/>
                   </a:schemeClr>
                 </a:solidFill>
               </a:defRPr>
@@ -1027,7 +2142,7 @@
               <a:defRPr sz="2000">
                 <a:solidFill>
                   <a:schemeClr val="tx1">
-                    <a:tint val="82000"/>
+                    <a:tint val="75000"/>
                   </a:schemeClr>
                 </a:solidFill>
               </a:defRPr>
@@ -1037,7 +2152,7 @@
               <a:defRPr sz="1800">
                 <a:solidFill>
                   <a:schemeClr val="tx1">
-                    <a:tint val="82000"/>
+                    <a:tint val="75000"/>
                   </a:schemeClr>
                 </a:solidFill>
               </a:defRPr>
@@ -1047,7 +2162,7 @@
               <a:defRPr sz="1600">
                 <a:solidFill>
                   <a:schemeClr val="tx1">
-                    <a:tint val="82000"/>
+                    <a:tint val="75000"/>
                   </a:schemeClr>
                 </a:solidFill>
               </a:defRPr>
@@ -1057,7 +2172,7 @@
               <a:defRPr sz="1600">
                 <a:solidFill>
                   <a:schemeClr val="tx1">
-                    <a:tint val="82000"/>
+                    <a:tint val="75000"/>
                   </a:schemeClr>
                 </a:solidFill>
               </a:defRPr>
@@ -1067,7 +2182,7 @@
               <a:defRPr sz="1600">
                 <a:solidFill>
                   <a:schemeClr val="tx1">
-                    <a:tint val="82000"/>
+                    <a:tint val="75000"/>
                   </a:schemeClr>
                 </a:solidFill>
               </a:defRPr>
@@ -1077,7 +2192,7 @@
               <a:defRPr sz="1600">
                 <a:solidFill>
                   <a:schemeClr val="tx1">
-                    <a:tint val="82000"/>
+                    <a:tint val="75000"/>
                   </a:schemeClr>
                 </a:solidFill>
               </a:defRPr>
@@ -1087,7 +2202,7 @@
               <a:defRPr sz="1600">
                 <a:solidFill>
                   <a:schemeClr val="tx1">
-                    <a:tint val="82000"/>
+                    <a:tint val="75000"/>
                   </a:schemeClr>
                 </a:solidFill>
               </a:defRPr>
@@ -1097,7 +2212,7 @@
               <a:defRPr sz="1600">
                 <a:solidFill>
                   <a:schemeClr val="tx1">
-                    <a:tint val="82000"/>
+                    <a:tint val="75000"/>
                   </a:schemeClr>
                 </a:solidFill>
               </a:defRPr>
@@ -1107,20 +2222,14 @@
             <a:pPr lvl="0"/>
             <a:r>
               <a:rPr lang="en-US"/>
-              <a:t>Click to edit Master text styles</a:t>
-            </a:r>
-          </a:p>
-        </p:txBody>
-      </p:sp>
-      <p:sp>
-        <p:nvSpPr>
-          <p:cNvPr id="4" name="Date Placeholder 3">
-            <a:extLst>
-              <a:ext uri="{FF2B5EF4-FFF2-40B4-BE49-F238E27FC236}">
-                <a16:creationId xmlns:a16="http://schemas.microsoft.com/office/drawing/2014/main" id="{713C2B16-2DC7-DB1E-3D54-F788F05D8721}"/>
-              </a:ext>
-            </a:extLst>
-          </p:cNvPr>
+              <a:t>Edit Master text styles</a:t>
+            </a:r>
+          </a:p>
+        </p:txBody>
+      </p:sp>
+      <p:sp>
+        <p:nvSpPr>
+          <p:cNvPr id="4" name="Date Placeholder 3"/>
           <p:cNvSpPr>
             <a:spLocks noGrp="1"/>
           </p:cNvSpPr>
@@ -1128,14 +2237,40 @@
             <p:ph type="dt" sz="half" idx="10"/>
           </p:nvPr>
         </p:nvSpPr>
-        <p:spPr/>
+        <p:spPr>
+          <a:xfrm>
+            <a:off x="838200" y="6356351"/>
+            <a:ext cx="2743200" cy="365125"/>
+          </a:xfrm>
+          <a:prstGeom prst="rect">
+            <a:avLst/>
+          </a:prstGeom>
+        </p:spPr>
         <p:txBody>
           <a:bodyPr/>
-          <a:lstStyle/>
-          <a:p>
-            <a:fld id="{1D926A6E-1A60-2B4A-8860-6ABCC5DA00C8}" type="datetimeFigureOut">
-              <a:rPr lang="en-US" smtClean="0"/>
-              <a:t>7/21/26</a:t>
+          <a:lstStyle>
+            <a:lvl1pPr eaLnBrk="1" fontAlgn="auto" hangingPunct="1">
+              <a:spcBef>
+                <a:spcPts val="0"/>
+              </a:spcBef>
+              <a:spcAft>
+                <a:spcPts val="0"/>
+              </a:spcAft>
+              <a:defRPr>
+                <a:latin typeface="+mn-lt"/>
+              </a:defRPr>
+            </a:lvl1pPr>
+          </a:lstStyle>
+          <a:p>
+            <a:pPr>
+              <a:defRPr/>
+            </a:pPr>
+            <a:fld id="{C6D0AEFE-F718-42CE-92AC-A355D2B1F083}" type="datetimeFigureOut">
+              <a:rPr lang="en-US"/>
+              <a:pPr>
+                <a:defRPr/>
+              </a:pPr>
+              <a:t>7/22/26</a:t>
             </a:fld>
             <a:endParaRPr lang="en-US"/>
           </a:p>
@@ -1143,13 +2278,7 @@
       </p:sp>
       <p:sp>
         <p:nvSpPr>
-          <p:cNvPr id="5" name="Footer Placeholder 4">
-            <a:extLst>
-              <a:ext uri="{FF2B5EF4-FFF2-40B4-BE49-F238E27FC236}">
-                <a16:creationId xmlns:a16="http://schemas.microsoft.com/office/drawing/2014/main" id="{F37D16BB-73BB-4163-2581-17E29A82A48A}"/>
-              </a:ext>
-            </a:extLst>
-          </p:cNvPr>
+          <p:cNvPr id="5" name="Footer Placeholder 4"/>
           <p:cNvSpPr>
             <a:spLocks noGrp="1"/>
           </p:cNvSpPr>
@@ -1157,24 +2286,41 @@
             <p:ph type="ftr" sz="quarter" idx="11"/>
           </p:nvPr>
         </p:nvSpPr>
-        <p:spPr/>
+        <p:spPr>
+          <a:xfrm>
+            <a:off x="4038600" y="6356351"/>
+            <a:ext cx="4114800" cy="365125"/>
+          </a:xfrm>
+          <a:prstGeom prst="rect">
+            <a:avLst/>
+          </a:prstGeom>
+        </p:spPr>
         <p:txBody>
           <a:bodyPr/>
-          <a:lstStyle/>
-          <a:p>
+          <a:lstStyle>
+            <a:lvl1pPr eaLnBrk="1" fontAlgn="auto" hangingPunct="1">
+              <a:spcBef>
+                <a:spcPts val="0"/>
+              </a:spcBef>
+              <a:spcAft>
+                <a:spcPts val="0"/>
+              </a:spcAft>
+              <a:defRPr>
+                <a:latin typeface="+mn-lt"/>
+              </a:defRPr>
+            </a:lvl1pPr>
+          </a:lstStyle>
+          <a:p>
+            <a:pPr>
+              <a:defRPr/>
+            </a:pPr>
             <a:endParaRPr lang="en-US"/>
           </a:p>
         </p:txBody>
       </p:sp>
       <p:sp>
         <p:nvSpPr>
-          <p:cNvPr id="6" name="Slide Number Placeholder 5">
-            <a:extLst>
-              <a:ext uri="{FF2B5EF4-FFF2-40B4-BE49-F238E27FC236}">
-                <a16:creationId xmlns:a16="http://schemas.microsoft.com/office/drawing/2014/main" id="{7F230EAE-9558-C67E-60F0-59E85266738F}"/>
-              </a:ext>
-            </a:extLst>
-          </p:cNvPr>
+          <p:cNvPr id="6" name="Slide Number Placeholder 5"/>
           <p:cNvSpPr>
             <a:spLocks noGrp="1"/>
           </p:cNvSpPr>
@@ -1182,13 +2328,39 @@
             <p:ph type="sldNum" sz="quarter" idx="12"/>
           </p:nvPr>
         </p:nvSpPr>
-        <p:spPr/>
+        <p:spPr>
+          <a:xfrm>
+            <a:off x="8610600" y="6356351"/>
+            <a:ext cx="2743200" cy="365125"/>
+          </a:xfrm>
+          <a:prstGeom prst="rect">
+            <a:avLst/>
+          </a:prstGeom>
+        </p:spPr>
         <p:txBody>
           <a:bodyPr/>
-          <a:lstStyle/>
-          <a:p>
-            <a:fld id="{3CAD1949-089B-5040-A81F-BF6C5D83A7A1}" type="slidenum">
-              <a:rPr lang="en-US" smtClean="0"/>
+          <a:lstStyle>
+            <a:lvl1pPr eaLnBrk="1" fontAlgn="auto" hangingPunct="1">
+              <a:spcBef>
+                <a:spcPts val="0"/>
+              </a:spcBef>
+              <a:spcAft>
+                <a:spcPts val="0"/>
+              </a:spcAft>
+              <a:defRPr>
+                <a:latin typeface="+mn-lt"/>
+              </a:defRPr>
+            </a:lvl1pPr>
+          </a:lstStyle>
+          <a:p>
+            <a:pPr>
+              <a:defRPr/>
+            </a:pPr>
+            <a:fld id="{6E0432DD-3022-4B79-ADC3-576652E0D925}" type="slidenum">
+              <a:rPr lang="en-US"/>
+              <a:pPr>
+                <a:defRPr/>
+              </a:pPr>
               <a:t>‹#›</a:t>
             </a:fld>
             <a:endParaRPr lang="en-US"/>
@@ -1198,7 +2370,7 @@
     </p:spTree>
     <p:extLst>
       <p:ext uri="{BB962C8B-B14F-4D97-AF65-F5344CB8AC3E}">
-        <p14:creationId xmlns:p14="http://schemas.microsoft.com/office/powerpoint/2010/main" val="1164414496"/>
+        <p14:creationId xmlns:p14="http://schemas.microsoft.com/office/powerpoint/2010/main" val="3216155538"/>
       </p:ext>
     </p:extLst>
   </p:cSld>
@@ -1227,13 +2399,7 @@
       </p:grpSpPr>
       <p:sp>
         <p:nvSpPr>
-          <p:cNvPr id="2" name="Title 1">
-            <a:extLst>
-              <a:ext uri="{FF2B5EF4-FFF2-40B4-BE49-F238E27FC236}">
-                <a16:creationId xmlns:a16="http://schemas.microsoft.com/office/drawing/2014/main" id="{A273F2A4-16CB-176F-CF0B-95D61CB35CD5}"/>
-              </a:ext>
-            </a:extLst>
-          </p:cNvPr>
+          <p:cNvPr id="2" name="Title 1"/>
           <p:cNvSpPr>
             <a:spLocks noGrp="1"/>
           </p:cNvSpPr>
@@ -1241,7 +2407,15 @@
             <p:ph type="title"/>
           </p:nvPr>
         </p:nvSpPr>
-        <p:spPr/>
+        <p:spPr>
+          <a:xfrm>
+            <a:off x="838200" y="365126"/>
+            <a:ext cx="10515600" cy="1325563"/>
+          </a:xfrm>
+          <a:prstGeom prst="rect">
+            <a:avLst/>
+          </a:prstGeom>
+        </p:spPr>
         <p:txBody>
           <a:bodyPr/>
           <a:lstStyle/>
@@ -1255,13 +2429,7 @@
       </p:sp>
       <p:sp>
         <p:nvSpPr>
-          <p:cNvPr id="3" name="Content Placeholder 2">
-            <a:extLst>
-              <a:ext uri="{FF2B5EF4-FFF2-40B4-BE49-F238E27FC236}">
-                <a16:creationId xmlns:a16="http://schemas.microsoft.com/office/drawing/2014/main" id="{448142B0-55CE-7DDA-A4F1-B0BFF6154E05}"/>
-              </a:ext>
-            </a:extLst>
-          </p:cNvPr>
+          <p:cNvPr id="3" name="Content Placeholder 2"/>
           <p:cNvSpPr>
             <a:spLocks noGrp="1"/>
           </p:cNvSpPr>
@@ -1272,8 +2440,11 @@
         <p:spPr>
           <a:xfrm>
             <a:off x="838200" y="1825625"/>
-            <a:ext cx="5181600" cy="4351338"/>
-          </a:xfrm>
+            <a:ext cx="5156200" cy="4351338"/>
+          </a:xfrm>
+          <a:prstGeom prst="rect">
+            <a:avLst/>
+          </a:prstGeom>
         </p:spPr>
         <p:txBody>
           <a:bodyPr/>
@@ -1282,7 +2453,7 @@
             <a:pPr lvl="0"/>
             <a:r>
               <a:rPr lang="en-US"/>
-              <a:t>Click to edit Master text styles</a:t>
+              <a:t>Edit Master text styles</a:t>
             </a:r>
           </a:p>
           <a:p>
@@ -1317,13 +2488,7 @@
       </p:sp>
       <p:sp>
         <p:nvSpPr>
-          <p:cNvPr id="4" name="Content Placeholder 3">
-            <a:extLst>
-              <a:ext uri="{FF2B5EF4-FFF2-40B4-BE49-F238E27FC236}">
-                <a16:creationId xmlns:a16="http://schemas.microsoft.com/office/drawing/2014/main" id="{28755FA5-DC17-230A-A2BB-89E76BF42B24}"/>
-              </a:ext>
-            </a:extLst>
-          </p:cNvPr>
+          <p:cNvPr id="4" name="Content Placeholder 3"/>
           <p:cNvSpPr>
             <a:spLocks noGrp="1"/>
           </p:cNvSpPr>
@@ -1333,9 +2498,12 @@
         </p:nvSpPr>
         <p:spPr>
           <a:xfrm>
-            <a:off x="6172200" y="1825625"/>
-            <a:ext cx="5181600" cy="4351338"/>
-          </a:xfrm>
+            <a:off x="6197600" y="1825625"/>
+            <a:ext cx="5156200" cy="4351338"/>
+          </a:xfrm>
+          <a:prstGeom prst="rect">
+            <a:avLst/>
+          </a:prstGeom>
         </p:spPr>
         <p:txBody>
           <a:bodyPr/>
@@ -1344,7 +2512,7 @@
             <a:pPr lvl="0"/>
             <a:r>
               <a:rPr lang="en-US"/>
-              <a:t>Click to edit Master text styles</a:t>
+              <a:t>Edit Master text styles</a:t>
             </a:r>
           </a:p>
           <a:p>
@@ -1379,13 +2547,7 @@
       </p:sp>
       <p:sp>
         <p:nvSpPr>
-          <p:cNvPr id="5" name="Date Placeholder 4">
-            <a:extLst>
-              <a:ext uri="{FF2B5EF4-FFF2-40B4-BE49-F238E27FC236}">
-                <a16:creationId xmlns:a16="http://schemas.microsoft.com/office/drawing/2014/main" id="{3C964D4C-8098-E3DE-F2C5-A701EE5F3F32}"/>
-              </a:ext>
-            </a:extLst>
-          </p:cNvPr>
+          <p:cNvPr id="5" name="Date Placeholder 4"/>
           <p:cNvSpPr>
             <a:spLocks noGrp="1"/>
           </p:cNvSpPr>
@@ -1393,14 +2555,40 @@
             <p:ph type="dt" sz="half" idx="10"/>
           </p:nvPr>
         </p:nvSpPr>
-        <p:spPr/>
+        <p:spPr>
+          <a:xfrm>
+            <a:off x="838200" y="6356351"/>
+            <a:ext cx="2743200" cy="365125"/>
+          </a:xfrm>
+          <a:prstGeom prst="rect">
+            <a:avLst/>
+          </a:prstGeom>
+        </p:spPr>
         <p:txBody>
           <a:bodyPr/>
-          <a:lstStyle/>
-          <a:p>
-            <a:fld id="{1D926A6E-1A60-2B4A-8860-6ABCC5DA00C8}" type="datetimeFigureOut">
-              <a:rPr lang="en-US" smtClean="0"/>
-              <a:t>7/21/26</a:t>
+          <a:lstStyle>
+            <a:lvl1pPr eaLnBrk="1" fontAlgn="auto" hangingPunct="1">
+              <a:spcBef>
+                <a:spcPts val="0"/>
+              </a:spcBef>
+              <a:spcAft>
+                <a:spcPts val="0"/>
+              </a:spcAft>
+              <a:defRPr>
+                <a:latin typeface="+mn-lt"/>
+              </a:defRPr>
+            </a:lvl1pPr>
+          </a:lstStyle>
+          <a:p>
+            <a:pPr>
+              <a:defRPr/>
+            </a:pPr>
+            <a:fld id="{1EF5E2CC-DA79-4853-8258-AF060453E055}" type="datetimeFigureOut">
+              <a:rPr lang="en-US"/>
+              <a:pPr>
+                <a:defRPr/>
+              </a:pPr>
+              <a:t>7/22/26</a:t>
             </a:fld>
             <a:endParaRPr lang="en-US"/>
           </a:p>
@@ -1408,13 +2596,7 @@
       </p:sp>
       <p:sp>
         <p:nvSpPr>
-          <p:cNvPr id="6" name="Footer Placeholder 5">
-            <a:extLst>
-              <a:ext uri="{FF2B5EF4-FFF2-40B4-BE49-F238E27FC236}">
-                <a16:creationId xmlns:a16="http://schemas.microsoft.com/office/drawing/2014/main" id="{E62774CB-D6AE-69BA-2ACD-32B21FCD3DCF}"/>
-              </a:ext>
-            </a:extLst>
-          </p:cNvPr>
+          <p:cNvPr id="6" name="Footer Placeholder 5"/>
           <p:cNvSpPr>
             <a:spLocks noGrp="1"/>
           </p:cNvSpPr>
@@ -1422,24 +2604,41 @@
             <p:ph type="ftr" sz="quarter" idx="11"/>
           </p:nvPr>
         </p:nvSpPr>
-        <p:spPr/>
+        <p:spPr>
+          <a:xfrm>
+            <a:off x="4038600" y="6356351"/>
+            <a:ext cx="4114800" cy="365125"/>
+          </a:xfrm>
+          <a:prstGeom prst="rect">
+            <a:avLst/>
+          </a:prstGeom>
+        </p:spPr>
         <p:txBody>
           <a:bodyPr/>
-          <a:lstStyle/>
-          <a:p>
+          <a:lstStyle>
+            <a:lvl1pPr eaLnBrk="1" fontAlgn="auto" hangingPunct="1">
+              <a:spcBef>
+                <a:spcPts val="0"/>
+              </a:spcBef>
+              <a:spcAft>
+                <a:spcPts val="0"/>
+              </a:spcAft>
+              <a:defRPr>
+                <a:latin typeface="+mn-lt"/>
+              </a:defRPr>
+            </a:lvl1pPr>
+          </a:lstStyle>
+          <a:p>
+            <a:pPr>
+              <a:defRPr/>
+            </a:pPr>
             <a:endParaRPr lang="en-US"/>
           </a:p>
         </p:txBody>
       </p:sp>
       <p:sp>
         <p:nvSpPr>
-          <p:cNvPr id="7" name="Slide Number Placeholder 6">
-            <a:extLst>
-              <a:ext uri="{FF2B5EF4-FFF2-40B4-BE49-F238E27FC236}">
-                <a16:creationId xmlns:a16="http://schemas.microsoft.com/office/drawing/2014/main" id="{2C23A5E5-7E0A-5694-1691-77810B367B75}"/>
-              </a:ext>
-            </a:extLst>
-          </p:cNvPr>
+          <p:cNvPr id="7" name="Slide Number Placeholder 6"/>
           <p:cNvSpPr>
             <a:spLocks noGrp="1"/>
           </p:cNvSpPr>
@@ -1447,13 +2646,39 @@
             <p:ph type="sldNum" sz="quarter" idx="12"/>
           </p:nvPr>
         </p:nvSpPr>
-        <p:spPr/>
+        <p:spPr>
+          <a:xfrm>
+            <a:off x="8610600" y="6356351"/>
+            <a:ext cx="2743200" cy="365125"/>
+          </a:xfrm>
+          <a:prstGeom prst="rect">
+            <a:avLst/>
+          </a:prstGeom>
+        </p:spPr>
         <p:txBody>
           <a:bodyPr/>
-          <a:lstStyle/>
-          <a:p>
-            <a:fld id="{3CAD1949-089B-5040-A81F-BF6C5D83A7A1}" type="slidenum">
-              <a:rPr lang="en-US" smtClean="0"/>
+          <a:lstStyle>
+            <a:lvl1pPr eaLnBrk="1" fontAlgn="auto" hangingPunct="1">
+              <a:spcBef>
+                <a:spcPts val="0"/>
+              </a:spcBef>
+              <a:spcAft>
+                <a:spcPts val="0"/>
+              </a:spcAft>
+              <a:defRPr>
+                <a:latin typeface="+mn-lt"/>
+              </a:defRPr>
+            </a:lvl1pPr>
+          </a:lstStyle>
+          <a:p>
+            <a:pPr>
+              <a:defRPr/>
+            </a:pPr>
+            <a:fld id="{BF26677F-0461-4469-B2E9-76729843E5B1}" type="slidenum">
+              <a:rPr lang="en-US"/>
+              <a:pPr>
+                <a:defRPr/>
+              </a:pPr>
               <a:t>‹#›</a:t>
             </a:fld>
             <a:endParaRPr lang="en-US"/>
@@ -1463,7 +2688,7 @@
     </p:spTree>
     <p:extLst>
       <p:ext uri="{BB962C8B-B14F-4D97-AF65-F5344CB8AC3E}">
-        <p14:creationId xmlns:p14="http://schemas.microsoft.com/office/powerpoint/2010/main" val="2223374951"/>
+        <p14:creationId xmlns:p14="http://schemas.microsoft.com/office/powerpoint/2010/main" val="3182172227"/>
       </p:ext>
     </p:extLst>
   </p:cSld>
@@ -1492,13 +2717,7 @@
       </p:grpSpPr>
       <p:sp>
         <p:nvSpPr>
-          <p:cNvPr id="2" name="Title 1">
-            <a:extLst>
-              <a:ext uri="{FF2B5EF4-FFF2-40B4-BE49-F238E27FC236}">
-                <a16:creationId xmlns:a16="http://schemas.microsoft.com/office/drawing/2014/main" id="{2EF83497-B675-BABE-12E4-032D26E64B7A}"/>
-              </a:ext>
-            </a:extLst>
-          </p:cNvPr>
+          <p:cNvPr id="2" name="Title 1"/>
           <p:cNvSpPr>
             <a:spLocks noGrp="1"/>
           </p:cNvSpPr>
@@ -1508,9 +2727,12 @@
         </p:nvSpPr>
         <p:spPr>
           <a:xfrm>
-            <a:off x="839788" y="365125"/>
+            <a:off x="840317" y="365126"/>
             <a:ext cx="10515600" cy="1325563"/>
           </a:xfrm>
+          <a:prstGeom prst="rect">
+            <a:avLst/>
+          </a:prstGeom>
         </p:spPr>
         <p:txBody>
           <a:bodyPr/>
@@ -1525,13 +2747,7 @@
       </p:sp>
       <p:sp>
         <p:nvSpPr>
-          <p:cNvPr id="3" name="Text Placeholder 2">
-            <a:extLst>
-              <a:ext uri="{FF2B5EF4-FFF2-40B4-BE49-F238E27FC236}">
-                <a16:creationId xmlns:a16="http://schemas.microsoft.com/office/drawing/2014/main" id="{3CA944DC-C6C7-2AAD-A0A3-F083E271123F}"/>
-              </a:ext>
-            </a:extLst>
-          </p:cNvPr>
+          <p:cNvPr id="3" name="Text Placeholder 2"/>
           <p:cNvSpPr>
             <a:spLocks noGrp="1"/>
           </p:cNvSpPr>
@@ -1541,9 +2757,12 @@
         </p:nvSpPr>
         <p:spPr>
           <a:xfrm>
-            <a:off x="839788" y="1681163"/>
-            <a:ext cx="5157787" cy="823912"/>
-          </a:xfrm>
+            <a:off x="840318" y="1681163"/>
+            <a:ext cx="5158316" cy="823912"/>
+          </a:xfrm>
+          <a:prstGeom prst="rect">
+            <a:avLst/>
+          </a:prstGeom>
         </p:spPr>
         <p:txBody>
           <a:bodyPr anchor="b"/>
@@ -1589,20 +2808,14 @@
             <a:pPr lvl="0"/>
             <a:r>
               <a:rPr lang="en-US"/>
-              <a:t>Click to edit Master text styles</a:t>
-            </a:r>
-          </a:p>
-        </p:txBody>
-      </p:sp>
-      <p:sp>
-        <p:nvSpPr>
-          <p:cNvPr id="4" name="Content Placeholder 3">
-            <a:extLst>
-              <a:ext uri="{FF2B5EF4-FFF2-40B4-BE49-F238E27FC236}">
-                <a16:creationId xmlns:a16="http://schemas.microsoft.com/office/drawing/2014/main" id="{40223E6D-3098-5D9B-6067-00C3A59DE146}"/>
-              </a:ext>
-            </a:extLst>
-          </p:cNvPr>
+              <a:t>Edit Master text styles</a:t>
+            </a:r>
+          </a:p>
+        </p:txBody>
+      </p:sp>
+      <p:sp>
+        <p:nvSpPr>
+          <p:cNvPr id="4" name="Content Placeholder 3"/>
           <p:cNvSpPr>
             <a:spLocks noGrp="1"/>
           </p:cNvSpPr>
@@ -1612,9 +2825,12 @@
         </p:nvSpPr>
         <p:spPr>
           <a:xfrm>
-            <a:off x="839788" y="2505075"/>
-            <a:ext cx="5157787" cy="3684588"/>
-          </a:xfrm>
+            <a:off x="840318" y="2505075"/>
+            <a:ext cx="5158316" cy="3684588"/>
+          </a:xfrm>
+          <a:prstGeom prst="rect">
+            <a:avLst/>
+          </a:prstGeom>
         </p:spPr>
         <p:txBody>
           <a:bodyPr/>
@@ -1623,7 +2839,7 @@
             <a:pPr lvl="0"/>
             <a:r>
               <a:rPr lang="en-US"/>
-              <a:t>Click to edit Master text styles</a:t>
+              <a:t>Edit Master text styles</a:t>
             </a:r>
           </a:p>
           <a:p>
@@ -1658,13 +2874,7 @@
       </p:sp>
       <p:sp>
         <p:nvSpPr>
-          <p:cNvPr id="5" name="Text Placeholder 4">
-            <a:extLst>
-              <a:ext uri="{FF2B5EF4-FFF2-40B4-BE49-F238E27FC236}">
-                <a16:creationId xmlns:a16="http://schemas.microsoft.com/office/drawing/2014/main" id="{895A8D17-1DB5-0F3D-0B7B-46252DDFD2CB}"/>
-              </a:ext>
-            </a:extLst>
-          </p:cNvPr>
+          <p:cNvPr id="5" name="Text Placeholder 4"/>
           <p:cNvSpPr>
             <a:spLocks noGrp="1"/>
           </p:cNvSpPr>
@@ -1675,8 +2885,11 @@
         <p:spPr>
           <a:xfrm>
             <a:off x="6172200" y="1681163"/>
-            <a:ext cx="5183188" cy="823912"/>
-          </a:xfrm>
+            <a:ext cx="5183717" cy="823912"/>
+          </a:xfrm>
+          <a:prstGeom prst="rect">
+            <a:avLst/>
+          </a:prstGeom>
         </p:spPr>
         <p:txBody>
           <a:bodyPr anchor="b"/>
@@ -1722,20 +2935,14 @@
             <a:pPr lvl="0"/>
             <a:r>
               <a:rPr lang="en-US"/>
-              <a:t>Click to edit Master text styles</a:t>
-            </a:r>
-          </a:p>
-        </p:txBody>
-      </p:sp>
-      <p:sp>
-        <p:nvSpPr>
-          <p:cNvPr id="6" name="Content Placeholder 5">
-            <a:extLst>
-              <a:ext uri="{FF2B5EF4-FFF2-40B4-BE49-F238E27FC236}">
-                <a16:creationId xmlns:a16="http://schemas.microsoft.com/office/drawing/2014/main" id="{627EFED1-F53D-9B2F-775C-C7BB17A14301}"/>
-              </a:ext>
-            </a:extLst>
-          </p:cNvPr>
+              <a:t>Edit Master text styles</a:t>
+            </a:r>
+          </a:p>
+        </p:txBody>
+      </p:sp>
+      <p:sp>
+        <p:nvSpPr>
+          <p:cNvPr id="6" name="Content Placeholder 5"/>
           <p:cNvSpPr>
             <a:spLocks noGrp="1"/>
           </p:cNvSpPr>
@@ -1746,8 +2953,11 @@
         <p:spPr>
           <a:xfrm>
             <a:off x="6172200" y="2505075"/>
-            <a:ext cx="5183188" cy="3684588"/>
-          </a:xfrm>
+            <a:ext cx="5183717" cy="3684588"/>
+          </a:xfrm>
+          <a:prstGeom prst="rect">
+            <a:avLst/>
+          </a:prstGeom>
         </p:spPr>
         <p:txBody>
           <a:bodyPr/>
@@ -1756,7 +2966,7 @@
             <a:pPr lvl="0"/>
             <a:r>
               <a:rPr lang="en-US"/>
-              <a:t>Click to edit Master text styles</a:t>
+              <a:t>Edit Master text styles</a:t>
             </a:r>
           </a:p>
           <a:p>
@@ -1791,13 +3001,7 @@
       </p:sp>
       <p:sp>
         <p:nvSpPr>
-          <p:cNvPr id="7" name="Date Placeholder 6">
-            <a:extLst>
-              <a:ext uri="{FF2B5EF4-FFF2-40B4-BE49-F238E27FC236}">
-                <a16:creationId xmlns:a16="http://schemas.microsoft.com/office/drawing/2014/main" id="{0DE64543-2036-579C-E0D6-16591C9D54E6}"/>
-              </a:ext>
-            </a:extLst>
-          </p:cNvPr>
+          <p:cNvPr id="7" name="Date Placeholder 6"/>
           <p:cNvSpPr>
             <a:spLocks noGrp="1"/>
           </p:cNvSpPr>
@@ -1805,14 +3009,40 @@
             <p:ph type="dt" sz="half" idx="10"/>
           </p:nvPr>
         </p:nvSpPr>
-        <p:spPr/>
+        <p:spPr>
+          <a:xfrm>
+            <a:off x="838200" y="6356351"/>
+            <a:ext cx="2743200" cy="365125"/>
+          </a:xfrm>
+          <a:prstGeom prst="rect">
+            <a:avLst/>
+          </a:prstGeom>
+        </p:spPr>
         <p:txBody>
           <a:bodyPr/>
-          <a:lstStyle/>
-          <a:p>
-            <a:fld id="{1D926A6E-1A60-2B4A-8860-6ABCC5DA00C8}" type="datetimeFigureOut">
-              <a:rPr lang="en-US" smtClean="0"/>
-              <a:t>7/21/26</a:t>
+          <a:lstStyle>
+            <a:lvl1pPr eaLnBrk="1" fontAlgn="auto" hangingPunct="1">
+              <a:spcBef>
+                <a:spcPts val="0"/>
+              </a:spcBef>
+              <a:spcAft>
+                <a:spcPts val="0"/>
+              </a:spcAft>
+              <a:defRPr>
+                <a:latin typeface="+mn-lt"/>
+              </a:defRPr>
+            </a:lvl1pPr>
+          </a:lstStyle>
+          <a:p>
+            <a:pPr>
+              <a:defRPr/>
+            </a:pPr>
+            <a:fld id="{9328697D-D40A-4151-BFB8-91A0C9AACDF7}" type="datetimeFigureOut">
+              <a:rPr lang="en-US"/>
+              <a:pPr>
+                <a:defRPr/>
+              </a:pPr>
+              <a:t>7/22/26</a:t>
             </a:fld>
             <a:endParaRPr lang="en-US"/>
           </a:p>
@@ -1820,13 +3050,7 @@
       </p:sp>
       <p:sp>
         <p:nvSpPr>
-          <p:cNvPr id="8" name="Footer Placeholder 7">
-            <a:extLst>
-              <a:ext uri="{FF2B5EF4-FFF2-40B4-BE49-F238E27FC236}">
-                <a16:creationId xmlns:a16="http://schemas.microsoft.com/office/drawing/2014/main" id="{DF3787AE-E3C0-9069-F7AF-E6CDDD9F9C0A}"/>
-              </a:ext>
-            </a:extLst>
-          </p:cNvPr>
+          <p:cNvPr id="8" name="Footer Placeholder 7"/>
           <p:cNvSpPr>
             <a:spLocks noGrp="1"/>
           </p:cNvSpPr>
@@ -1834,24 +3058,41 @@
             <p:ph type="ftr" sz="quarter" idx="11"/>
           </p:nvPr>
         </p:nvSpPr>
-        <p:spPr/>
+        <p:spPr>
+          <a:xfrm>
+            <a:off x="4038600" y="6356351"/>
+            <a:ext cx="4114800" cy="365125"/>
+          </a:xfrm>
+          <a:prstGeom prst="rect">
+            <a:avLst/>
+          </a:prstGeom>
+        </p:spPr>
         <p:txBody>
           <a:bodyPr/>
-          <a:lstStyle/>
-          <a:p>
+          <a:lstStyle>
+            <a:lvl1pPr eaLnBrk="1" fontAlgn="auto" hangingPunct="1">
+              <a:spcBef>
+                <a:spcPts val="0"/>
+              </a:spcBef>
+              <a:spcAft>
+                <a:spcPts val="0"/>
+              </a:spcAft>
+              <a:defRPr>
+                <a:latin typeface="+mn-lt"/>
+              </a:defRPr>
+            </a:lvl1pPr>
+          </a:lstStyle>
+          <a:p>
+            <a:pPr>
+              <a:defRPr/>
+            </a:pPr>
             <a:endParaRPr lang="en-US"/>
           </a:p>
         </p:txBody>
       </p:sp>
       <p:sp>
         <p:nvSpPr>
-          <p:cNvPr id="9" name="Slide Number Placeholder 8">
-            <a:extLst>
-              <a:ext uri="{FF2B5EF4-FFF2-40B4-BE49-F238E27FC236}">
-                <a16:creationId xmlns:a16="http://schemas.microsoft.com/office/drawing/2014/main" id="{EA9E3EC0-1B93-E5C6-38AF-338E6AF2F5E0}"/>
-              </a:ext>
-            </a:extLst>
-          </p:cNvPr>
+          <p:cNvPr id="9" name="Slide Number Placeholder 8"/>
           <p:cNvSpPr>
             <a:spLocks noGrp="1"/>
           </p:cNvSpPr>
@@ -1859,13 +3100,39 @@
             <p:ph type="sldNum" sz="quarter" idx="12"/>
           </p:nvPr>
         </p:nvSpPr>
-        <p:spPr/>
+        <p:spPr>
+          <a:xfrm>
+            <a:off x="8610600" y="6356351"/>
+            <a:ext cx="2743200" cy="365125"/>
+          </a:xfrm>
+          <a:prstGeom prst="rect">
+            <a:avLst/>
+          </a:prstGeom>
+        </p:spPr>
         <p:txBody>
           <a:bodyPr/>
-          <a:lstStyle/>
-          <a:p>
-            <a:fld id="{3CAD1949-089B-5040-A81F-BF6C5D83A7A1}" type="slidenum">
-              <a:rPr lang="en-US" smtClean="0"/>
+          <a:lstStyle>
+            <a:lvl1pPr eaLnBrk="1" fontAlgn="auto" hangingPunct="1">
+              <a:spcBef>
+                <a:spcPts val="0"/>
+              </a:spcBef>
+              <a:spcAft>
+                <a:spcPts val="0"/>
+              </a:spcAft>
+              <a:defRPr>
+                <a:latin typeface="+mn-lt"/>
+              </a:defRPr>
+            </a:lvl1pPr>
+          </a:lstStyle>
+          <a:p>
+            <a:pPr>
+              <a:defRPr/>
+            </a:pPr>
+            <a:fld id="{7208E2E0-59F3-469B-AE70-CEC9BDD25C8E}" type="slidenum">
+              <a:rPr lang="en-US"/>
+              <a:pPr>
+                <a:defRPr/>
+              </a:pPr>
               <a:t>‹#›</a:t>
             </a:fld>
             <a:endParaRPr lang="en-US"/>
@@ -1875,7 +3142,7 @@
     </p:spTree>
     <p:extLst>
       <p:ext uri="{BB962C8B-B14F-4D97-AF65-F5344CB8AC3E}">
-        <p14:creationId xmlns:p14="http://schemas.microsoft.com/office/powerpoint/2010/main" val="3163199628"/>
+        <p14:creationId xmlns:p14="http://schemas.microsoft.com/office/powerpoint/2010/main" val="1306247035"/>
       </p:ext>
     </p:extLst>
   </p:cSld>
@@ -1904,13 +3171,7 @@
       </p:grpSpPr>
       <p:sp>
         <p:nvSpPr>
-          <p:cNvPr id="2" name="Title 1">
-            <a:extLst>
-              <a:ext uri="{FF2B5EF4-FFF2-40B4-BE49-F238E27FC236}">
-                <a16:creationId xmlns:a16="http://schemas.microsoft.com/office/drawing/2014/main" id="{098F0578-65CE-4DBC-42E1-2672CBB02900}"/>
-              </a:ext>
-            </a:extLst>
-          </p:cNvPr>
+          <p:cNvPr id="2" name="Title 1"/>
           <p:cNvSpPr>
             <a:spLocks noGrp="1"/>
           </p:cNvSpPr>
@@ -1918,7 +3179,15 @@
             <p:ph type="title"/>
           </p:nvPr>
         </p:nvSpPr>
-        <p:spPr/>
+        <p:spPr>
+          <a:xfrm>
+            <a:off x="838200" y="365126"/>
+            <a:ext cx="10515600" cy="1325563"/>
+          </a:xfrm>
+          <a:prstGeom prst="rect">
+            <a:avLst/>
+          </a:prstGeom>
+        </p:spPr>
         <p:txBody>
           <a:bodyPr/>
           <a:lstStyle/>
@@ -1932,13 +3201,7 @@
       </p:sp>
       <p:sp>
         <p:nvSpPr>
-          <p:cNvPr id="3" name="Date Placeholder 2">
-            <a:extLst>
-              <a:ext uri="{FF2B5EF4-FFF2-40B4-BE49-F238E27FC236}">
-                <a16:creationId xmlns:a16="http://schemas.microsoft.com/office/drawing/2014/main" id="{EED7B5AF-3E0F-2BF8-45ED-986555339DF0}"/>
-              </a:ext>
-            </a:extLst>
-          </p:cNvPr>
+          <p:cNvPr id="3" name="Date Placeholder 2"/>
           <p:cNvSpPr>
             <a:spLocks noGrp="1"/>
           </p:cNvSpPr>
@@ -1946,14 +3209,40 @@
             <p:ph type="dt" sz="half" idx="10"/>
           </p:nvPr>
         </p:nvSpPr>
-        <p:spPr/>
+        <p:spPr>
+          <a:xfrm>
+            <a:off x="838200" y="6356351"/>
+            <a:ext cx="2743200" cy="365125"/>
+          </a:xfrm>
+          <a:prstGeom prst="rect">
+            <a:avLst/>
+          </a:prstGeom>
+        </p:spPr>
         <p:txBody>
           <a:bodyPr/>
-          <a:lstStyle/>
-          <a:p>
-            <a:fld id="{1D926A6E-1A60-2B4A-8860-6ABCC5DA00C8}" type="datetimeFigureOut">
-              <a:rPr lang="en-US" smtClean="0"/>
-              <a:t>7/21/26</a:t>
+          <a:lstStyle>
+            <a:lvl1pPr eaLnBrk="1" fontAlgn="auto" hangingPunct="1">
+              <a:spcBef>
+                <a:spcPts val="0"/>
+              </a:spcBef>
+              <a:spcAft>
+                <a:spcPts val="0"/>
+              </a:spcAft>
+              <a:defRPr>
+                <a:latin typeface="+mn-lt"/>
+              </a:defRPr>
+            </a:lvl1pPr>
+          </a:lstStyle>
+          <a:p>
+            <a:pPr>
+              <a:defRPr/>
+            </a:pPr>
+            <a:fld id="{5AF5A10B-18AC-4241-8C4F-728F480E8639}" type="datetimeFigureOut">
+              <a:rPr lang="en-US"/>
+              <a:pPr>
+                <a:defRPr/>
+              </a:pPr>
+              <a:t>7/22/26</a:t>
             </a:fld>
             <a:endParaRPr lang="en-US"/>
           </a:p>
@@ -1961,13 +3250,7 @@
       </p:sp>
       <p:sp>
         <p:nvSpPr>
-          <p:cNvPr id="4" name="Footer Placeholder 3">
-            <a:extLst>
-              <a:ext uri="{FF2B5EF4-FFF2-40B4-BE49-F238E27FC236}">
-                <a16:creationId xmlns:a16="http://schemas.microsoft.com/office/drawing/2014/main" id="{B0512D67-99BB-6F3C-3933-011376A8238A}"/>
-              </a:ext>
-            </a:extLst>
-          </p:cNvPr>
+          <p:cNvPr id="4" name="Footer Placeholder 3"/>
           <p:cNvSpPr>
             <a:spLocks noGrp="1"/>
           </p:cNvSpPr>
@@ -1975,24 +3258,41 @@
             <p:ph type="ftr" sz="quarter" idx="11"/>
           </p:nvPr>
         </p:nvSpPr>
-        <p:spPr/>
+        <p:spPr>
+          <a:xfrm>
+            <a:off x="4038600" y="6356351"/>
+            <a:ext cx="4114800" cy="365125"/>
+          </a:xfrm>
+          <a:prstGeom prst="rect">
+            <a:avLst/>
+          </a:prstGeom>
+        </p:spPr>
         <p:txBody>
           <a:bodyPr/>
-          <a:lstStyle/>
-          <a:p>
+          <a:lstStyle>
+            <a:lvl1pPr eaLnBrk="1" fontAlgn="auto" hangingPunct="1">
+              <a:spcBef>
+                <a:spcPts val="0"/>
+              </a:spcBef>
+              <a:spcAft>
+                <a:spcPts val="0"/>
+              </a:spcAft>
+              <a:defRPr>
+                <a:latin typeface="+mn-lt"/>
+              </a:defRPr>
+            </a:lvl1pPr>
+          </a:lstStyle>
+          <a:p>
+            <a:pPr>
+              <a:defRPr/>
+            </a:pPr>
             <a:endParaRPr lang="en-US"/>
           </a:p>
         </p:txBody>
       </p:sp>
       <p:sp>
         <p:nvSpPr>
-          <p:cNvPr id="5" name="Slide Number Placeholder 4">
-            <a:extLst>
-              <a:ext uri="{FF2B5EF4-FFF2-40B4-BE49-F238E27FC236}">
-                <a16:creationId xmlns:a16="http://schemas.microsoft.com/office/drawing/2014/main" id="{2F6D14A0-8B95-FB2B-62C5-842F8D1F1A46}"/>
-              </a:ext>
-            </a:extLst>
-          </p:cNvPr>
+          <p:cNvPr id="5" name="Slide Number Placeholder 4"/>
           <p:cNvSpPr>
             <a:spLocks noGrp="1"/>
           </p:cNvSpPr>
@@ -2000,13 +3300,39 @@
             <p:ph type="sldNum" sz="quarter" idx="12"/>
           </p:nvPr>
         </p:nvSpPr>
-        <p:spPr/>
+        <p:spPr>
+          <a:xfrm>
+            <a:off x="8610600" y="6356351"/>
+            <a:ext cx="2743200" cy="365125"/>
+          </a:xfrm>
+          <a:prstGeom prst="rect">
+            <a:avLst/>
+          </a:prstGeom>
+        </p:spPr>
         <p:txBody>
           <a:bodyPr/>
-          <a:lstStyle/>
-          <a:p>
-            <a:fld id="{3CAD1949-089B-5040-A81F-BF6C5D83A7A1}" type="slidenum">
-              <a:rPr lang="en-US" smtClean="0"/>
+          <a:lstStyle>
+            <a:lvl1pPr eaLnBrk="1" fontAlgn="auto" hangingPunct="1">
+              <a:spcBef>
+                <a:spcPts val="0"/>
+              </a:spcBef>
+              <a:spcAft>
+                <a:spcPts val="0"/>
+              </a:spcAft>
+              <a:defRPr>
+                <a:latin typeface="+mn-lt"/>
+              </a:defRPr>
+            </a:lvl1pPr>
+          </a:lstStyle>
+          <a:p>
+            <a:pPr>
+              <a:defRPr/>
+            </a:pPr>
+            <a:fld id="{E667326E-5F03-4324-85E2-67F51579D598}" type="slidenum">
+              <a:rPr lang="en-US"/>
+              <a:pPr>
+                <a:defRPr/>
+              </a:pPr>
               <a:t>‹#›</a:t>
             </a:fld>
             <a:endParaRPr lang="en-US"/>
@@ -2016,7 +3342,7 @@
     </p:spTree>
     <p:extLst>
       <p:ext uri="{BB962C8B-B14F-4D97-AF65-F5344CB8AC3E}">
-        <p14:creationId xmlns:p14="http://schemas.microsoft.com/office/powerpoint/2010/main" val="380968912"/>
+        <p14:creationId xmlns:p14="http://schemas.microsoft.com/office/powerpoint/2010/main" val="1594078193"/>
       </p:ext>
     </p:extLst>
   </p:cSld>
@@ -2045,13 +3371,7 @@
       </p:grpSpPr>
       <p:sp>
         <p:nvSpPr>
-          <p:cNvPr id="2" name="Date Placeholder 1">
-            <a:extLst>
-              <a:ext uri="{FF2B5EF4-FFF2-40B4-BE49-F238E27FC236}">
-                <a16:creationId xmlns:a16="http://schemas.microsoft.com/office/drawing/2014/main" id="{5122F37D-3936-093D-809D-F2E116FEABDA}"/>
-              </a:ext>
-            </a:extLst>
-          </p:cNvPr>
+          <p:cNvPr id="2" name="Date Placeholder 1"/>
           <p:cNvSpPr>
             <a:spLocks noGrp="1"/>
           </p:cNvSpPr>
@@ -2059,14 +3379,40 @@
             <p:ph type="dt" sz="half" idx="10"/>
           </p:nvPr>
         </p:nvSpPr>
-        <p:spPr/>
+        <p:spPr>
+          <a:xfrm>
+            <a:off x="838200" y="6356351"/>
+            <a:ext cx="2743200" cy="365125"/>
+          </a:xfrm>
+          <a:prstGeom prst="rect">
+            <a:avLst/>
+          </a:prstGeom>
+        </p:spPr>
         <p:txBody>
           <a:bodyPr/>
-          <a:lstStyle/>
-          <a:p>
-            <a:fld id="{1D926A6E-1A60-2B4A-8860-6ABCC5DA00C8}" type="datetimeFigureOut">
-              <a:rPr lang="en-US" smtClean="0"/>
-              <a:t>7/21/26</a:t>
+          <a:lstStyle>
+            <a:lvl1pPr eaLnBrk="1" fontAlgn="auto" hangingPunct="1">
+              <a:spcBef>
+                <a:spcPts val="0"/>
+              </a:spcBef>
+              <a:spcAft>
+                <a:spcPts val="0"/>
+              </a:spcAft>
+              <a:defRPr>
+                <a:latin typeface="+mn-lt"/>
+              </a:defRPr>
+            </a:lvl1pPr>
+          </a:lstStyle>
+          <a:p>
+            <a:pPr>
+              <a:defRPr/>
+            </a:pPr>
+            <a:fld id="{5E2EB4C6-6375-417E-93D6-8C4223D7EAFD}" type="datetimeFigureOut">
+              <a:rPr lang="en-US"/>
+              <a:pPr>
+                <a:defRPr/>
+              </a:pPr>
+              <a:t>7/22/26</a:t>
             </a:fld>
             <a:endParaRPr lang="en-US"/>
           </a:p>
@@ -2074,13 +3420,7 @@
       </p:sp>
       <p:sp>
         <p:nvSpPr>
-          <p:cNvPr id="3" name="Footer Placeholder 2">
-            <a:extLst>
-              <a:ext uri="{FF2B5EF4-FFF2-40B4-BE49-F238E27FC236}">
-                <a16:creationId xmlns:a16="http://schemas.microsoft.com/office/drawing/2014/main" id="{61B9678A-CF4C-944E-599C-B7BFDEC8691D}"/>
-              </a:ext>
-            </a:extLst>
-          </p:cNvPr>
+          <p:cNvPr id="3" name="Footer Placeholder 2"/>
           <p:cNvSpPr>
             <a:spLocks noGrp="1"/>
           </p:cNvSpPr>
@@ -2088,24 +3428,41 @@
             <p:ph type="ftr" sz="quarter" idx="11"/>
           </p:nvPr>
         </p:nvSpPr>
-        <p:spPr/>
+        <p:spPr>
+          <a:xfrm>
+            <a:off x="4038600" y="6356351"/>
+            <a:ext cx="4114800" cy="365125"/>
+          </a:xfrm>
+          <a:prstGeom prst="rect">
+            <a:avLst/>
+          </a:prstGeom>
+        </p:spPr>
         <p:txBody>
           <a:bodyPr/>
-          <a:lstStyle/>
-          <a:p>
+          <a:lstStyle>
+            <a:lvl1pPr eaLnBrk="1" fontAlgn="auto" hangingPunct="1">
+              <a:spcBef>
+                <a:spcPts val="0"/>
+              </a:spcBef>
+              <a:spcAft>
+                <a:spcPts val="0"/>
+              </a:spcAft>
+              <a:defRPr>
+                <a:latin typeface="+mn-lt"/>
+              </a:defRPr>
+            </a:lvl1pPr>
+          </a:lstStyle>
+          <a:p>
+            <a:pPr>
+              <a:defRPr/>
+            </a:pPr>
             <a:endParaRPr lang="en-US"/>
           </a:p>
         </p:txBody>
       </p:sp>
       <p:sp>
         <p:nvSpPr>
-          <p:cNvPr id="4" name="Slide Number Placeholder 3">
-            <a:extLst>
-              <a:ext uri="{FF2B5EF4-FFF2-40B4-BE49-F238E27FC236}">
-                <a16:creationId xmlns:a16="http://schemas.microsoft.com/office/drawing/2014/main" id="{93508AB3-0E17-C78C-390B-3844A1EC0157}"/>
-              </a:ext>
-            </a:extLst>
-          </p:cNvPr>
+          <p:cNvPr id="4" name="Slide Number Placeholder 3"/>
           <p:cNvSpPr>
             <a:spLocks noGrp="1"/>
           </p:cNvSpPr>
@@ -2113,13 +3470,39 @@
             <p:ph type="sldNum" sz="quarter" idx="12"/>
           </p:nvPr>
         </p:nvSpPr>
-        <p:spPr/>
+        <p:spPr>
+          <a:xfrm>
+            <a:off x="8610600" y="6356351"/>
+            <a:ext cx="2743200" cy="365125"/>
+          </a:xfrm>
+          <a:prstGeom prst="rect">
+            <a:avLst/>
+          </a:prstGeom>
+        </p:spPr>
         <p:txBody>
           <a:bodyPr/>
-          <a:lstStyle/>
-          <a:p>
-            <a:fld id="{3CAD1949-089B-5040-A81F-BF6C5D83A7A1}" type="slidenum">
-              <a:rPr lang="en-US" smtClean="0"/>
+          <a:lstStyle>
+            <a:lvl1pPr eaLnBrk="1" fontAlgn="auto" hangingPunct="1">
+              <a:spcBef>
+                <a:spcPts val="0"/>
+              </a:spcBef>
+              <a:spcAft>
+                <a:spcPts val="0"/>
+              </a:spcAft>
+              <a:defRPr>
+                <a:latin typeface="+mn-lt"/>
+              </a:defRPr>
+            </a:lvl1pPr>
+          </a:lstStyle>
+          <a:p>
+            <a:pPr>
+              <a:defRPr/>
+            </a:pPr>
+            <a:fld id="{B3CC591E-2C5A-439A-B2C9-6F751105AB51}" type="slidenum">
+              <a:rPr lang="en-US"/>
+              <a:pPr>
+                <a:defRPr/>
+              </a:pPr>
               <a:t>‹#›</a:t>
             </a:fld>
             <a:endParaRPr lang="en-US"/>
@@ -2129,7 +3512,7 @@
     </p:spTree>
     <p:extLst>
       <p:ext uri="{BB962C8B-B14F-4D97-AF65-F5344CB8AC3E}">
-        <p14:creationId xmlns:p14="http://schemas.microsoft.com/office/powerpoint/2010/main" val="3722442972"/>
+        <p14:creationId xmlns:p14="http://schemas.microsoft.com/office/powerpoint/2010/main" val="2102974118"/>
       </p:ext>
     </p:extLst>
   </p:cSld>
@@ -2158,13 +3541,7 @@
       </p:grpSpPr>
       <p:sp>
         <p:nvSpPr>
-          <p:cNvPr id="2" name="Title 1">
-            <a:extLst>
-              <a:ext uri="{FF2B5EF4-FFF2-40B4-BE49-F238E27FC236}">
-                <a16:creationId xmlns:a16="http://schemas.microsoft.com/office/drawing/2014/main" id="{BD8D0B79-AF63-9D72-2103-8E2B740FD65B}"/>
-              </a:ext>
-            </a:extLst>
-          </p:cNvPr>
+          <p:cNvPr id="2" name="Title 1"/>
           <p:cNvSpPr>
             <a:spLocks noGrp="1"/>
           </p:cNvSpPr>
@@ -2174,9 +3551,12 @@
         </p:nvSpPr>
         <p:spPr>
           <a:xfrm>
-            <a:off x="839788" y="457200"/>
-            <a:ext cx="3932237" cy="1600200"/>
-          </a:xfrm>
+            <a:off x="840318" y="457200"/>
+            <a:ext cx="3932767" cy="1600200"/>
+          </a:xfrm>
+          <a:prstGeom prst="rect">
+            <a:avLst/>
+          </a:prstGeom>
         </p:spPr>
         <p:txBody>
           <a:bodyPr anchor="b"/>
@@ -2195,13 +3575,7 @@
       </p:sp>
       <p:sp>
         <p:nvSpPr>
-          <p:cNvPr id="3" name="Content Placeholder 2">
-            <a:extLst>
-              <a:ext uri="{FF2B5EF4-FFF2-40B4-BE49-F238E27FC236}">
-                <a16:creationId xmlns:a16="http://schemas.microsoft.com/office/drawing/2014/main" id="{B66CA863-6A03-5337-37E6-5EBCBCBEA376}"/>
-              </a:ext>
-            </a:extLst>
-          </p:cNvPr>
+          <p:cNvPr id="3" name="Content Placeholder 2"/>
           <p:cNvSpPr>
             <a:spLocks noGrp="1"/>
           </p:cNvSpPr>
@@ -2211,9 +3585,12 @@
         </p:nvSpPr>
         <p:spPr>
           <a:xfrm>
-            <a:off x="5183188" y="987425"/>
+            <a:off x="5183717" y="987426"/>
             <a:ext cx="6172200" cy="4873625"/>
           </a:xfrm>
+          <a:prstGeom prst="rect">
+            <a:avLst/>
+          </a:prstGeom>
         </p:spPr>
         <p:txBody>
           <a:bodyPr/>
@@ -2250,7 +3627,7 @@
             <a:pPr lvl="0"/>
             <a:r>
               <a:rPr lang="en-US"/>
-              <a:t>Click to edit Master text styles</a:t>
+              <a:t>Edit Master text styles</a:t>
             </a:r>
           </a:p>
           <a:p>
@@ -2285,13 +3662,7 @@
       </p:sp>
       <p:sp>
         <p:nvSpPr>
-          <p:cNvPr id="4" name="Text Placeholder 3">
-            <a:extLst>
-              <a:ext uri="{FF2B5EF4-FFF2-40B4-BE49-F238E27FC236}">
-                <a16:creationId xmlns:a16="http://schemas.microsoft.com/office/drawing/2014/main" id="{2A1B66EA-FE7D-9F32-DBFE-4E67CA3F7A96}"/>
-              </a:ext>
-            </a:extLst>
-          </p:cNvPr>
+          <p:cNvPr id="4" name="Text Placeholder 3"/>
           <p:cNvSpPr>
             <a:spLocks noGrp="1"/>
           </p:cNvSpPr>
@@ -2301,9 +3672,12 @@
         </p:nvSpPr>
         <p:spPr>
           <a:xfrm>
-            <a:off x="839788" y="2057400"/>
-            <a:ext cx="3932237" cy="3811588"/>
-          </a:xfrm>
+            <a:off x="840318" y="2057400"/>
+            <a:ext cx="3932767" cy="3811588"/>
+          </a:xfrm>
+          <a:prstGeom prst="rect">
+            <a:avLst/>
+          </a:prstGeom>
         </p:spPr>
         <p:txBody>
           <a:bodyPr/>
@@ -2349,20 +3723,14 @@
             <a:pPr lvl="0"/>
             <a:r>
               <a:rPr lang="en-US"/>
-              <a:t>Click to edit Master text styles</a:t>
-            </a:r>
-          </a:p>
-        </p:txBody>
-      </p:sp>
-      <p:sp>
-        <p:nvSpPr>
-          <p:cNvPr id="5" name="Date Placeholder 4">
-            <a:extLst>
-              <a:ext uri="{FF2B5EF4-FFF2-40B4-BE49-F238E27FC236}">
-                <a16:creationId xmlns:a16="http://schemas.microsoft.com/office/drawing/2014/main" id="{65694113-88B9-CA1E-71EC-503F8D130581}"/>
-              </a:ext>
-            </a:extLst>
-          </p:cNvPr>
+              <a:t>Edit Master text styles</a:t>
+            </a:r>
+          </a:p>
+        </p:txBody>
+      </p:sp>
+      <p:sp>
+        <p:nvSpPr>
+          <p:cNvPr id="5" name="Date Placeholder 4"/>
           <p:cNvSpPr>
             <a:spLocks noGrp="1"/>
           </p:cNvSpPr>
@@ -2370,14 +3738,40 @@
             <p:ph type="dt" sz="half" idx="10"/>
           </p:nvPr>
         </p:nvSpPr>
-        <p:spPr/>
+        <p:spPr>
+          <a:xfrm>
+            <a:off x="838200" y="6356351"/>
+            <a:ext cx="2743200" cy="365125"/>
+          </a:xfrm>
+          <a:prstGeom prst="rect">
+            <a:avLst/>
+          </a:prstGeom>
+        </p:spPr>
         <p:txBody>
           <a:bodyPr/>
-          <a:lstStyle/>
-          <a:p>
-            <a:fld id="{1D926A6E-1A60-2B4A-8860-6ABCC5DA00C8}" type="datetimeFigureOut">
-              <a:rPr lang="en-US" smtClean="0"/>
-              <a:t>7/21/26</a:t>
+          <a:lstStyle>
+            <a:lvl1pPr eaLnBrk="1" fontAlgn="auto" hangingPunct="1">
+              <a:spcBef>
+                <a:spcPts val="0"/>
+              </a:spcBef>
+              <a:spcAft>
+                <a:spcPts val="0"/>
+              </a:spcAft>
+              <a:defRPr>
+                <a:latin typeface="+mn-lt"/>
+              </a:defRPr>
+            </a:lvl1pPr>
+          </a:lstStyle>
+          <a:p>
+            <a:pPr>
+              <a:defRPr/>
+            </a:pPr>
+            <a:fld id="{1E5348A5-BD9C-442E-9ECC-DB0303A85F47}" type="datetimeFigureOut">
+              <a:rPr lang="en-US"/>
+              <a:pPr>
+                <a:defRPr/>
+              </a:pPr>
+              <a:t>7/22/26</a:t>
             </a:fld>
             <a:endParaRPr lang="en-US"/>
           </a:p>
@@ -2385,13 +3779,7 @@
       </p:sp>
       <p:sp>
         <p:nvSpPr>
-          <p:cNvPr id="6" name="Footer Placeholder 5">
-            <a:extLst>
-              <a:ext uri="{FF2B5EF4-FFF2-40B4-BE49-F238E27FC236}">
-                <a16:creationId xmlns:a16="http://schemas.microsoft.com/office/drawing/2014/main" id="{552DBE61-995A-9F0E-1B46-C471015922C6}"/>
-              </a:ext>
-            </a:extLst>
-          </p:cNvPr>
+          <p:cNvPr id="6" name="Footer Placeholder 5"/>
           <p:cNvSpPr>
             <a:spLocks noGrp="1"/>
           </p:cNvSpPr>
@@ -2399,24 +3787,41 @@
             <p:ph type="ftr" sz="quarter" idx="11"/>
           </p:nvPr>
         </p:nvSpPr>
-        <p:spPr/>
+        <p:spPr>
+          <a:xfrm>
+            <a:off x="4038600" y="6356351"/>
+            <a:ext cx="4114800" cy="365125"/>
+          </a:xfrm>
+          <a:prstGeom prst="rect">
+            <a:avLst/>
+          </a:prstGeom>
+        </p:spPr>
         <p:txBody>
           <a:bodyPr/>
-          <a:lstStyle/>
-          <a:p>
+          <a:lstStyle>
+            <a:lvl1pPr eaLnBrk="1" fontAlgn="auto" hangingPunct="1">
+              <a:spcBef>
+                <a:spcPts val="0"/>
+              </a:spcBef>
+              <a:spcAft>
+                <a:spcPts val="0"/>
+              </a:spcAft>
+              <a:defRPr>
+                <a:latin typeface="+mn-lt"/>
+              </a:defRPr>
+            </a:lvl1pPr>
+          </a:lstStyle>
+          <a:p>
+            <a:pPr>
+              <a:defRPr/>
+            </a:pPr>
             <a:endParaRPr lang="en-US"/>
           </a:p>
         </p:txBody>
       </p:sp>
       <p:sp>
         <p:nvSpPr>
-          <p:cNvPr id="7" name="Slide Number Placeholder 6">
-            <a:extLst>
-              <a:ext uri="{FF2B5EF4-FFF2-40B4-BE49-F238E27FC236}">
-                <a16:creationId xmlns:a16="http://schemas.microsoft.com/office/drawing/2014/main" id="{5452A58E-23CD-176F-0726-F43518C02AD4}"/>
-              </a:ext>
-            </a:extLst>
-          </p:cNvPr>
+          <p:cNvPr id="7" name="Slide Number Placeholder 6"/>
           <p:cNvSpPr>
             <a:spLocks noGrp="1"/>
           </p:cNvSpPr>
@@ -2424,13 +3829,39 @@
             <p:ph type="sldNum" sz="quarter" idx="12"/>
           </p:nvPr>
         </p:nvSpPr>
-        <p:spPr/>
+        <p:spPr>
+          <a:xfrm>
+            <a:off x="8610600" y="6356351"/>
+            <a:ext cx="2743200" cy="365125"/>
+          </a:xfrm>
+          <a:prstGeom prst="rect">
+            <a:avLst/>
+          </a:prstGeom>
+        </p:spPr>
         <p:txBody>
           <a:bodyPr/>
-          <a:lstStyle/>
-          <a:p>
-            <a:fld id="{3CAD1949-089B-5040-A81F-BF6C5D83A7A1}" type="slidenum">
-              <a:rPr lang="en-US" smtClean="0"/>
+          <a:lstStyle>
+            <a:lvl1pPr eaLnBrk="1" fontAlgn="auto" hangingPunct="1">
+              <a:spcBef>
+                <a:spcPts val="0"/>
+              </a:spcBef>
+              <a:spcAft>
+                <a:spcPts val="0"/>
+              </a:spcAft>
+              <a:defRPr>
+                <a:latin typeface="+mn-lt"/>
+              </a:defRPr>
+            </a:lvl1pPr>
+          </a:lstStyle>
+          <a:p>
+            <a:pPr>
+              <a:defRPr/>
+            </a:pPr>
+            <a:fld id="{BBE31A86-A818-4477-A4C3-18911CC9D37E}" type="slidenum">
+              <a:rPr lang="en-US"/>
+              <a:pPr>
+                <a:defRPr/>
+              </a:pPr>
               <a:t>‹#›</a:t>
             </a:fld>
             <a:endParaRPr lang="en-US"/>
@@ -2440,7 +3871,7 @@
     </p:spTree>
     <p:extLst>
       <p:ext uri="{BB962C8B-B14F-4D97-AF65-F5344CB8AC3E}">
-        <p14:creationId xmlns:p14="http://schemas.microsoft.com/office/powerpoint/2010/main" val="3941315930"/>
+        <p14:creationId xmlns:p14="http://schemas.microsoft.com/office/powerpoint/2010/main" val="1845853919"/>
       </p:ext>
     </p:extLst>
   </p:cSld>
@@ -2469,13 +3900,7 @@
       </p:grpSpPr>
       <p:sp>
         <p:nvSpPr>
-          <p:cNvPr id="2" name="Title 1">
-            <a:extLst>
-              <a:ext uri="{FF2B5EF4-FFF2-40B4-BE49-F238E27FC236}">
-                <a16:creationId xmlns:a16="http://schemas.microsoft.com/office/drawing/2014/main" id="{25CB8C8A-A8F7-6444-3D4D-7E76A23195FB}"/>
-              </a:ext>
-            </a:extLst>
-          </p:cNvPr>
+          <p:cNvPr id="2" name="Title 1"/>
           <p:cNvSpPr>
             <a:spLocks noGrp="1"/>
           </p:cNvSpPr>
@@ -2485,9 +3910,12 @@
         </p:nvSpPr>
         <p:spPr>
           <a:xfrm>
-            <a:off x="839788" y="457200"/>
-            <a:ext cx="3932237" cy="1600200"/>
-          </a:xfrm>
+            <a:off x="840318" y="457200"/>
+            <a:ext cx="3932767" cy="1600200"/>
+          </a:xfrm>
+          <a:prstGeom prst="rect">
+            <a:avLst/>
+          </a:prstGeom>
         </p:spPr>
         <p:txBody>
           <a:bodyPr anchor="b"/>
@@ -2506,13 +3934,7 @@
       </p:sp>
       <p:sp>
         <p:nvSpPr>
-          <p:cNvPr id="3" name="Picture Placeholder 2">
-            <a:extLst>
-              <a:ext uri="{FF2B5EF4-FFF2-40B4-BE49-F238E27FC236}">
-                <a16:creationId xmlns:a16="http://schemas.microsoft.com/office/drawing/2014/main" id="{301BF31E-A0FF-0BC6-32D7-A3CD54E43704}"/>
-              </a:ext>
-            </a:extLst>
-          </p:cNvPr>
+          <p:cNvPr id="3" name="Picture Placeholder 2"/>
           <p:cNvSpPr>
             <a:spLocks noGrp="1"/>
           </p:cNvSpPr>
@@ -2522,9 +3944,12 @@
         </p:nvSpPr>
         <p:spPr>
           <a:xfrm>
-            <a:off x="5183188" y="987425"/>
+            <a:off x="5183717" y="987426"/>
             <a:ext cx="6172200" cy="4873625"/>
           </a:xfrm>
+          <a:prstGeom prst="rect">
+            <a:avLst/>
+          </a:prstGeom>
         </p:spPr>
         <p:txBody>
           <a:bodyPr/>
@@ -2567,19 +3992,14 @@
             </a:lvl9pPr>
           </a:lstStyle>
           <a:p>
-            <a:endParaRPr lang="en-US"/>
-          </a:p>
-        </p:txBody>
-      </p:sp>
-      <p:sp>
-        <p:nvSpPr>
-          <p:cNvPr id="4" name="Text Placeholder 3">
-            <a:extLst>
-              <a:ext uri="{FF2B5EF4-FFF2-40B4-BE49-F238E27FC236}">
-                <a16:creationId xmlns:a16="http://schemas.microsoft.com/office/drawing/2014/main" id="{E890E27D-AEC4-E477-AB5E-8B026CA40436}"/>
-              </a:ext>
-            </a:extLst>
-          </p:cNvPr>
+            <a:pPr lvl="0"/>
+            <a:endParaRPr lang="en-US" noProof="0"/>
+          </a:p>
+        </p:txBody>
+      </p:sp>
+      <p:sp>
+        <p:nvSpPr>
+          <p:cNvPr id="4" name="Text Placeholder 3"/>
           <p:cNvSpPr>
             <a:spLocks noGrp="1"/>
           </p:cNvSpPr>
@@ -2589,9 +4009,12 @@
         </p:nvSpPr>
         <p:spPr>
           <a:xfrm>
-            <a:off x="839788" y="2057400"/>
-            <a:ext cx="3932237" cy="3811588"/>
-          </a:xfrm>
+            <a:off x="840318" y="2057400"/>
+            <a:ext cx="3932767" cy="3811588"/>
+          </a:xfrm>
+          <a:prstGeom prst="rect">
+            <a:avLst/>
+          </a:prstGeom>
         </p:spPr>
         <p:txBody>
           <a:bodyPr/>
@@ -2637,20 +4060,14 @@
             <a:pPr lvl="0"/>
             <a:r>
               <a:rPr lang="en-US"/>
-              <a:t>Click to edit Master text styles</a:t>
-            </a:r>
-          </a:p>
-        </p:txBody>
-      </p:sp>
-      <p:sp>
-        <p:nvSpPr>
-          <p:cNvPr id="5" name="Date Placeholder 4">
-            <a:extLst>
-              <a:ext uri="{FF2B5EF4-FFF2-40B4-BE49-F238E27FC236}">
-                <a16:creationId xmlns:a16="http://schemas.microsoft.com/office/drawing/2014/main" id="{96FD290A-0AE0-26EC-749A-03C58D0137AB}"/>
-              </a:ext>
-            </a:extLst>
-          </p:cNvPr>
+              <a:t>Edit Master text styles</a:t>
+            </a:r>
+          </a:p>
+        </p:txBody>
+      </p:sp>
+      <p:sp>
+        <p:nvSpPr>
+          <p:cNvPr id="5" name="Date Placeholder 4"/>
           <p:cNvSpPr>
             <a:spLocks noGrp="1"/>
           </p:cNvSpPr>
@@ -2658,14 +4075,40 @@
             <p:ph type="dt" sz="half" idx="10"/>
           </p:nvPr>
         </p:nvSpPr>
-        <p:spPr/>
+        <p:spPr>
+          <a:xfrm>
+            <a:off x="838200" y="6356351"/>
+            <a:ext cx="2743200" cy="365125"/>
+          </a:xfrm>
+          <a:prstGeom prst="rect">
+            <a:avLst/>
+          </a:prstGeom>
+        </p:spPr>
         <p:txBody>
           <a:bodyPr/>
-          <a:lstStyle/>
-          <a:p>
-            <a:fld id="{1D926A6E-1A60-2B4A-8860-6ABCC5DA00C8}" type="datetimeFigureOut">
-              <a:rPr lang="en-US" smtClean="0"/>
-              <a:t>7/21/26</a:t>
+          <a:lstStyle>
+            <a:lvl1pPr eaLnBrk="1" fontAlgn="auto" hangingPunct="1">
+              <a:spcBef>
+                <a:spcPts val="0"/>
+              </a:spcBef>
+              <a:spcAft>
+                <a:spcPts val="0"/>
+              </a:spcAft>
+              <a:defRPr>
+                <a:latin typeface="+mn-lt"/>
+              </a:defRPr>
+            </a:lvl1pPr>
+          </a:lstStyle>
+          <a:p>
+            <a:pPr>
+              <a:defRPr/>
+            </a:pPr>
+            <a:fld id="{1A1A212E-A63D-4047-BB50-95DD55E88100}" type="datetimeFigureOut">
+              <a:rPr lang="en-US"/>
+              <a:pPr>
+                <a:defRPr/>
+              </a:pPr>
+              <a:t>7/22/26</a:t>
             </a:fld>
             <a:endParaRPr lang="en-US"/>
           </a:p>
@@ -2673,13 +4116,7 @@
       </p:sp>
       <p:sp>
         <p:nvSpPr>
-          <p:cNvPr id="6" name="Footer Placeholder 5">
-            <a:extLst>
-              <a:ext uri="{FF2B5EF4-FFF2-40B4-BE49-F238E27FC236}">
-                <a16:creationId xmlns:a16="http://schemas.microsoft.com/office/drawing/2014/main" id="{D0F83FC9-1893-B731-218E-57CC31C953AE}"/>
-              </a:ext>
-            </a:extLst>
-          </p:cNvPr>
+          <p:cNvPr id="6" name="Footer Placeholder 5"/>
           <p:cNvSpPr>
             <a:spLocks noGrp="1"/>
           </p:cNvSpPr>
@@ -2687,24 +4124,41 @@
             <p:ph type="ftr" sz="quarter" idx="11"/>
           </p:nvPr>
         </p:nvSpPr>
-        <p:spPr/>
+        <p:spPr>
+          <a:xfrm>
+            <a:off x="4038600" y="6356351"/>
+            <a:ext cx="4114800" cy="365125"/>
+          </a:xfrm>
+          <a:prstGeom prst="rect">
+            <a:avLst/>
+          </a:prstGeom>
+        </p:spPr>
         <p:txBody>
           <a:bodyPr/>
-          <a:lstStyle/>
-          <a:p>
+          <a:lstStyle>
+            <a:lvl1pPr eaLnBrk="1" fontAlgn="auto" hangingPunct="1">
+              <a:spcBef>
+                <a:spcPts val="0"/>
+              </a:spcBef>
+              <a:spcAft>
+                <a:spcPts val="0"/>
+              </a:spcAft>
+              <a:defRPr>
+                <a:latin typeface="+mn-lt"/>
+              </a:defRPr>
+            </a:lvl1pPr>
+          </a:lstStyle>
+          <a:p>
+            <a:pPr>
+              <a:defRPr/>
+            </a:pPr>
             <a:endParaRPr lang="en-US"/>
           </a:p>
         </p:txBody>
       </p:sp>
       <p:sp>
         <p:nvSpPr>
-          <p:cNvPr id="7" name="Slide Number Placeholder 6">
-            <a:extLst>
-              <a:ext uri="{FF2B5EF4-FFF2-40B4-BE49-F238E27FC236}">
-                <a16:creationId xmlns:a16="http://schemas.microsoft.com/office/drawing/2014/main" id="{329D6663-F7CB-BC35-A1B2-FCB99CD65CCB}"/>
-              </a:ext>
-            </a:extLst>
-          </p:cNvPr>
+          <p:cNvPr id="7" name="Slide Number Placeholder 6"/>
           <p:cNvSpPr>
             <a:spLocks noGrp="1"/>
           </p:cNvSpPr>
@@ -2712,13 +4166,39 @@
             <p:ph type="sldNum" sz="quarter" idx="12"/>
           </p:nvPr>
         </p:nvSpPr>
-        <p:spPr/>
+        <p:spPr>
+          <a:xfrm>
+            <a:off x="8610600" y="6356351"/>
+            <a:ext cx="2743200" cy="365125"/>
+          </a:xfrm>
+          <a:prstGeom prst="rect">
+            <a:avLst/>
+          </a:prstGeom>
+        </p:spPr>
         <p:txBody>
           <a:bodyPr/>
-          <a:lstStyle/>
-          <a:p>
-            <a:fld id="{3CAD1949-089B-5040-A81F-BF6C5D83A7A1}" type="slidenum">
-              <a:rPr lang="en-US" smtClean="0"/>
+          <a:lstStyle>
+            <a:lvl1pPr eaLnBrk="1" fontAlgn="auto" hangingPunct="1">
+              <a:spcBef>
+                <a:spcPts val="0"/>
+              </a:spcBef>
+              <a:spcAft>
+                <a:spcPts val="0"/>
+              </a:spcAft>
+              <a:defRPr>
+                <a:latin typeface="+mn-lt"/>
+              </a:defRPr>
+            </a:lvl1pPr>
+          </a:lstStyle>
+          <a:p>
+            <a:pPr>
+              <a:defRPr/>
+            </a:pPr>
+            <a:fld id="{4D129F03-6940-41DE-B049-F6F50569C708}" type="slidenum">
+              <a:rPr lang="en-US"/>
+              <a:pPr>
+                <a:defRPr/>
+              </a:pPr>
               <a:t>‹#›</a:t>
             </a:fld>
             <a:endParaRPr lang="en-US"/>
@@ -2728,7 +4208,7 @@
     </p:spTree>
     <p:extLst>
       <p:ext uri="{BB962C8B-B14F-4D97-AF65-F5344CB8AC3E}">
-        <p14:creationId xmlns:p14="http://schemas.microsoft.com/office/powerpoint/2010/main" val="1315832933"/>
+        <p14:creationId xmlns:p14="http://schemas.microsoft.com/office/powerpoint/2010/main" val="1898344376"/>
       </p:ext>
     </p:extLst>
   </p:cSld>
@@ -2739,12 +4219,15 @@
 </file>
 
 <file path=ppt/slideMasters/slideMaster1.xml><?xml version="1.0" encoding="utf-8"?>
-<p:sldMaster xmlns:a="http://schemas.openxmlformats.org/drawingml/2006/main" xmlns:r="http://schemas.openxmlformats.org/officeDocument/2006/relationships" xmlns:p="http://schemas.openxmlformats.org/presentationml/2006/main">
+<p:sldMaster xmlns:a="http://schemas.openxmlformats.org/drawingml/2006/main" xmlns:r="http://schemas.openxmlformats.org/officeDocument/2006/relationships" xmlns:p="http://schemas.openxmlformats.org/presentationml/2006/main" preserve="1">
   <p:cSld>
     <p:bg>
-      <p:bgRef idx="1001">
-        <a:schemeClr val="bg1"/>
-      </p:bgRef>
+      <p:bgPr>
+        <a:solidFill>
+          <a:schemeClr val="bg1"/>
+        </a:solidFill>
+        <a:effectLst/>
+      </p:bgPr>
     </p:bg>
     <p:spTree>
       <p:nvGrpSpPr>
@@ -2762,277 +4245,842 @@
       </p:grpSpPr>
       <p:sp>
         <p:nvSpPr>
-          <p:cNvPr id="2" name="Title Placeholder 1">
+          <p:cNvPr id="1026" name="Rectangle 6"/>
+          <p:cNvSpPr>
+            <a:spLocks noChangeArrowheads="1"/>
+          </p:cNvSpPr>
+          <p:nvPr userDrawn="1"/>
+        </p:nvSpPr>
+        <p:spPr bwMode="auto">
+          <a:xfrm>
+            <a:off x="-4233" y="-7938"/>
+            <a:ext cx="12192000" cy="835026"/>
+          </a:xfrm>
+          <a:prstGeom prst="rect">
+            <a:avLst/>
+          </a:prstGeom>
+          <a:solidFill>
+            <a:srgbClr val="000000"/>
+          </a:solidFill>
+          <a:ln w="9525" algn="ctr">
+            <a:solidFill>
+              <a:srgbClr val="000000"/>
+            </a:solidFill>
+            <a:round/>
+            <a:headEnd/>
+            <a:tailEnd/>
+          </a:ln>
+        </p:spPr>
+        <p:txBody>
+          <a:bodyPr wrap="square" lIns="92075" tIns="46038" rIns="92075" bIns="46038">
+            <a:spAutoFit/>
+          </a:bodyPr>
+          <a:lstStyle>
+            <a:lvl1pPr>
+              <a:defRPr>
+                <a:solidFill>
+                  <a:schemeClr val="tx1"/>
+                </a:solidFill>
+                <a:latin typeface="Calibri" panose="020F0502020204030204" pitchFamily="34" charset="0"/>
+              </a:defRPr>
+            </a:lvl1pPr>
+            <a:lvl2pPr marL="742950" indent="-285750">
+              <a:defRPr>
+                <a:solidFill>
+                  <a:schemeClr val="tx1"/>
+                </a:solidFill>
+                <a:latin typeface="Calibri" panose="020F0502020204030204" pitchFamily="34" charset="0"/>
+              </a:defRPr>
+            </a:lvl2pPr>
+            <a:lvl3pPr marL="1143000" indent="-228600">
+              <a:defRPr>
+                <a:solidFill>
+                  <a:schemeClr val="tx1"/>
+                </a:solidFill>
+                <a:latin typeface="Calibri" panose="020F0502020204030204" pitchFamily="34" charset="0"/>
+              </a:defRPr>
+            </a:lvl3pPr>
+            <a:lvl4pPr marL="1600200" indent="-228600">
+              <a:defRPr>
+                <a:solidFill>
+                  <a:schemeClr val="tx1"/>
+                </a:solidFill>
+                <a:latin typeface="Calibri" panose="020F0502020204030204" pitchFamily="34" charset="0"/>
+              </a:defRPr>
+            </a:lvl4pPr>
+            <a:lvl5pPr marL="2057400" indent="-228600">
+              <a:defRPr>
+                <a:solidFill>
+                  <a:schemeClr val="tx1"/>
+                </a:solidFill>
+                <a:latin typeface="Calibri" panose="020F0502020204030204" pitchFamily="34" charset="0"/>
+              </a:defRPr>
+            </a:lvl5pPr>
+            <a:lvl6pPr marL="2514600" indent="-228600" defTabSz="457200" fontAlgn="base">
+              <a:spcBef>
+                <a:spcPct val="0"/>
+              </a:spcBef>
+              <a:spcAft>
+                <a:spcPct val="0"/>
+              </a:spcAft>
+              <a:defRPr>
+                <a:solidFill>
+                  <a:schemeClr val="tx1"/>
+                </a:solidFill>
+                <a:latin typeface="Calibri" panose="020F0502020204030204" pitchFamily="34" charset="0"/>
+              </a:defRPr>
+            </a:lvl6pPr>
+            <a:lvl7pPr marL="2971800" indent="-228600" defTabSz="457200" fontAlgn="base">
+              <a:spcBef>
+                <a:spcPct val="0"/>
+              </a:spcBef>
+              <a:spcAft>
+                <a:spcPct val="0"/>
+              </a:spcAft>
+              <a:defRPr>
+                <a:solidFill>
+                  <a:schemeClr val="tx1"/>
+                </a:solidFill>
+                <a:latin typeface="Calibri" panose="020F0502020204030204" pitchFamily="34" charset="0"/>
+              </a:defRPr>
+            </a:lvl7pPr>
+            <a:lvl8pPr marL="3429000" indent="-228600" defTabSz="457200" fontAlgn="base">
+              <a:spcBef>
+                <a:spcPct val="0"/>
+              </a:spcBef>
+              <a:spcAft>
+                <a:spcPct val="0"/>
+              </a:spcAft>
+              <a:defRPr>
+                <a:solidFill>
+                  <a:schemeClr val="tx1"/>
+                </a:solidFill>
+                <a:latin typeface="Calibri" panose="020F0502020204030204" pitchFamily="34" charset="0"/>
+              </a:defRPr>
+            </a:lvl8pPr>
+            <a:lvl9pPr marL="3886200" indent="-228600" defTabSz="457200" fontAlgn="base">
+              <a:spcBef>
+                <a:spcPct val="0"/>
+              </a:spcBef>
+              <a:spcAft>
+                <a:spcPct val="0"/>
+              </a:spcAft>
+              <a:defRPr>
+                <a:solidFill>
+                  <a:schemeClr val="tx1"/>
+                </a:solidFill>
+                <a:latin typeface="Calibri" panose="020F0502020204030204" pitchFamily="34" charset="0"/>
+              </a:defRPr>
+            </a:lvl9pPr>
+          </a:lstStyle>
+          <a:p>
+            <a:pPr algn="ctr">
+              <a:defRPr/>
+            </a:pPr>
+            <a:endParaRPr lang="en-US" altLang="en-US" sz="1400" b="1">
+              <a:solidFill>
+                <a:srgbClr val="000000"/>
+              </a:solidFill>
+              <a:latin typeface="Arial" panose="020B0604020202020204" pitchFamily="34" charset="0"/>
+            </a:endParaRPr>
+          </a:p>
+        </p:txBody>
+      </p:sp>
+      <p:sp>
+        <p:nvSpPr>
+          <p:cNvPr id="8" name="Rectangle 7"/>
+          <p:cNvSpPr/>
+          <p:nvPr userDrawn="1"/>
+        </p:nvSpPr>
+        <p:spPr>
+          <a:xfrm>
+            <a:off x="5903" y="842964"/>
+            <a:ext cx="12180193" cy="199460"/>
+          </a:xfrm>
+          <a:prstGeom prst="rect">
+            <a:avLst/>
+          </a:prstGeom>
+          <a:solidFill>
+            <a:srgbClr val="008000"/>
+          </a:solidFill>
+          <a:ln w="12700">
+            <a:solidFill>
+              <a:schemeClr val="tx1"/>
+            </a:solidFill>
+          </a:ln>
+          <a:scene3d>
+            <a:camera prst="orthographicFront"/>
+            <a:lightRig rig="threePt" dir="t"/>
+          </a:scene3d>
+          <a:sp3d>
+            <a:bevelT w="165100" prst="coolSlant"/>
+          </a:sp3d>
+        </p:spPr>
+        <p:style>
+          <a:lnRef idx="2">
+            <a:schemeClr val="accent1">
+              <a:shade val="50000"/>
+            </a:schemeClr>
+          </a:lnRef>
+          <a:fillRef idx="1">
+            <a:schemeClr val="accent1"/>
+          </a:fillRef>
+          <a:effectRef idx="0">
+            <a:schemeClr val="accent1"/>
+          </a:effectRef>
+          <a:fontRef idx="minor">
+            <a:schemeClr val="lt1"/>
+          </a:fontRef>
+        </p:style>
+        <p:txBody>
+          <a:bodyPr anchor="ctr"/>
+          <a:lstStyle/>
+          <a:p>
+            <a:pPr algn="ctr" eaLnBrk="1" fontAlgn="auto" hangingPunct="1">
+              <a:spcBef>
+                <a:spcPts val="0"/>
+              </a:spcBef>
+              <a:spcAft>
+                <a:spcPts val="0"/>
+              </a:spcAft>
+              <a:defRPr/>
+            </a:pPr>
+            <a:endParaRPr lang="en-US" sz="1800">
+              <a:solidFill>
+                <a:prstClr val="white"/>
+              </a:solidFill>
+            </a:endParaRPr>
+          </a:p>
+        </p:txBody>
+      </p:sp>
+      <p:sp>
+        <p:nvSpPr>
+          <p:cNvPr id="1030" name="Rectangle 8"/>
+          <p:cNvSpPr>
+            <a:spLocks noChangeArrowheads="1"/>
+          </p:cNvSpPr>
+          <p:nvPr userDrawn="1"/>
+        </p:nvSpPr>
+        <p:spPr bwMode="auto">
+          <a:xfrm>
+            <a:off x="5871419" y="813207"/>
+            <a:ext cx="449162" cy="276999"/>
+          </a:xfrm>
+          <a:prstGeom prst="rect">
+            <a:avLst/>
+          </a:prstGeom>
+          <a:noFill/>
+          <a:ln>
+            <a:noFill/>
+          </a:ln>
+          <a:extLst>
+            <a:ext uri="{909E8E84-426E-40DD-AFC4-6F175D3DCCD1}">
+              <a14:hiddenFill xmlns:a14="http://schemas.microsoft.com/office/drawing/2010/main">
+                <a:solidFill>
+                  <a:srgbClr val="FFFFFF"/>
+                </a:solidFill>
+              </a14:hiddenFill>
+            </a:ext>
+            <a:ext uri="{91240B29-F687-4F45-9708-019B960494DF}">
+              <a14:hiddenLine xmlns:a14="http://schemas.microsoft.com/office/drawing/2010/main" w="9525">
+                <a:solidFill>
+                  <a:srgbClr val="000000"/>
+                </a:solidFill>
+                <a:miter lim="800000"/>
+                <a:headEnd/>
+                <a:tailEnd/>
+              </a14:hiddenLine>
+            </a:ext>
+          </a:extLst>
+        </p:spPr>
+        <p:txBody>
+          <a:bodyPr wrap="none" anchor="ctr">
+            <a:spAutoFit/>
+          </a:bodyPr>
+          <a:lstStyle>
+            <a:lvl1pPr>
+              <a:defRPr>
+                <a:solidFill>
+                  <a:schemeClr val="tx1"/>
+                </a:solidFill>
+                <a:latin typeface="Calibri" panose="020F0502020204030204" pitchFamily="34" charset="0"/>
+              </a:defRPr>
+            </a:lvl1pPr>
+            <a:lvl2pPr marL="742950" indent="-285750">
+              <a:defRPr>
+                <a:solidFill>
+                  <a:schemeClr val="tx1"/>
+                </a:solidFill>
+                <a:latin typeface="Calibri" panose="020F0502020204030204" pitchFamily="34" charset="0"/>
+              </a:defRPr>
+            </a:lvl2pPr>
+            <a:lvl3pPr marL="1143000" indent="-228600">
+              <a:defRPr>
+                <a:solidFill>
+                  <a:schemeClr val="tx1"/>
+                </a:solidFill>
+                <a:latin typeface="Calibri" panose="020F0502020204030204" pitchFamily="34" charset="0"/>
+              </a:defRPr>
+            </a:lvl3pPr>
+            <a:lvl4pPr marL="1600200" indent="-228600">
+              <a:defRPr>
+                <a:solidFill>
+                  <a:schemeClr val="tx1"/>
+                </a:solidFill>
+                <a:latin typeface="Calibri" panose="020F0502020204030204" pitchFamily="34" charset="0"/>
+              </a:defRPr>
+            </a:lvl4pPr>
+            <a:lvl5pPr marL="2057400" indent="-228600">
+              <a:defRPr>
+                <a:solidFill>
+                  <a:schemeClr val="tx1"/>
+                </a:solidFill>
+                <a:latin typeface="Calibri" panose="020F0502020204030204" pitchFamily="34" charset="0"/>
+              </a:defRPr>
+            </a:lvl5pPr>
+            <a:lvl6pPr marL="2514600" indent="-228600" defTabSz="457200" fontAlgn="base">
+              <a:spcBef>
+                <a:spcPct val="0"/>
+              </a:spcBef>
+              <a:spcAft>
+                <a:spcPct val="0"/>
+              </a:spcAft>
+              <a:defRPr>
+                <a:solidFill>
+                  <a:schemeClr val="tx1"/>
+                </a:solidFill>
+                <a:latin typeface="Calibri" panose="020F0502020204030204" pitchFamily="34" charset="0"/>
+              </a:defRPr>
+            </a:lvl6pPr>
+            <a:lvl7pPr marL="2971800" indent="-228600" defTabSz="457200" fontAlgn="base">
+              <a:spcBef>
+                <a:spcPct val="0"/>
+              </a:spcBef>
+              <a:spcAft>
+                <a:spcPct val="0"/>
+              </a:spcAft>
+              <a:defRPr>
+                <a:solidFill>
+                  <a:schemeClr val="tx1"/>
+                </a:solidFill>
+                <a:latin typeface="Calibri" panose="020F0502020204030204" pitchFamily="34" charset="0"/>
+              </a:defRPr>
+            </a:lvl7pPr>
+            <a:lvl8pPr marL="3429000" indent="-228600" defTabSz="457200" fontAlgn="base">
+              <a:spcBef>
+                <a:spcPct val="0"/>
+              </a:spcBef>
+              <a:spcAft>
+                <a:spcPct val="0"/>
+              </a:spcAft>
+              <a:defRPr>
+                <a:solidFill>
+                  <a:schemeClr val="tx1"/>
+                </a:solidFill>
+                <a:latin typeface="Calibri" panose="020F0502020204030204" pitchFamily="34" charset="0"/>
+              </a:defRPr>
+            </a:lvl8pPr>
+            <a:lvl9pPr marL="3886200" indent="-228600" defTabSz="457200" fontAlgn="base">
+              <a:spcBef>
+                <a:spcPct val="0"/>
+              </a:spcBef>
+              <a:spcAft>
+                <a:spcPct val="0"/>
+              </a:spcAft>
+              <a:defRPr>
+                <a:solidFill>
+                  <a:schemeClr val="tx1"/>
+                </a:solidFill>
+                <a:latin typeface="Calibri" panose="020F0502020204030204" pitchFamily="34" charset="0"/>
+              </a:defRPr>
+            </a:lvl9pPr>
+          </a:lstStyle>
+          <a:p>
+            <a:pPr algn="ctr" eaLnBrk="1" hangingPunct="1">
+              <a:defRPr/>
+            </a:pPr>
+            <a:r>
+              <a:rPr lang="en-US" altLang="en-US" sz="1200" b="1" dirty="0">
+                <a:solidFill>
+                  <a:srgbClr val="F2F2F2"/>
+                </a:solidFill>
+                <a:latin typeface="Arial" panose="020B0604020202020204" pitchFamily="34" charset="0"/>
+                <a:cs typeface="Arial" panose="020B0604020202020204" pitchFamily="34" charset="0"/>
+              </a:rPr>
+              <a:t>CUI</a:t>
+            </a:r>
+          </a:p>
+        </p:txBody>
+      </p:sp>
+      <p:sp>
+        <p:nvSpPr>
+          <p:cNvPr id="10" name="Rectangle 9"/>
+          <p:cNvSpPr/>
+          <p:nvPr userDrawn="1"/>
+        </p:nvSpPr>
+        <p:spPr>
+          <a:xfrm>
+            <a:off x="1" y="6612578"/>
+            <a:ext cx="12192000" cy="245422"/>
+          </a:xfrm>
+          <a:prstGeom prst="rect">
+            <a:avLst/>
+          </a:prstGeom>
+          <a:solidFill>
+            <a:srgbClr val="FFFF00"/>
+          </a:solidFill>
+          <a:ln w="12700">
+            <a:solidFill>
+              <a:schemeClr val="tx1"/>
+            </a:solidFill>
+          </a:ln>
+          <a:scene3d>
+            <a:camera prst="orthographicFront"/>
+            <a:lightRig rig="threePt" dir="t"/>
+          </a:scene3d>
+          <a:sp3d>
+            <a:bevelT w="165100" prst="coolSlant"/>
+          </a:sp3d>
+        </p:spPr>
+        <p:style>
+          <a:lnRef idx="2">
+            <a:schemeClr val="accent1">
+              <a:shade val="50000"/>
+            </a:schemeClr>
+          </a:lnRef>
+          <a:fillRef idx="1">
+            <a:schemeClr val="accent1"/>
+          </a:fillRef>
+          <a:effectRef idx="0">
+            <a:schemeClr val="accent1"/>
+          </a:effectRef>
+          <a:fontRef idx="minor">
+            <a:schemeClr val="lt1"/>
+          </a:fontRef>
+        </p:style>
+        <p:txBody>
+          <a:bodyPr anchor="ctr"/>
+          <a:lstStyle/>
+          <a:p>
+            <a:pPr algn="ctr" eaLnBrk="1" fontAlgn="auto" hangingPunct="1">
+              <a:spcBef>
+                <a:spcPts val="0"/>
+              </a:spcBef>
+              <a:spcAft>
+                <a:spcPts val="0"/>
+              </a:spcAft>
+              <a:defRPr/>
+            </a:pPr>
+            <a:endParaRPr lang="en-US" sz="1800">
+              <a:solidFill>
+                <a:prstClr val="white"/>
+              </a:solidFill>
+            </a:endParaRPr>
+          </a:p>
+        </p:txBody>
+      </p:sp>
+      <p:sp>
+        <p:nvSpPr>
+          <p:cNvPr id="12" name="Rectangle 11"/>
+          <p:cNvSpPr/>
+          <p:nvPr userDrawn="1"/>
+        </p:nvSpPr>
+        <p:spPr>
+          <a:xfrm>
+            <a:off x="4494194" y="313099"/>
+            <a:ext cx="3092257" cy="461665"/>
+          </a:xfrm>
+          <a:prstGeom prst="rect">
+            <a:avLst/>
+          </a:prstGeom>
+          <a:noFill/>
+        </p:spPr>
+        <p:txBody>
+          <a:bodyPr wrap="none">
+            <a:spAutoFit/>
+          </a:bodyPr>
+          <a:lstStyle/>
+          <a:p>
+            <a:pPr algn="ctr" eaLnBrk="1" fontAlgn="auto" hangingPunct="1">
+              <a:spcBef>
+                <a:spcPts val="0"/>
+              </a:spcBef>
+              <a:spcAft>
+                <a:spcPts val="0"/>
+              </a:spcAft>
+              <a:defRPr/>
+            </a:pPr>
+            <a:r>
+              <a:rPr lang="en-US" sz="2400" b="1" spc="50" dirty="0">
+                <a:ln w="13500">
+                  <a:solidFill>
+                    <a:srgbClr val="4F81BD">
+                      <a:shade val="2500"/>
+                      <a:alpha val="6500"/>
+                    </a:srgbClr>
+                  </a:solidFill>
+                  <a:prstDash val="solid"/>
+                </a:ln>
+                <a:solidFill>
+                  <a:srgbClr val="4F81BD">
+                    <a:tint val="3000"/>
+                    <a:alpha val="95000"/>
+                  </a:srgbClr>
+                </a:solidFill>
+                <a:effectLst>
+                  <a:outerShdw blurRad="38100" dist="38100" dir="2700000" algn="tl">
+                    <a:srgbClr val="000000">
+                      <a:alpha val="43137"/>
+                    </a:srgbClr>
+                  </a:outerShdw>
+                </a:effectLst>
+                <a:latin typeface="Arial" panose="020B0604020202020204" pitchFamily="34" charset="0"/>
+                <a:cs typeface="Arial" panose="020B0604020202020204" pitchFamily="34" charset="0"/>
+              </a:rPr>
+              <a:t>Welcome Wingman</a:t>
+            </a:r>
+          </a:p>
+        </p:txBody>
+      </p:sp>
+      <p:sp>
+        <p:nvSpPr>
+          <p:cNvPr id="13" name="Text Placeholder 2"/>
+          <p:cNvSpPr txBox="1">
+            <a:spLocks/>
+          </p:cNvSpPr>
+          <p:nvPr userDrawn="1"/>
+        </p:nvSpPr>
+        <p:spPr>
+          <a:xfrm>
+            <a:off x="6352" y="6429376"/>
+            <a:ext cx="12185649" cy="428625"/>
+          </a:xfrm>
+          <a:prstGeom prst="rect">
+            <a:avLst/>
+          </a:prstGeom>
+        </p:spPr>
+        <p:txBody>
+          <a:bodyPr/>
+          <a:lstStyle>
+            <a:lvl1pPr marL="0" indent="0" algn="l" rtl="0" eaLnBrk="0" fontAlgn="base" hangingPunct="0">
+              <a:spcBef>
+                <a:spcPct val="20000"/>
+              </a:spcBef>
+              <a:spcAft>
+                <a:spcPct val="0"/>
+              </a:spcAft>
+              <a:buNone/>
+              <a:defRPr sz="1200" b="1" i="1">
+                <a:solidFill>
+                  <a:schemeClr val="tx1"/>
+                </a:solidFill>
+                <a:effectLst>
+                  <a:outerShdw blurRad="38100" dist="38100" dir="2700000" algn="tl">
+                    <a:srgbClr val="000000">
+                      <a:alpha val="43137"/>
+                    </a:srgbClr>
+                  </a:outerShdw>
+                </a:effectLst>
+                <a:latin typeface="+mn-lt"/>
+                <a:ea typeface="+mn-ea"/>
+                <a:cs typeface="+mn-cs"/>
+              </a:defRPr>
+            </a:lvl1pPr>
+            <a:lvl2pPr marL="457200" indent="0" algn="l" rtl="0" eaLnBrk="0" fontAlgn="base" hangingPunct="0">
+              <a:spcBef>
+                <a:spcPct val="20000"/>
+              </a:spcBef>
+              <a:spcAft>
+                <a:spcPct val="0"/>
+              </a:spcAft>
+              <a:buNone/>
+              <a:defRPr sz="1800">
+                <a:solidFill>
+                  <a:schemeClr val="tx1">
+                    <a:tint val="75000"/>
+                  </a:schemeClr>
+                </a:solidFill>
+                <a:latin typeface="+mn-lt"/>
+              </a:defRPr>
+            </a:lvl2pPr>
+            <a:lvl3pPr marL="914400" indent="0" algn="l" rtl="0" eaLnBrk="0" fontAlgn="base" hangingPunct="0">
+              <a:spcBef>
+                <a:spcPct val="20000"/>
+              </a:spcBef>
+              <a:spcAft>
+                <a:spcPct val="0"/>
+              </a:spcAft>
+              <a:buNone/>
+              <a:defRPr sz="1600">
+                <a:solidFill>
+                  <a:schemeClr val="tx1">
+                    <a:tint val="75000"/>
+                  </a:schemeClr>
+                </a:solidFill>
+                <a:latin typeface="+mn-lt"/>
+              </a:defRPr>
+            </a:lvl3pPr>
+            <a:lvl4pPr marL="1371600" indent="0" algn="l" rtl="0" eaLnBrk="0" fontAlgn="base" hangingPunct="0">
+              <a:spcBef>
+                <a:spcPct val="20000"/>
+              </a:spcBef>
+              <a:spcAft>
+                <a:spcPct val="0"/>
+              </a:spcAft>
+              <a:buNone/>
+              <a:defRPr sz="1400">
+                <a:solidFill>
+                  <a:schemeClr val="tx1">
+                    <a:tint val="75000"/>
+                  </a:schemeClr>
+                </a:solidFill>
+                <a:latin typeface="+mn-lt"/>
+              </a:defRPr>
+            </a:lvl4pPr>
+            <a:lvl5pPr marL="1828800" indent="0" algn="l" rtl="0" eaLnBrk="0" fontAlgn="base" hangingPunct="0">
+              <a:spcBef>
+                <a:spcPct val="20000"/>
+              </a:spcBef>
+              <a:spcAft>
+                <a:spcPct val="0"/>
+              </a:spcAft>
+              <a:buNone/>
+              <a:defRPr sz="1400">
+                <a:solidFill>
+                  <a:schemeClr val="tx1">
+                    <a:tint val="75000"/>
+                  </a:schemeClr>
+                </a:solidFill>
+                <a:latin typeface="+mn-lt"/>
+              </a:defRPr>
+            </a:lvl5pPr>
+            <a:lvl6pPr marL="2286000" indent="0" algn="l" rtl="0" fontAlgn="base">
+              <a:spcBef>
+                <a:spcPct val="20000"/>
+              </a:spcBef>
+              <a:spcAft>
+                <a:spcPct val="0"/>
+              </a:spcAft>
+              <a:buNone/>
+              <a:defRPr sz="1400">
+                <a:solidFill>
+                  <a:schemeClr val="tx1">
+                    <a:tint val="75000"/>
+                  </a:schemeClr>
+                </a:solidFill>
+                <a:latin typeface="+mn-lt"/>
+              </a:defRPr>
+            </a:lvl6pPr>
+            <a:lvl7pPr marL="2743200" indent="0" algn="l" rtl="0" fontAlgn="base">
+              <a:spcBef>
+                <a:spcPct val="20000"/>
+              </a:spcBef>
+              <a:spcAft>
+                <a:spcPct val="0"/>
+              </a:spcAft>
+              <a:buNone/>
+              <a:defRPr sz="1400">
+                <a:solidFill>
+                  <a:schemeClr val="tx1">
+                    <a:tint val="75000"/>
+                  </a:schemeClr>
+                </a:solidFill>
+                <a:latin typeface="+mn-lt"/>
+              </a:defRPr>
+            </a:lvl7pPr>
+            <a:lvl8pPr marL="3200400" indent="0" algn="l" rtl="0" fontAlgn="base">
+              <a:spcBef>
+                <a:spcPct val="20000"/>
+              </a:spcBef>
+              <a:spcAft>
+                <a:spcPct val="0"/>
+              </a:spcAft>
+              <a:buNone/>
+              <a:defRPr sz="1400">
+                <a:solidFill>
+                  <a:schemeClr val="tx1">
+                    <a:tint val="75000"/>
+                  </a:schemeClr>
+                </a:solidFill>
+                <a:latin typeface="+mn-lt"/>
+              </a:defRPr>
+            </a:lvl8pPr>
+            <a:lvl9pPr marL="3657600" indent="0" algn="l" rtl="0" fontAlgn="base">
+              <a:spcBef>
+                <a:spcPct val="20000"/>
+              </a:spcBef>
+              <a:spcAft>
+                <a:spcPct val="0"/>
+              </a:spcAft>
+              <a:buNone/>
+              <a:defRPr sz="1400">
+                <a:solidFill>
+                  <a:schemeClr val="tx1">
+                    <a:tint val="75000"/>
+                  </a:schemeClr>
+                </a:solidFill>
+                <a:latin typeface="+mn-lt"/>
+              </a:defRPr>
+            </a:lvl9pPr>
+          </a:lstStyle>
+          <a:p>
+            <a:pPr algn="ctr" defTabSz="914400">
+              <a:defRPr/>
+            </a:pPr>
+            <a:endParaRPr lang="en-US" sz="1200" kern="0" dirty="0"/>
+          </a:p>
+        </p:txBody>
+      </p:sp>
+      <p:pic>
+        <p:nvPicPr>
+          <p:cNvPr id="1037" name="Picture 11" descr="nps_ppt_slide"/>
+          <p:cNvPicPr>
+            <a:picLocks noChangeAspect="1" noChangeArrowheads="1"/>
+          </p:cNvPicPr>
+          <p:nvPr userDrawn="1"/>
+        </p:nvPicPr>
+        <p:blipFill>
+          <a:blip r:embed="rId16">
+            <a:extLst>
+              <a:ext uri="{28A0092B-C50C-407E-A947-70E740481C1C}">
+                <a14:useLocalDpi xmlns:a14="http://schemas.microsoft.com/office/drawing/2010/main" val="0"/>
+              </a:ext>
+            </a:extLst>
+          </a:blip>
+          <a:srcRect/>
+          <a:stretch>
+            <a:fillRect/>
+          </a:stretch>
+        </p:blipFill>
+        <p:spPr bwMode="auto">
+          <a:xfrm>
+            <a:off x="3510314" y="1309765"/>
+            <a:ext cx="8675334" cy="5280401"/>
+          </a:xfrm>
+          <a:prstGeom prst="rect">
+            <a:avLst/>
+          </a:prstGeom>
+          <a:noFill/>
+          <a:ln>
+            <a:noFill/>
+          </a:ln>
+          <a:extLst>
+            <a:ext uri="{909E8E84-426E-40DD-AFC4-6F175D3DCCD1}">
+              <a14:hiddenFill xmlns:a14="http://schemas.microsoft.com/office/drawing/2010/main">
+                <a:solidFill>
+                  <a:srgbClr val="FFFFFF"/>
+                </a:solidFill>
+              </a14:hiddenFill>
+            </a:ext>
+            <a:ext uri="{91240B29-F687-4F45-9708-019B960494DF}">
+              <a14:hiddenLine xmlns:a14="http://schemas.microsoft.com/office/drawing/2010/main" w="9525">
+                <a:solidFill>
+                  <a:srgbClr val="000000"/>
+                </a:solidFill>
+                <a:miter lim="800000"/>
+                <a:headEnd/>
+                <a:tailEnd/>
+              </a14:hiddenLine>
+            </a:ext>
+          </a:extLst>
+        </p:spPr>
+      </p:pic>
+      <p:pic>
+        <p:nvPicPr>
+          <p:cNvPr id="2" name="Picture 1" descr="File:US Air Force Logo Solid Colour.svg">
             <a:extLst>
               <a:ext uri="{FF2B5EF4-FFF2-40B4-BE49-F238E27FC236}">
-                <a16:creationId xmlns:a16="http://schemas.microsoft.com/office/drawing/2014/main" id="{0A921904-36AC-9318-8B02-38BF8A77845F}"/>
+                <a16:creationId xmlns:a16="http://schemas.microsoft.com/office/drawing/2014/main" id="{820A1212-98EB-7E71-E5F2-00DE12C3B1DE}"/>
               </a:ext>
             </a:extLst>
           </p:cNvPr>
-          <p:cNvSpPr>
-            <a:spLocks noGrp="1"/>
-          </p:cNvSpPr>
-          <p:nvPr>
-            <p:ph type="title"/>
-          </p:nvPr>
-        </p:nvSpPr>
-        <p:spPr>
-          <a:xfrm>
-            <a:off x="838200" y="365125"/>
-            <a:ext cx="10515600" cy="1325563"/>
-          </a:xfrm>
-          <a:prstGeom prst="rect">
-            <a:avLst/>
-          </a:prstGeom>
-        </p:spPr>
-        <p:txBody>
-          <a:bodyPr vert="horz" lIns="91440" tIns="45720" rIns="91440" bIns="45720" rtlCol="0" anchor="ctr">
-            <a:normAutofit/>
-          </a:bodyPr>
-          <a:lstStyle/>
-          <a:p>
-            <a:r>
-              <a:rPr lang="en-US"/>
-              <a:t>Click to edit Master title style</a:t>
-            </a:r>
-          </a:p>
-        </p:txBody>
-      </p:sp>
-      <p:sp>
-        <p:nvSpPr>
-          <p:cNvPr id="3" name="Text Placeholder 2">
+          <p:cNvPicPr>
+            <a:picLocks noChangeAspect="1"/>
+          </p:cNvPicPr>
+          <p:nvPr userDrawn="1"/>
+        </p:nvPicPr>
+        <p:blipFill>
+          <a:blip r:embed="rId17"/>
+          <a:stretch>
+            <a:fillRect/>
+          </a:stretch>
+        </p:blipFill>
+        <p:spPr>
+          <a:xfrm>
+            <a:off x="160755" y="15953"/>
+            <a:ext cx="1011395" cy="789099"/>
+          </a:xfrm>
+          <a:prstGeom prst="rect">
+            <a:avLst/>
+          </a:prstGeom>
+        </p:spPr>
+      </p:pic>
+      <p:pic>
+        <p:nvPicPr>
+          <p:cNvPr id="3" name="Picture 2" descr="File:Logo of the United States Army.svg">
             <a:extLst>
               <a:ext uri="{FF2B5EF4-FFF2-40B4-BE49-F238E27FC236}">
-                <a16:creationId xmlns:a16="http://schemas.microsoft.com/office/drawing/2014/main" id="{4D4C421B-53B6-2D0A-1A85-7AC115B238CD}"/>
+                <a16:creationId xmlns:a16="http://schemas.microsoft.com/office/drawing/2014/main" id="{6C60B765-44ED-97A4-2A0C-CB928FA6A4A9}"/>
               </a:ext>
             </a:extLst>
           </p:cNvPr>
-          <p:cNvSpPr>
-            <a:spLocks noGrp="1"/>
-          </p:cNvSpPr>
-          <p:nvPr>
-            <p:ph type="body" idx="1"/>
-          </p:nvPr>
-        </p:nvSpPr>
-        <p:spPr>
-          <a:xfrm>
-            <a:off x="838200" y="1825625"/>
-            <a:ext cx="10515600" cy="4351338"/>
-          </a:xfrm>
-          <a:prstGeom prst="rect">
-            <a:avLst/>
-          </a:prstGeom>
-        </p:spPr>
-        <p:txBody>
-          <a:bodyPr vert="horz" lIns="91440" tIns="45720" rIns="91440" bIns="45720" rtlCol="0">
-            <a:normAutofit/>
-          </a:bodyPr>
-          <a:lstStyle/>
-          <a:p>
-            <a:pPr lvl="0"/>
-            <a:r>
-              <a:rPr lang="en-US"/>
-              <a:t>Click to edit Master text styles</a:t>
-            </a:r>
-          </a:p>
-          <a:p>
-            <a:pPr lvl="1"/>
-            <a:r>
-              <a:rPr lang="en-US"/>
-              <a:t>Second level</a:t>
-            </a:r>
-          </a:p>
-          <a:p>
-            <a:pPr lvl="2"/>
-            <a:r>
-              <a:rPr lang="en-US"/>
-              <a:t>Third level</a:t>
-            </a:r>
-          </a:p>
-          <a:p>
-            <a:pPr lvl="3"/>
-            <a:r>
-              <a:rPr lang="en-US"/>
-              <a:t>Fourth level</a:t>
-            </a:r>
-          </a:p>
-          <a:p>
-            <a:pPr lvl="4"/>
-            <a:r>
-              <a:rPr lang="en-US"/>
-              <a:t>Fifth level</a:t>
-            </a:r>
-          </a:p>
-        </p:txBody>
-      </p:sp>
-      <p:sp>
-        <p:nvSpPr>
-          <p:cNvPr id="4" name="Date Placeholder 3">
-            <a:extLst>
-              <a:ext uri="{FF2B5EF4-FFF2-40B4-BE49-F238E27FC236}">
-                <a16:creationId xmlns:a16="http://schemas.microsoft.com/office/drawing/2014/main" id="{1EA73C65-AE79-7F03-A438-1CFC793A9A20}"/>
-              </a:ext>
-            </a:extLst>
-          </p:cNvPr>
-          <p:cNvSpPr>
-            <a:spLocks noGrp="1"/>
-          </p:cNvSpPr>
-          <p:nvPr>
-            <p:ph type="dt" sz="half" idx="2"/>
-          </p:nvPr>
-        </p:nvSpPr>
-        <p:spPr>
-          <a:xfrm>
-            <a:off x="838200" y="6356350"/>
-            <a:ext cx="2743200" cy="365125"/>
-          </a:xfrm>
-          <a:prstGeom prst="rect">
-            <a:avLst/>
-          </a:prstGeom>
-        </p:spPr>
-        <p:txBody>
-          <a:bodyPr vert="horz" lIns="91440" tIns="45720" rIns="91440" bIns="45720" rtlCol="0" anchor="ctr"/>
-          <a:lstStyle>
-            <a:lvl1pPr algn="l">
-              <a:defRPr sz="1200">
-                <a:solidFill>
-                  <a:schemeClr val="tx1">
-                    <a:tint val="82000"/>
-                  </a:schemeClr>
-                </a:solidFill>
-              </a:defRPr>
-            </a:lvl1pPr>
-          </a:lstStyle>
-          <a:p>
-            <a:fld id="{1D926A6E-1A60-2B4A-8860-6ABCC5DA00C8}" type="datetimeFigureOut">
-              <a:rPr lang="en-US" smtClean="0"/>
-              <a:t>7/21/26</a:t>
-            </a:fld>
-            <a:endParaRPr lang="en-US"/>
-          </a:p>
-        </p:txBody>
-      </p:sp>
-      <p:sp>
-        <p:nvSpPr>
-          <p:cNvPr id="5" name="Footer Placeholder 4">
-            <a:extLst>
-              <a:ext uri="{FF2B5EF4-FFF2-40B4-BE49-F238E27FC236}">
-                <a16:creationId xmlns:a16="http://schemas.microsoft.com/office/drawing/2014/main" id="{579C5E42-300E-847C-2377-BFCC546BBFC5}"/>
-              </a:ext>
-            </a:extLst>
-          </p:cNvPr>
-          <p:cNvSpPr>
-            <a:spLocks noGrp="1"/>
-          </p:cNvSpPr>
-          <p:nvPr>
-            <p:ph type="ftr" sz="quarter" idx="3"/>
-          </p:nvPr>
-        </p:nvSpPr>
-        <p:spPr>
-          <a:xfrm>
-            <a:off x="4038600" y="6356350"/>
-            <a:ext cx="4114800" cy="365125"/>
-          </a:xfrm>
-          <a:prstGeom prst="rect">
-            <a:avLst/>
-          </a:prstGeom>
-        </p:spPr>
-        <p:txBody>
-          <a:bodyPr vert="horz" lIns="91440" tIns="45720" rIns="91440" bIns="45720" rtlCol="0" anchor="ctr"/>
-          <a:lstStyle>
-            <a:lvl1pPr algn="ctr">
-              <a:defRPr sz="1200">
-                <a:solidFill>
-                  <a:schemeClr val="tx1">
-                    <a:tint val="82000"/>
-                  </a:schemeClr>
-                </a:solidFill>
-              </a:defRPr>
-            </a:lvl1pPr>
-          </a:lstStyle>
-          <a:p>
-            <a:endParaRPr lang="en-US"/>
-          </a:p>
-        </p:txBody>
-      </p:sp>
-      <p:sp>
-        <p:nvSpPr>
-          <p:cNvPr id="6" name="Slide Number Placeholder 5">
-            <a:extLst>
-              <a:ext uri="{FF2B5EF4-FFF2-40B4-BE49-F238E27FC236}">
-                <a16:creationId xmlns:a16="http://schemas.microsoft.com/office/drawing/2014/main" id="{7AC73B44-21B5-FA7A-5AA2-1BBE12D353A6}"/>
-              </a:ext>
-            </a:extLst>
-          </p:cNvPr>
-          <p:cNvSpPr>
-            <a:spLocks noGrp="1"/>
-          </p:cNvSpPr>
-          <p:nvPr>
-            <p:ph type="sldNum" sz="quarter" idx="4"/>
-          </p:nvPr>
-        </p:nvSpPr>
-        <p:spPr>
-          <a:xfrm>
-            <a:off x="8610600" y="6356350"/>
-            <a:ext cx="2743200" cy="365125"/>
-          </a:xfrm>
-          <a:prstGeom prst="rect">
-            <a:avLst/>
-          </a:prstGeom>
-        </p:spPr>
-        <p:txBody>
-          <a:bodyPr vert="horz" lIns="91440" tIns="45720" rIns="91440" bIns="45720" rtlCol="0" anchor="ctr"/>
-          <a:lstStyle>
-            <a:lvl1pPr algn="r">
-              <a:defRPr sz="1200">
-                <a:solidFill>
-                  <a:schemeClr val="tx1">
-                    <a:tint val="82000"/>
-                  </a:schemeClr>
-                </a:solidFill>
-              </a:defRPr>
-            </a:lvl1pPr>
-          </a:lstStyle>
-          <a:p>
-            <a:fld id="{3CAD1949-089B-5040-A81F-BF6C5D83A7A1}" type="slidenum">
-              <a:rPr lang="en-US" smtClean="0"/>
-              <a:t>‹#›</a:t>
-            </a:fld>
-            <a:endParaRPr lang="en-US"/>
-          </a:p>
-        </p:txBody>
-      </p:sp>
+          <p:cNvPicPr>
+            <a:picLocks noChangeAspect="1"/>
+          </p:cNvPicPr>
+          <p:nvPr userDrawn="1"/>
+        </p:nvPicPr>
+        <p:blipFill>
+          <a:blip r:embed="rId18"/>
+          <a:stretch>
+            <a:fillRect/>
+          </a:stretch>
+        </p:blipFill>
+        <p:spPr>
+          <a:xfrm>
+            <a:off x="11481455" y="20701"/>
+            <a:ext cx="620537" cy="830278"/>
+          </a:xfrm>
+          <a:prstGeom prst="rect">
+            <a:avLst/>
+          </a:prstGeom>
+        </p:spPr>
+      </p:pic>
     </p:spTree>
     <p:extLst>
       <p:ext uri="{BB962C8B-B14F-4D97-AF65-F5344CB8AC3E}">
-        <p14:creationId xmlns:p14="http://schemas.microsoft.com/office/powerpoint/2010/main" val="641613186"/>
+        <p14:creationId xmlns:p14="http://schemas.microsoft.com/office/powerpoint/2010/main" val="4263598801"/>
       </p:ext>
     </p:extLst>
   </p:cSld>
   <p:clrMap bg1="lt1" tx1="dk1" bg2="lt2" tx2="dk2" accent1="accent1" accent2="accent2" accent3="accent3" accent4="accent4" accent5="accent5" accent6="accent6" hlink="hlink" folHlink="folHlink"/>
   <p:sldLayoutIdLst>
-    <p:sldLayoutId id="2147483649" r:id="rId1"/>
-    <p:sldLayoutId id="2147483650" r:id="rId2"/>
-    <p:sldLayoutId id="2147483651" r:id="rId3"/>
-    <p:sldLayoutId id="2147483652" r:id="rId4"/>
-    <p:sldLayoutId id="2147483653" r:id="rId5"/>
-    <p:sldLayoutId id="2147483654" r:id="rId6"/>
-    <p:sldLayoutId id="2147483655" r:id="rId7"/>
-    <p:sldLayoutId id="2147483656" r:id="rId8"/>
-    <p:sldLayoutId id="2147483657" r:id="rId9"/>
-    <p:sldLayoutId id="2147483658" r:id="rId10"/>
-    <p:sldLayoutId id="2147483659" r:id="rId11"/>
+    <p:sldLayoutId id="2147483661" r:id="rId1"/>
+    <p:sldLayoutId id="2147483662" r:id="rId2"/>
+    <p:sldLayoutId id="2147483663" r:id="rId3"/>
+    <p:sldLayoutId id="2147483664" r:id="rId4"/>
+    <p:sldLayoutId id="2147483665" r:id="rId5"/>
+    <p:sldLayoutId id="2147483666" r:id="rId6"/>
+    <p:sldLayoutId id="2147483667" r:id="rId7"/>
+    <p:sldLayoutId id="2147483668" r:id="rId8"/>
+    <p:sldLayoutId id="2147483669" r:id="rId9"/>
+    <p:sldLayoutId id="2147483670" r:id="rId10"/>
+    <p:sldLayoutId id="2147483671" r:id="rId11"/>
+    <p:sldLayoutId id="2147483672" r:id="rId12"/>
+    <p:sldLayoutId id="2147483673" r:id="rId13"/>
+    <p:sldLayoutId id="2147483674" r:id="rId14"/>
   </p:sldLayoutIdLst>
   <p:txStyles>
     <p:titleStyle>
-      <a:lvl1pPr algn="l" defTabSz="914400" rtl="0" eaLnBrk="1" latinLnBrk="0" hangingPunct="1">
+      <a:lvl1pPr algn="l" rtl="0" eaLnBrk="0" fontAlgn="base" hangingPunct="0">
         <a:lnSpc>
           <a:spcPct val="90000"/>
         </a:lnSpc>
         <a:spcBef>
           <a:spcPct val="0"/>
         </a:spcBef>
-        <a:buNone/>
+        <a:spcAft>
+          <a:spcPct val="0"/>
+        </a:spcAft>
         <a:defRPr sz="4400" kern="1200">
           <a:solidFill>
             <a:schemeClr val="tx1"/>
@@ -3042,15 +5090,154 @@
           <a:cs typeface="+mj-cs"/>
         </a:defRPr>
       </a:lvl1pPr>
+      <a:lvl2pPr algn="l" rtl="0" eaLnBrk="0" fontAlgn="base" hangingPunct="0">
+        <a:lnSpc>
+          <a:spcPct val="90000"/>
+        </a:lnSpc>
+        <a:spcBef>
+          <a:spcPct val="0"/>
+        </a:spcBef>
+        <a:spcAft>
+          <a:spcPct val="0"/>
+        </a:spcAft>
+        <a:defRPr sz="4400">
+          <a:solidFill>
+            <a:schemeClr val="tx1"/>
+          </a:solidFill>
+          <a:latin typeface="Calibri Light" panose="020F0302020204030204" pitchFamily="34" charset="0"/>
+        </a:defRPr>
+      </a:lvl2pPr>
+      <a:lvl3pPr algn="l" rtl="0" eaLnBrk="0" fontAlgn="base" hangingPunct="0">
+        <a:lnSpc>
+          <a:spcPct val="90000"/>
+        </a:lnSpc>
+        <a:spcBef>
+          <a:spcPct val="0"/>
+        </a:spcBef>
+        <a:spcAft>
+          <a:spcPct val="0"/>
+        </a:spcAft>
+        <a:defRPr sz="4400">
+          <a:solidFill>
+            <a:schemeClr val="tx1"/>
+          </a:solidFill>
+          <a:latin typeface="Calibri Light" panose="020F0302020204030204" pitchFamily="34" charset="0"/>
+        </a:defRPr>
+      </a:lvl3pPr>
+      <a:lvl4pPr algn="l" rtl="0" eaLnBrk="0" fontAlgn="base" hangingPunct="0">
+        <a:lnSpc>
+          <a:spcPct val="90000"/>
+        </a:lnSpc>
+        <a:spcBef>
+          <a:spcPct val="0"/>
+        </a:spcBef>
+        <a:spcAft>
+          <a:spcPct val="0"/>
+        </a:spcAft>
+        <a:defRPr sz="4400">
+          <a:solidFill>
+            <a:schemeClr val="tx1"/>
+          </a:solidFill>
+          <a:latin typeface="Calibri Light" panose="020F0302020204030204" pitchFamily="34" charset="0"/>
+        </a:defRPr>
+      </a:lvl4pPr>
+      <a:lvl5pPr algn="l" rtl="0" eaLnBrk="0" fontAlgn="base" hangingPunct="0">
+        <a:lnSpc>
+          <a:spcPct val="90000"/>
+        </a:lnSpc>
+        <a:spcBef>
+          <a:spcPct val="0"/>
+        </a:spcBef>
+        <a:spcAft>
+          <a:spcPct val="0"/>
+        </a:spcAft>
+        <a:defRPr sz="4400">
+          <a:solidFill>
+            <a:schemeClr val="tx1"/>
+          </a:solidFill>
+          <a:latin typeface="Calibri Light" panose="020F0302020204030204" pitchFamily="34" charset="0"/>
+        </a:defRPr>
+      </a:lvl5pPr>
+      <a:lvl6pPr marL="457200" algn="l" rtl="0" fontAlgn="base">
+        <a:lnSpc>
+          <a:spcPct val="90000"/>
+        </a:lnSpc>
+        <a:spcBef>
+          <a:spcPct val="0"/>
+        </a:spcBef>
+        <a:spcAft>
+          <a:spcPct val="0"/>
+        </a:spcAft>
+        <a:defRPr sz="4400">
+          <a:solidFill>
+            <a:schemeClr val="tx1"/>
+          </a:solidFill>
+          <a:latin typeface="Calibri Light" panose="020F0302020204030204" pitchFamily="34" charset="0"/>
+        </a:defRPr>
+      </a:lvl6pPr>
+      <a:lvl7pPr marL="914400" algn="l" rtl="0" fontAlgn="base">
+        <a:lnSpc>
+          <a:spcPct val="90000"/>
+        </a:lnSpc>
+        <a:spcBef>
+          <a:spcPct val="0"/>
+        </a:spcBef>
+        <a:spcAft>
+          <a:spcPct val="0"/>
+        </a:spcAft>
+        <a:defRPr sz="4400">
+          <a:solidFill>
+            <a:schemeClr val="tx1"/>
+          </a:solidFill>
+          <a:latin typeface="Calibri Light" panose="020F0302020204030204" pitchFamily="34" charset="0"/>
+        </a:defRPr>
+      </a:lvl7pPr>
+      <a:lvl8pPr marL="1371600" algn="l" rtl="0" fontAlgn="base">
+        <a:lnSpc>
+          <a:spcPct val="90000"/>
+        </a:lnSpc>
+        <a:spcBef>
+          <a:spcPct val="0"/>
+        </a:spcBef>
+        <a:spcAft>
+          <a:spcPct val="0"/>
+        </a:spcAft>
+        <a:defRPr sz="4400">
+          <a:solidFill>
+            <a:schemeClr val="tx1"/>
+          </a:solidFill>
+          <a:latin typeface="Calibri Light" panose="020F0302020204030204" pitchFamily="34" charset="0"/>
+        </a:defRPr>
+      </a:lvl8pPr>
+      <a:lvl9pPr marL="1828800" algn="l" rtl="0" fontAlgn="base">
+        <a:lnSpc>
+          <a:spcPct val="90000"/>
+        </a:lnSpc>
+        <a:spcBef>
+          <a:spcPct val="0"/>
+        </a:spcBef>
+        <a:spcAft>
+          <a:spcPct val="0"/>
+        </a:spcAft>
+        <a:defRPr sz="4400">
+          <a:solidFill>
+            <a:schemeClr val="tx1"/>
+          </a:solidFill>
+          <a:latin typeface="Calibri Light" panose="020F0302020204030204" pitchFamily="34" charset="0"/>
+        </a:defRPr>
+      </a:lvl9pPr>
     </p:titleStyle>
     <p:bodyStyle>
-      <a:lvl1pPr marL="228600" indent="-228600" algn="l" defTabSz="914400" rtl="0" eaLnBrk="1" latinLnBrk="0" hangingPunct="1">
+      <a:lvl1pPr marL="228600" indent="-228600" algn="l" rtl="0" eaLnBrk="0" fontAlgn="base" hangingPunct="0">
         <a:lnSpc>
           <a:spcPct val="90000"/>
         </a:lnSpc>
         <a:spcBef>
           <a:spcPts val="1000"/>
         </a:spcBef>
+        <a:spcAft>
+          <a:spcPct val="0"/>
+        </a:spcAft>
         <a:buFont typeface="Arial" panose="020B0604020202020204" pitchFamily="34" charset="0"/>
         <a:buChar char="•"/>
         <a:defRPr sz="2800" kern="1200">
@@ -3062,13 +5249,16 @@
           <a:cs typeface="+mn-cs"/>
         </a:defRPr>
       </a:lvl1pPr>
-      <a:lvl2pPr marL="685800" indent="-228600" algn="l" defTabSz="914400" rtl="0" eaLnBrk="1" latinLnBrk="0" hangingPunct="1">
+      <a:lvl2pPr marL="685800" indent="-228600" algn="l" rtl="0" eaLnBrk="0" fontAlgn="base" hangingPunct="0">
         <a:lnSpc>
           <a:spcPct val="90000"/>
         </a:lnSpc>
         <a:spcBef>
           <a:spcPts val="500"/>
         </a:spcBef>
+        <a:spcAft>
+          <a:spcPct val="0"/>
+        </a:spcAft>
         <a:buFont typeface="Arial" panose="020B0604020202020204" pitchFamily="34" charset="0"/>
         <a:buChar char="•"/>
         <a:defRPr sz="2400" kern="1200">
@@ -3080,13 +5270,16 @@
           <a:cs typeface="+mn-cs"/>
         </a:defRPr>
       </a:lvl2pPr>
-      <a:lvl3pPr marL="1143000" indent="-228600" algn="l" defTabSz="914400" rtl="0" eaLnBrk="1" latinLnBrk="0" hangingPunct="1">
+      <a:lvl3pPr marL="1143000" indent="-228600" algn="l" rtl="0" eaLnBrk="0" fontAlgn="base" hangingPunct="0">
         <a:lnSpc>
           <a:spcPct val="90000"/>
         </a:lnSpc>
         <a:spcBef>
           <a:spcPts val="500"/>
         </a:spcBef>
+        <a:spcAft>
+          <a:spcPct val="0"/>
+        </a:spcAft>
         <a:buFont typeface="Arial" panose="020B0604020202020204" pitchFamily="34" charset="0"/>
         <a:buChar char="•"/>
         <a:defRPr sz="2000" kern="1200">
@@ -3098,16 +5291,19 @@
           <a:cs typeface="+mn-cs"/>
         </a:defRPr>
       </a:lvl3pPr>
-      <a:lvl4pPr marL="1600200" indent="-228600" algn="l" defTabSz="914400" rtl="0" eaLnBrk="1" latinLnBrk="0" hangingPunct="1">
+      <a:lvl4pPr marL="1600200" indent="-228600" algn="l" rtl="0" eaLnBrk="0" fontAlgn="base" hangingPunct="0">
         <a:lnSpc>
           <a:spcPct val="90000"/>
         </a:lnSpc>
         <a:spcBef>
           <a:spcPts val="500"/>
         </a:spcBef>
+        <a:spcAft>
+          <a:spcPct val="0"/>
+        </a:spcAft>
         <a:buFont typeface="Arial" panose="020B0604020202020204" pitchFamily="34" charset="0"/>
         <a:buChar char="•"/>
-        <a:defRPr sz="1800" kern="1200">
+        <a:defRPr kern="1200">
           <a:solidFill>
             <a:schemeClr val="tx1"/>
           </a:solidFill>
@@ -3116,16 +5312,19 @@
           <a:cs typeface="+mn-cs"/>
         </a:defRPr>
       </a:lvl4pPr>
-      <a:lvl5pPr marL="2057400" indent="-228600" algn="l" defTabSz="914400" rtl="0" eaLnBrk="1" latinLnBrk="0" hangingPunct="1">
+      <a:lvl5pPr marL="2057400" indent="-228600" algn="l" rtl="0" eaLnBrk="0" fontAlgn="base" hangingPunct="0">
         <a:lnSpc>
           <a:spcPct val="90000"/>
         </a:lnSpc>
         <a:spcBef>
           <a:spcPts val="500"/>
         </a:spcBef>
+        <a:spcAft>
+          <a:spcPct val="0"/>
+        </a:spcAft>
         <a:buFont typeface="Arial" panose="020B0604020202020204" pitchFamily="34" charset="0"/>
         <a:buChar char="•"/>
-        <a:defRPr sz="1800" kern="1200">
+        <a:defRPr kern="1200">
           <a:solidFill>
             <a:schemeClr val="tx1"/>
           </a:solidFill>
@@ -3354,7 +5553,15 @@
             <a:pPr algn="ctr"/>
             <a:r>
               <a:rPr lang="en-US" sz="2000" b="1" dirty="0"/>
-              <a:t>Welcome, Wingman</a:t>
+              <a:t>Team Name:  </a:t>
+            </a:r>
+            <a:r>
+              <a:rPr lang="en-US" sz="2000" b="1" dirty="0">
+                <a:latin typeface="Copperplate Gothic Bold" panose="020E0705020206020404" pitchFamily="34" charset="77"/>
+                <a:ea typeface="Apple Color Emoji" pitchFamily="2" charset="0"/>
+                <a:cs typeface="Baloo Bhaijaan" panose="03080902040302020200" pitchFamily="66" charset="-78"/>
+              </a:rPr>
+              <a:t>Code Force</a:t>
             </a:r>
           </a:p>
         </p:txBody>
@@ -3373,7 +5580,7 @@
         </p:nvSpPr>
         <p:spPr>
           <a:xfrm>
-            <a:off x="2721272" y="3105834"/>
+            <a:off x="7220729" y="2987423"/>
             <a:ext cx="3374728" cy="1477328"/>
           </a:xfrm>
           <a:prstGeom prst="rect">
@@ -3388,6 +5595,12 @@
           <a:lstStyle/>
           <a:p>
             <a:r>
+              <a:rPr lang="en-US" b="1" u="sng" dirty="0"/>
+              <a:t>Back End</a:t>
+            </a:r>
+          </a:p>
+          <a:p>
+            <a:r>
               <a:rPr lang="en-US" dirty="0"/>
               <a:t>A1C Aldebaran Fox</a:t>
             </a:r>
@@ -3409,9 +5622,6 @@
               <a:rPr lang="en-US" dirty="0"/>
               <a:t>SFC Russell Neal</a:t>
             </a:r>
-          </a:p>
-          <a:p>
-            <a:endParaRPr lang="en-US" dirty="0"/>
           </a:p>
         </p:txBody>
       </p:sp>
@@ -3429,7 +5639,7 @@
         </p:nvSpPr>
         <p:spPr>
           <a:xfrm>
-            <a:off x="6096000" y="3091944"/>
+            <a:off x="1596544" y="2978850"/>
             <a:ext cx="3374728" cy="1477328"/>
           </a:xfrm>
           <a:prstGeom prst="rect">
@@ -3445,83 +5655,36 @@
           <a:p>
             <a:pPr algn="r"/>
             <a:r>
+              <a:rPr lang="en-US" b="1" u="sng" dirty="0"/>
+              <a:t>Front End</a:t>
+            </a:r>
+          </a:p>
+          <a:p>
+            <a:pPr algn="r"/>
+            <a:r>
               <a:rPr lang="en-US" dirty="0"/>
-              <a:t>TJ Fegurgur</a:t>
+              <a:t>MSgt TJ Fegurgur</a:t>
             </a:r>
           </a:p>
           <a:p>
             <a:pPr algn="r"/>
             <a:r>
               <a:rPr lang="en-US" dirty="0"/>
-              <a:t>Darrien Oster</a:t>
+              <a:t>A1C Darrien Oster</a:t>
             </a:r>
           </a:p>
           <a:p>
             <a:pPr algn="r"/>
             <a:r>
               <a:rPr lang="en-US" dirty="0"/>
-              <a:t>Immanuel Gainer</a:t>
+              <a:t>A1C Immanuel Gainer</a:t>
             </a:r>
           </a:p>
           <a:p>
             <a:pPr algn="r"/>
             <a:r>
               <a:rPr lang="en-US" dirty="0"/>
-              <a:t>Connor Arretche</a:t>
-            </a:r>
-          </a:p>
-          <a:p>
-            <a:pPr algn="r"/>
-            <a:endParaRPr lang="en-US" dirty="0"/>
-          </a:p>
-        </p:txBody>
-      </p:sp>
-      <p:sp>
-        <p:nvSpPr>
-          <p:cNvPr id="7" name="TextBox 6">
-            <a:extLst>
-              <a:ext uri="{FF2B5EF4-FFF2-40B4-BE49-F238E27FC236}">
-                <a16:creationId xmlns:a16="http://schemas.microsoft.com/office/drawing/2014/main" id="{0C1F0B94-0F8D-743A-CBA4-7B869563A0BD}"/>
-              </a:ext>
-            </a:extLst>
-          </p:cNvPr>
-          <p:cNvSpPr txBox="1"/>
-          <p:nvPr/>
-        </p:nvSpPr>
-        <p:spPr>
-          <a:xfrm>
-            <a:off x="3283907" y="5636006"/>
-            <a:ext cx="5624186" cy="1015663"/>
-          </a:xfrm>
-          <a:prstGeom prst="rect">
-            <a:avLst/>
-          </a:prstGeom>
-          <a:noFill/>
-        </p:spPr>
-        <p:txBody>
-          <a:bodyPr wrap="square" rtlCol="0">
-            <a:spAutoFit/>
-          </a:bodyPr>
-          <a:lstStyle/>
-          <a:p>
-            <a:pPr algn="ctr"/>
-            <a:r>
-              <a:rPr lang="en-US" sz="2000" b="1" dirty="0"/>
-              <a:t>#</a:t>
-            </a:r>
-            <a:r>
-              <a:rPr lang="en-US" sz="2000" b="1" dirty="0" err="1"/>
-              <a:t>todo</a:t>
-            </a:r>
-            <a:br>
-              <a:rPr lang="en-US" sz="2000" b="1" dirty="0"/>
-            </a:br>
-            <a:br>
-              <a:rPr lang="en-US" sz="2000" b="1" dirty="0"/>
-            </a:br>
-            <a:r>
-              <a:rPr lang="en-US" sz="2000" b="1" dirty="0"/>
-              <a:t>add ranks and styling</a:t>
+              <a:t>A1C Connor Arretche</a:t>
             </a:r>
           </a:p>
         </p:txBody>
@@ -3607,7 +5770,7 @@
         <p:spPr>
           <a:xfrm>
             <a:off x="2639860" y="2567836"/>
-            <a:ext cx="6912279" cy="2031325"/>
+            <a:ext cx="6912279" cy="1754326"/>
           </a:xfrm>
           <a:prstGeom prst="rect">
             <a:avLst/>
@@ -3620,6 +5783,7 @@
           </a:bodyPr>
           <a:lstStyle/>
           <a:p>
+            <a:pPr algn="just"/>
             <a:r>
               <a:rPr lang="en-US" dirty="0"/>
               <a:t>In-processing members into the unit relies on fragmented record-keeping across spreadsheets, paper documents, and different systems to track Airmen's progress and compliance. This lack of a centralized, authoritative source of information delays the identification of overdue actions and limits visibility into individual and unit readiness, increasing the risk of non-compliance and reduced operational effectiveness.</a:t>
@@ -3721,6 +5885,7 @@
           </a:bodyPr>
           <a:lstStyle/>
           <a:p>
+            <a:pPr algn="just"/>
             <a:r>
               <a:rPr lang="en-US" dirty="0"/>
               <a:t>Our Capstone application consolidates in-processing tracking into a single centralized platform that automatically flags overdue requirements and provides real-time visibility into individual and unit-level compliance status. By replacing manual, fragmented tracking methods with an authoritative digital system, the application reduces administrative burden, accelerates identification of gaps, and strengthens overall force readiness.</a:t>
@@ -3742,7 +5907,7 @@
 </file>
 
 <file path=ppt/theme/theme1.xml><?xml version="1.0" encoding="utf-8"?>
-<a:theme xmlns:a="http://schemas.openxmlformats.org/drawingml/2006/main" name="Office Theme">
+<a:theme xmlns:a="http://schemas.openxmlformats.org/drawingml/2006/main" name="Custom Design">
   <a:themeElements>
     <a:clrScheme name="Office">
       <a:dk1>
@@ -3752,39 +5917,39 @@
         <a:sysClr val="window" lastClr="FFFFFF"/>
       </a:lt1>
       <a:dk2>
-        <a:srgbClr val="0E2841"/>
+        <a:srgbClr val="44546A"/>
       </a:dk2>
       <a:lt2>
-        <a:srgbClr val="E8E8E8"/>
+        <a:srgbClr val="E7E6E6"/>
       </a:lt2>
       <a:accent1>
-        <a:srgbClr val="156082"/>
+        <a:srgbClr val="5B9BD5"/>
       </a:accent1>
       <a:accent2>
-        <a:srgbClr val="E97132"/>
+        <a:srgbClr val="ED7D31"/>
       </a:accent2>
       <a:accent3>
-        <a:srgbClr val="196B24"/>
+        <a:srgbClr val="A5A5A5"/>
       </a:accent3>
       <a:accent4>
-        <a:srgbClr val="0F9ED5"/>
+        <a:srgbClr val="FFC000"/>
       </a:accent4>
       <a:accent5>
-        <a:srgbClr val="A02B93"/>
+        <a:srgbClr val="4472C4"/>
       </a:accent5>
       <a:accent6>
-        <a:srgbClr val="4EA72E"/>
+        <a:srgbClr val="70AD47"/>
       </a:accent6>
       <a:hlink>
-        <a:srgbClr val="467886"/>
+        <a:srgbClr val="0563C1"/>
       </a:hlink>
       <a:folHlink>
-        <a:srgbClr val="96607D"/>
+        <a:srgbClr val="954F72"/>
       </a:folHlink>
     </a:clrScheme>
     <a:fontScheme name="Office">
       <a:majorFont>
-        <a:latin typeface="Aptos Display" panose="02110004020202020204"/>
+        <a:latin typeface="Calibri Light" panose="020F0302020204030204"/>
         <a:ea typeface=""/>
         <a:cs typeface=""/>
         <a:font script="Jpan" typeface="游ゴシック Light"/>
@@ -3817,26 +5982,9 @@
         <a:font script="Viet" typeface="Times New Roman"/>
         <a:font script="Uigh" typeface="Microsoft Uighur"/>
         <a:font script="Geor" typeface="Sylfaen"/>
-        <a:font script="Armn" typeface="Arial"/>
-        <a:font script="Bugi" typeface="Leelawadee UI"/>
-        <a:font script="Bopo" typeface="Microsoft JhengHei"/>
-        <a:font script="Java" typeface="Javanese Text"/>
-        <a:font script="Lisu" typeface="Segoe UI"/>
-        <a:font script="Mymr" typeface="Myanmar Text"/>
-        <a:font script="Nkoo" typeface="Ebrima"/>
-        <a:font script="Olck" typeface="Nirmala UI"/>
-        <a:font script="Osma" typeface="Ebrima"/>
-        <a:font script="Phag" typeface="Phagspa"/>
-        <a:font script="Syrn" typeface="Estrangelo Edessa"/>
-        <a:font script="Syrj" typeface="Estrangelo Edessa"/>
-        <a:font script="Syre" typeface="Estrangelo Edessa"/>
-        <a:font script="Sora" typeface="Nirmala UI"/>
-        <a:font script="Tale" typeface="Microsoft Tai Le"/>
-        <a:font script="Talu" typeface="Microsoft New Tai Lue"/>
-        <a:font script="Tfng" typeface="Ebrima"/>
       </a:majorFont>
       <a:minorFont>
-        <a:latin typeface="Aptos" panose="02110004020202020204"/>
+        <a:latin typeface="Calibri" panose="020F0502020204030204"/>
         <a:ea typeface=""/>
         <a:cs typeface=""/>
         <a:font script="Jpan" typeface="游ゴシック"/>
@@ -3869,23 +6017,6 @@
         <a:font script="Viet" typeface="Arial"/>
         <a:font script="Uigh" typeface="Microsoft Uighur"/>
         <a:font script="Geor" typeface="Sylfaen"/>
-        <a:font script="Armn" typeface="Arial"/>
-        <a:font script="Bugi" typeface="Leelawadee UI"/>
-        <a:font script="Bopo" typeface="Microsoft JhengHei"/>
-        <a:font script="Java" typeface="Javanese Text"/>
-        <a:font script="Lisu" typeface="Segoe UI"/>
-        <a:font script="Mymr" typeface="Myanmar Text"/>
-        <a:font script="Nkoo" typeface="Ebrima"/>
-        <a:font script="Olck" typeface="Nirmala UI"/>
-        <a:font script="Osma" typeface="Ebrima"/>
-        <a:font script="Phag" typeface="Phagspa"/>
-        <a:font script="Syrn" typeface="Estrangelo Edessa"/>
-        <a:font script="Syrj" typeface="Estrangelo Edessa"/>
-        <a:font script="Syre" typeface="Estrangelo Edessa"/>
-        <a:font script="Sora" typeface="Nirmala UI"/>
-        <a:font script="Tale" typeface="Microsoft Tai Le"/>
-        <a:font script="Talu" typeface="Microsoft New Tai Lue"/>
-        <a:font script="Tfng" typeface="Ebrima"/>
       </a:minorFont>
     </a:fontScheme>
     <a:fmtScheme name="Office">
@@ -3947,6 +6078,13 @@
         </a:gradFill>
       </a:fillStyleLst>
       <a:lnStyleLst>
+        <a:ln w="6350" cap="flat" cmpd="sng" algn="ctr">
+          <a:solidFill>
+            <a:schemeClr val="phClr"/>
+          </a:solidFill>
+          <a:prstDash val="solid"/>
+          <a:miter lim="800000"/>
+        </a:ln>
         <a:ln w="12700" cap="flat" cmpd="sng" algn="ctr">
           <a:solidFill>
             <a:schemeClr val="phClr"/>
@@ -3955,13 +6093,6 @@
           <a:miter lim="800000"/>
         </a:ln>
         <a:ln w="19050" cap="flat" cmpd="sng" algn="ctr">
-          <a:solidFill>
-            <a:schemeClr val="phClr"/>
-          </a:solidFill>
-          <a:prstDash val="solid"/>
-          <a:miter lim="800000"/>
-        </a:ln>
-        <a:ln w="25400" cap="flat" cmpd="sng" algn="ctr">
           <a:solidFill>
             <a:schemeClr val="phClr"/>
           </a:solidFill>
@@ -4026,31 +6157,11 @@
       </a:bgFillStyleLst>
     </a:fmtScheme>
   </a:themeElements>
-  <a:objectDefaults>
-    <a:lnDef>
-      <a:spPr/>
-      <a:bodyPr/>
-      <a:lstStyle/>
-      <a:style>
-        <a:lnRef idx="2">
-          <a:schemeClr val="accent1"/>
-        </a:lnRef>
-        <a:fillRef idx="0">
-          <a:schemeClr val="accent1"/>
-        </a:fillRef>
-        <a:effectRef idx="1">
-          <a:schemeClr val="accent1"/>
-        </a:effectRef>
-        <a:fontRef idx="minor">
-          <a:schemeClr val="tx1"/>
-        </a:fontRef>
-      </a:style>
-    </a:lnDef>
-  </a:objectDefaults>
+  <a:objectDefaults/>
   <a:extraClrSchemeLst/>
   <a:extLst>
     <a:ext uri="{05A4C25C-085E-4340-85A3-A5531E510DB2}">
-      <thm15:themeFamily xmlns:thm15="http://schemas.microsoft.com/office/thememl/2012/main" name="Office Theme" id="{2E142A2C-CD16-42D6-873A-C26D2A0506FA}" vid="{1BDDFF52-6CD6-40A5-AB3C-68EB2F1E4D0A}"/>
+      <thm15:themeFamily xmlns:thm15="http://schemas.microsoft.com/office/thememl/2012/main" name="Office Theme" id="{62F939B6-93AF-4DB8-9C6B-D6C7DFDC589F}" vid="{4A3C46E8-61CC-4603-A589-7422A47A8E4A}"/>
     </a:ext>
   </a:extLst>
 </a:theme>

--- a/Presentation1.pptx
+++ b/Presentation1.pptx
@@ -5553,7 +5553,7 @@
             <a:pPr algn="ctr"/>
             <a:r>
               <a:rPr lang="en-US" sz="2000" b="1" dirty="0"/>
-              <a:t>Team Name:  </a:t>
+              <a:t>Team:  </a:t>
             </a:r>
             <a:r>
               <a:rPr lang="en-US" sz="2000" b="1" dirty="0">

--- a/Presentation1.pptx
+++ b/Presentation1.pptx
@@ -8,6 +8,7 @@
     <p:sldId id="256" r:id="rId2"/>
     <p:sldId id="257" r:id="rId3"/>
     <p:sldId id="258" r:id="rId4"/>
+    <p:sldId id="259" r:id="rId5"/>
   </p:sldIdLst>
   <p:sldSz cx="12192000" cy="6858000"/>
   <p:notesSz cx="6858000" cy="9144000"/>
@@ -5893,10 +5894,205 @@
           </a:p>
         </p:txBody>
       </p:sp>
+      <p:sp>
+        <p:nvSpPr>
+          <p:cNvPr id="6" name="TextBox 5">
+            <a:extLst>
+              <a:ext uri="{FF2B5EF4-FFF2-40B4-BE49-F238E27FC236}">
+                <a16:creationId xmlns:a16="http://schemas.microsoft.com/office/drawing/2014/main" id="{C6C624F5-59E4-BACE-07A1-5FB5F61F558D}"/>
+              </a:ext>
+            </a:extLst>
+          </p:cNvPr>
+          <p:cNvSpPr txBox="1"/>
+          <p:nvPr/>
+        </p:nvSpPr>
+        <p:spPr>
+          <a:xfrm>
+            <a:off x="2639859" y="4990985"/>
+            <a:ext cx="6912279" cy="369332"/>
+          </a:xfrm>
+          <a:prstGeom prst="rect">
+            <a:avLst/>
+          </a:prstGeom>
+          <a:noFill/>
+        </p:spPr>
+        <p:txBody>
+          <a:bodyPr wrap="square" rtlCol="0">
+            <a:spAutoFit/>
+          </a:bodyPr>
+          <a:lstStyle/>
+          <a:p>
+            <a:pPr algn="ctr"/>
+            <a:r>
+              <a:rPr lang="en-US" dirty="0"/>
+              <a:t>Link to App: </a:t>
+            </a:r>
+            <a:r>
+              <a:rPr lang="en-US" dirty="0">
+                <a:hlinkClick r:id="rId2"/>
+              </a:rPr>
+              <a:t>Welcome Wingman</a:t>
+            </a:r>
+            <a:endParaRPr lang="en-US" dirty="0"/>
+          </a:p>
+        </p:txBody>
+      </p:sp>
     </p:spTree>
     <p:extLst>
       <p:ext uri="{BB962C8B-B14F-4D97-AF65-F5344CB8AC3E}">
         <p14:creationId xmlns:p14="http://schemas.microsoft.com/office/powerpoint/2010/main" val="495641691"/>
+      </p:ext>
+    </p:extLst>
+  </p:cSld>
+  <p:clrMapOvr>
+    <a:masterClrMapping/>
+  </p:clrMapOvr>
+</p:sld>
+</file>
+
+<file path=ppt/slides/slide4.xml><?xml version="1.0" encoding="utf-8"?>
+<p:sld xmlns:a="http://schemas.openxmlformats.org/drawingml/2006/main" xmlns:r="http://schemas.openxmlformats.org/officeDocument/2006/relationships" xmlns:p="http://schemas.openxmlformats.org/presentationml/2006/main">
+  <p:cSld>
+    <p:spTree>
+      <p:nvGrpSpPr>
+        <p:cNvPr id="1" name=""/>
+        <p:cNvGrpSpPr/>
+        <p:nvPr/>
+      </p:nvGrpSpPr>
+      <p:grpSpPr>
+        <a:xfrm>
+          <a:off x="0" y="0"/>
+          <a:ext cx="0" cy="0"/>
+          <a:chOff x="0" y="0"/>
+          <a:chExt cx="0" cy="0"/>
+        </a:xfrm>
+      </p:grpSpPr>
+      <p:sp>
+        <p:nvSpPr>
+          <p:cNvPr id="4" name="TextBox 3">
+            <a:extLst>
+              <a:ext uri="{FF2B5EF4-FFF2-40B4-BE49-F238E27FC236}">
+                <a16:creationId xmlns:a16="http://schemas.microsoft.com/office/drawing/2014/main" id="{36906355-DF2A-7705-85A5-A93BB5A58CE5}"/>
+              </a:ext>
+            </a:extLst>
+          </p:cNvPr>
+          <p:cNvSpPr txBox="1"/>
+          <p:nvPr/>
+        </p:nvSpPr>
+        <p:spPr>
+          <a:xfrm>
+            <a:off x="3283907" y="1427245"/>
+            <a:ext cx="5624186" cy="400110"/>
+          </a:xfrm>
+          <a:prstGeom prst="rect">
+            <a:avLst/>
+          </a:prstGeom>
+          <a:noFill/>
+        </p:spPr>
+        <p:txBody>
+          <a:bodyPr wrap="square" rtlCol="0">
+            <a:spAutoFit/>
+          </a:bodyPr>
+          <a:lstStyle/>
+          <a:p>
+            <a:pPr algn="ctr"/>
+            <a:r>
+              <a:rPr lang="en-US" sz="2000" b="1" dirty="0"/>
+              <a:t>Future Features</a:t>
+            </a:r>
+          </a:p>
+        </p:txBody>
+      </p:sp>
+      <p:sp>
+        <p:nvSpPr>
+          <p:cNvPr id="5" name="TextBox 4">
+            <a:extLst>
+              <a:ext uri="{FF2B5EF4-FFF2-40B4-BE49-F238E27FC236}">
+                <a16:creationId xmlns:a16="http://schemas.microsoft.com/office/drawing/2014/main" id="{A9B15DA2-4663-FD9E-D12B-FBB70B895DD1}"/>
+              </a:ext>
+            </a:extLst>
+          </p:cNvPr>
+          <p:cNvSpPr txBox="1"/>
+          <p:nvPr/>
+        </p:nvSpPr>
+        <p:spPr>
+          <a:xfrm>
+            <a:off x="2639860" y="2567836"/>
+            <a:ext cx="6912279" cy="2031325"/>
+          </a:xfrm>
+          <a:prstGeom prst="rect">
+            <a:avLst/>
+          </a:prstGeom>
+          <a:noFill/>
+        </p:spPr>
+        <p:txBody>
+          <a:bodyPr wrap="square" rtlCol="0">
+            <a:spAutoFit/>
+          </a:bodyPr>
+          <a:lstStyle/>
+          <a:p>
+            <a:pPr marL="285750" indent="-285750" algn="just">
+              <a:buFont typeface="Arial" panose="020B0604020202020204" pitchFamily="34" charset="0"/>
+              <a:buChar char="•"/>
+            </a:pPr>
+            <a:r>
+              <a:rPr lang="en-US" dirty="0"/>
+              <a:t>Form Upload and Validation</a:t>
+            </a:r>
+          </a:p>
+          <a:p>
+            <a:pPr marL="285750" indent="-285750" algn="just">
+              <a:buFont typeface="Arial" panose="020B0604020202020204" pitchFamily="34" charset="0"/>
+              <a:buChar char="•"/>
+            </a:pPr>
+            <a:r>
+              <a:rPr lang="en-US" dirty="0"/>
+              <a:t>File Storage for user avatar</a:t>
+            </a:r>
+          </a:p>
+          <a:p>
+            <a:pPr marL="285750" indent="-285750" algn="just">
+              <a:buFont typeface="Arial" panose="020B0604020202020204" pitchFamily="34" charset="0"/>
+              <a:buChar char="•"/>
+            </a:pPr>
+            <a:r>
+              <a:rPr lang="en-US" dirty="0"/>
+              <a:t>Training and Certifications page</a:t>
+            </a:r>
+          </a:p>
+          <a:p>
+            <a:pPr marL="742950" lvl="1" indent="-285750" algn="just">
+              <a:buFont typeface="Arial" panose="020B0604020202020204" pitchFamily="34" charset="0"/>
+              <a:buChar char="•"/>
+            </a:pPr>
+            <a:r>
+              <a:rPr lang="en-US" dirty="0"/>
+              <a:t>Annual Certifications</a:t>
+            </a:r>
+          </a:p>
+          <a:p>
+            <a:pPr marL="285750" indent="-285750" algn="just">
+              <a:buFont typeface="Arial" panose="020B0604020202020204" pitchFamily="34" charset="0"/>
+              <a:buChar char="•"/>
+            </a:pPr>
+            <a:r>
+              <a:rPr lang="en-US" dirty="0"/>
+              <a:t>Expand to become an overall Task Management system, not just for in-processing</a:t>
+            </a:r>
+          </a:p>
+          <a:p>
+            <a:pPr marL="742950" lvl="1" indent="-285750" algn="just">
+              <a:buFont typeface="Arial" panose="020B0604020202020204" pitchFamily="34" charset="0"/>
+              <a:buChar char="•"/>
+            </a:pPr>
+            <a:endParaRPr lang="en-US" dirty="0"/>
+          </a:p>
+        </p:txBody>
+      </p:sp>
+    </p:spTree>
+    <p:extLst>
+      <p:ext uri="{BB962C8B-B14F-4D97-AF65-F5344CB8AC3E}">
+        <p14:creationId xmlns:p14="http://schemas.microsoft.com/office/powerpoint/2010/main" val="1732903935"/>
       </p:ext>
     </p:extLst>
   </p:cSld>
